--- a/Documents/PantryChef.pptx
+++ b/Documents/PantryChef.pptx
@@ -14,20 +14,26 @@
     <p:sldId id="262" r:id="rId8"/>
     <p:sldId id="263" r:id="rId9"/>
     <p:sldId id="264" r:id="rId10"/>
-    <p:sldId id="265" r:id="rId11"/>
-    <p:sldId id="266" r:id="rId12"/>
-    <p:sldId id="267" r:id="rId13"/>
-    <p:sldId id="268" r:id="rId14"/>
+    <p:sldId id="266" r:id="rId11"/>
+    <p:sldId id="267" r:id="rId12"/>
   </p:sldIdLst>
   <p:sldSz cx="18288000" cy="10287000"/>
   <p:notesSz cx="6858000" cy="9144000"/>
   <p:embeddedFontLst>
     <p:embeddedFont>
+      <p:font typeface="IBM Plex Serif Italics" panose="020B0604020202020204" charset="-52"/>
+      <p:regular r:id="rId13"/>
+    </p:embeddedFont>
+    <p:embeddedFont>
       <p:font typeface="IBM Plex Serif" panose="020B0604020202020204" charset="-52"/>
+      <p:regular r:id="rId14"/>
+    </p:embeddedFont>
+    <p:embeddedFont>
+      <p:font typeface="Canva Sans Bold" panose="020B0604020202020204" charset="0"/>
       <p:regular r:id="rId15"/>
     </p:embeddedFont>
     <p:embeddedFont>
-      <p:font typeface="Canva Sans Bold" panose="020B0604020202020204" charset="0"/>
+      <p:font typeface="Canva Sans" panose="020B0604020202020204" charset="0"/>
       <p:regular r:id="rId16"/>
     </p:embeddedFont>
     <p:embeddedFont>
@@ -36,14 +42,6 @@
       <p:bold r:id="rId18"/>
       <p:italic r:id="rId19"/>
       <p:boldItalic r:id="rId20"/>
-    </p:embeddedFont>
-    <p:embeddedFont>
-      <p:font typeface="Canva Sans" panose="020B0604020202020204" charset="0"/>
-      <p:regular r:id="rId21"/>
-    </p:embeddedFont>
-    <p:embeddedFont>
-      <p:font typeface="IBM Plex Serif Italics" panose="020B0604020202020204" charset="-52"/>
-      <p:regular r:id="rId22"/>
     </p:embeddedFont>
   </p:embeddedFontLst>
   <p:defaultTextStyle>
@@ -326,7 +324,7 @@
             <a:fld id="{1D8BD707-D9CF-40AE-B4C6-C98DA3205C09}" type="datetimeFigureOut">
               <a:rPr lang="en-US" smtClean="0"/>
               <a:pPr/>
-              <a:t>2/26/2026</a:t>
+              <a:t>3/2/2026</a:t>
             </a:fld>
             <a:endParaRPr lang="en-US"/>
           </a:p>
@@ -493,7 +491,7 @@
             <a:fld id="{1D8BD707-D9CF-40AE-B4C6-C98DA3205C09}" type="datetimeFigureOut">
               <a:rPr lang="en-US" smtClean="0"/>
               <a:pPr/>
-              <a:t>2/26/2026</a:t>
+              <a:t>3/2/2026</a:t>
             </a:fld>
             <a:endParaRPr lang="en-US"/>
           </a:p>
@@ -670,7 +668,7 @@
             <a:fld id="{1D8BD707-D9CF-40AE-B4C6-C98DA3205C09}" type="datetimeFigureOut">
               <a:rPr lang="en-US" smtClean="0"/>
               <a:pPr/>
-              <a:t>2/26/2026</a:t>
+              <a:t>3/2/2026</a:t>
             </a:fld>
             <a:endParaRPr lang="en-US"/>
           </a:p>
@@ -837,7 +835,7 @@
             <a:fld id="{1D8BD707-D9CF-40AE-B4C6-C98DA3205C09}" type="datetimeFigureOut">
               <a:rPr lang="en-US" smtClean="0"/>
               <a:pPr/>
-              <a:t>2/26/2026</a:t>
+              <a:t>3/2/2026</a:t>
             </a:fld>
             <a:endParaRPr lang="en-US"/>
           </a:p>
@@ -1080,7 +1078,7 @@
             <a:fld id="{1D8BD707-D9CF-40AE-B4C6-C98DA3205C09}" type="datetimeFigureOut">
               <a:rPr lang="en-US" smtClean="0"/>
               <a:pPr/>
-              <a:t>2/26/2026</a:t>
+              <a:t>3/2/2026</a:t>
             </a:fld>
             <a:endParaRPr lang="en-US"/>
           </a:p>
@@ -1365,7 +1363,7 @@
             <a:fld id="{1D8BD707-D9CF-40AE-B4C6-C98DA3205C09}" type="datetimeFigureOut">
               <a:rPr lang="en-US" smtClean="0"/>
               <a:pPr/>
-              <a:t>2/26/2026</a:t>
+              <a:t>3/2/2026</a:t>
             </a:fld>
             <a:endParaRPr lang="en-US"/>
           </a:p>
@@ -1784,7 +1782,7 @@
             <a:fld id="{1D8BD707-D9CF-40AE-B4C6-C98DA3205C09}" type="datetimeFigureOut">
               <a:rPr lang="en-US" smtClean="0"/>
               <a:pPr/>
-              <a:t>2/26/2026</a:t>
+              <a:t>3/2/2026</a:t>
             </a:fld>
             <a:endParaRPr lang="en-US"/>
           </a:p>
@@ -1899,7 +1897,7 @@
             <a:fld id="{1D8BD707-D9CF-40AE-B4C6-C98DA3205C09}" type="datetimeFigureOut">
               <a:rPr lang="en-US" smtClean="0"/>
               <a:pPr/>
-              <a:t>2/26/2026</a:t>
+              <a:t>3/2/2026</a:t>
             </a:fld>
             <a:endParaRPr lang="en-US"/>
           </a:p>
@@ -1991,7 +1989,7 @@
             <a:fld id="{1D8BD707-D9CF-40AE-B4C6-C98DA3205C09}" type="datetimeFigureOut">
               <a:rPr lang="en-US" smtClean="0"/>
               <a:pPr/>
-              <a:t>2/26/2026</a:t>
+              <a:t>3/2/2026</a:t>
             </a:fld>
             <a:endParaRPr lang="en-US"/>
           </a:p>
@@ -2265,7 +2263,7 @@
             <a:fld id="{1D8BD707-D9CF-40AE-B4C6-C98DA3205C09}" type="datetimeFigureOut">
               <a:rPr lang="en-US" smtClean="0"/>
               <a:pPr/>
-              <a:t>2/26/2026</a:t>
+              <a:t>3/2/2026</a:t>
             </a:fld>
             <a:endParaRPr lang="en-US"/>
           </a:p>
@@ -2515,7 +2513,7 @@
             <a:fld id="{1D8BD707-D9CF-40AE-B4C6-C98DA3205C09}" type="datetimeFigureOut">
               <a:rPr lang="en-US" smtClean="0"/>
               <a:pPr/>
-              <a:t>2/26/2026</a:t>
+              <a:t>3/2/2026</a:t>
             </a:fld>
             <a:endParaRPr lang="en-US"/>
           </a:p>
@@ -2725,7 +2723,7 @@
             <a:fld id="{1D8BD707-D9CF-40AE-B4C6-C98DA3205C09}" type="datetimeFigureOut">
               <a:rPr lang="en-US" smtClean="0"/>
               <a:pPr/>
-              <a:t>2/26/2026</a:t>
+              <a:t>3/2/2026</a:t>
             </a:fld>
             <a:endParaRPr lang="en-US"/>
           </a:p>
@@ -3112,7 +3110,7 @@
         </p:nvSpPr>
         <p:spPr>
           <a:xfrm>
-            <a:off x="794193" y="8857298"/>
+            <a:off x="12268200" y="7429500"/>
             <a:ext cx="2547610" cy="396240"/>
           </a:xfrm>
           <a:prstGeom prst="rect">
@@ -3131,7 +3129,7 @@
               </a:lnSpc>
             </a:pPr>
             <a:r>
-              <a:rPr lang="en-US" sz="2400" b="1" spc="-48">
+              <a:rPr lang="en-US" sz="2400" b="1" spc="-48" dirty="0">
                 <a:solidFill>
                   <a:srgbClr val="36211B"/>
                 </a:solidFill>
@@ -3153,62 +3151,171 @@
         </p:nvSpPr>
         <p:spPr>
           <a:xfrm>
-            <a:off x="9144000" y="8857298"/>
-            <a:ext cx="2638864" cy="396240"/>
+            <a:off x="14478000" y="7429500"/>
+            <a:ext cx="3533436" cy="2180084"/>
           </a:xfrm>
           <a:prstGeom prst="rect">
             <a:avLst/>
           </a:prstGeom>
         </p:spPr>
         <p:txBody>
-          <a:bodyPr lIns="0" tIns="0" rIns="0" bIns="0" rtlCol="0" anchor="t">
+          <a:bodyPr wrap="square" lIns="0" tIns="0" rIns="0" bIns="0" rtlCol="0" anchor="t">
             <a:spAutoFit/>
           </a:bodyPr>
           <a:lstStyle/>
           <a:p>
-            <a:pPr algn="r">
+            <a:pPr>
               <a:lnSpc>
                 <a:spcPts val="3359"/>
               </a:lnSpc>
             </a:pPr>
             <a:r>
-              <a:rPr lang="en-US" sz="2400" spc="-48">
-                <a:solidFill>
-                  <a:srgbClr val="36211B"/>
-                </a:solidFill>
-                <a:latin typeface="Canva Sans"/>
-                <a:ea typeface="Canva Sans"/>
-                <a:cs typeface="Canva Sans"/>
-                <a:sym typeface="Canva Sans"/>
-              </a:rPr>
-              <a:t>Боцьків Любомир</a:t>
-            </a:r>
+              <a:rPr lang="uk-UA" sz="2400" spc="-48" dirty="0" err="1" smtClean="0">
+                <a:solidFill>
+                  <a:srgbClr val="36211B"/>
+                </a:solidFill>
+                <a:latin typeface="Canva Sans"/>
+                <a:ea typeface="Canva Sans"/>
+                <a:cs typeface="Canva Sans"/>
+                <a:sym typeface="Canva Sans"/>
+              </a:rPr>
+              <a:t>Галух</a:t>
+            </a:r>
+            <a:r>
+              <a:rPr lang="uk-UA" sz="2400" spc="-48" dirty="0" smtClean="0">
+                <a:solidFill>
+                  <a:srgbClr val="36211B"/>
+                </a:solidFill>
+                <a:latin typeface="Canva Sans"/>
+                <a:ea typeface="Canva Sans"/>
+                <a:cs typeface="Canva Sans"/>
+                <a:sym typeface="Canva Sans"/>
+              </a:rPr>
+              <a:t> Антон   </a:t>
+            </a:r>
+          </a:p>
+          <a:p>
+            <a:pPr>
+              <a:lnSpc>
+                <a:spcPts val="3359"/>
+              </a:lnSpc>
+            </a:pPr>
+            <a:r>
+              <a:rPr lang="uk-UA" sz="2400" spc="-48" dirty="0" smtClean="0">
+                <a:solidFill>
+                  <a:srgbClr val="36211B"/>
+                </a:solidFill>
+                <a:latin typeface="Canva Sans"/>
+                <a:ea typeface="Canva Sans"/>
+                <a:cs typeface="Canva Sans"/>
+                <a:sym typeface="Canva Sans"/>
+              </a:rPr>
+              <a:t>Ковальчук  Влад</a:t>
+            </a:r>
+          </a:p>
+          <a:p>
+            <a:pPr>
+              <a:lnSpc>
+                <a:spcPts val="3359"/>
+              </a:lnSpc>
+            </a:pPr>
+            <a:r>
+              <a:rPr lang="uk-UA" sz="2400" spc="-48" dirty="0" err="1" smtClean="0">
+                <a:solidFill>
+                  <a:srgbClr val="36211B"/>
+                </a:solidFill>
+                <a:latin typeface="Canva Sans"/>
+                <a:ea typeface="Canva Sans"/>
+                <a:cs typeface="Canva Sans"/>
+                <a:sym typeface="Canva Sans"/>
+              </a:rPr>
+              <a:t>Джавала</a:t>
+            </a:r>
+            <a:r>
+              <a:rPr lang="uk-UA" sz="2400" spc="-48" dirty="0" smtClean="0">
+                <a:solidFill>
+                  <a:srgbClr val="36211B"/>
+                </a:solidFill>
+                <a:latin typeface="Canva Sans"/>
+                <a:ea typeface="Canva Sans"/>
+                <a:cs typeface="Canva Sans"/>
+                <a:sym typeface="Canva Sans"/>
+              </a:rPr>
+              <a:t> Анна</a:t>
+            </a:r>
+          </a:p>
+          <a:p>
+            <a:pPr>
+              <a:lnSpc>
+                <a:spcPts val="3359"/>
+              </a:lnSpc>
+            </a:pPr>
+            <a:r>
+              <a:rPr lang="uk-UA" sz="2400" spc="-48" dirty="0" err="1" smtClean="0">
+                <a:solidFill>
+                  <a:srgbClr val="36211B"/>
+                </a:solidFill>
+                <a:latin typeface="Canva Sans"/>
+                <a:ea typeface="Canva Sans"/>
+                <a:cs typeface="Canva Sans"/>
+                <a:sym typeface="Canva Sans"/>
+              </a:rPr>
+              <a:t>Кахновець</a:t>
+            </a:r>
+            <a:r>
+              <a:rPr lang="uk-UA" sz="2400" spc="-48" dirty="0" smtClean="0">
+                <a:solidFill>
+                  <a:srgbClr val="36211B"/>
+                </a:solidFill>
+                <a:latin typeface="Canva Sans"/>
+                <a:ea typeface="Canva Sans"/>
+                <a:cs typeface="Canva Sans"/>
+                <a:sym typeface="Canva Sans"/>
+              </a:rPr>
+              <a:t> Андрій</a:t>
+            </a:r>
+          </a:p>
+          <a:p>
+            <a:pPr>
+              <a:lnSpc>
+                <a:spcPts val="3359"/>
+              </a:lnSpc>
+            </a:pPr>
+            <a:r>
+              <a:rPr lang="uk-UA" sz="2400" spc="-48" dirty="0" err="1" smtClean="0">
+                <a:solidFill>
+                  <a:srgbClr val="36211B"/>
+                </a:solidFill>
+                <a:latin typeface="Canva Sans"/>
+                <a:ea typeface="Canva Sans"/>
+                <a:cs typeface="Canva Sans"/>
+                <a:sym typeface="Canva Sans"/>
+              </a:rPr>
+              <a:t>Чвартковська</a:t>
+            </a:r>
+            <a:r>
+              <a:rPr lang="uk-UA" sz="2400" spc="-48" dirty="0" smtClean="0">
+                <a:solidFill>
+                  <a:srgbClr val="36211B"/>
+                </a:solidFill>
+                <a:latin typeface="Canva Sans"/>
+                <a:ea typeface="Canva Sans"/>
+                <a:cs typeface="Canva Sans"/>
+                <a:sym typeface="Canva Sans"/>
+              </a:rPr>
+              <a:t> Соломія</a:t>
+            </a:r>
+            <a:endParaRPr lang="en-US" sz="2400" spc="-48" dirty="0">
+              <a:solidFill>
+                <a:srgbClr val="36211B"/>
+              </a:solidFill>
+              <a:latin typeface="Canva Sans"/>
+              <a:ea typeface="Canva Sans"/>
+              <a:cs typeface="Canva Sans"/>
+              <a:sym typeface="Canva Sans"/>
+            </a:endParaRPr>
           </a:p>
         </p:txBody>
-      </p:sp>
-      <p:sp>
-        <p:nvSpPr>
-          <p:cNvPr id="4" name="AutoShape 4"/>
-          <p:cNvSpPr/>
-          <p:nvPr/>
-        </p:nvSpPr>
-        <p:spPr>
-          <a:xfrm>
-            <a:off x="3341803" y="9074467"/>
-            <a:ext cx="5802197" cy="0"/>
-          </a:xfrm>
-          <a:prstGeom prst="line">
-            <a:avLst/>
-          </a:prstGeom>
-          <a:ln w="9525" cap="flat">
-            <a:solidFill>
-              <a:srgbClr val="36211B"/>
-            </a:solidFill>
-            <a:prstDash val="solid"/>
-            <a:headEnd type="none" w="sm" len="sm"/>
-            <a:tailEnd type="none" w="sm" len="sm"/>
-          </a:ln>
-        </p:spPr>
       </p:sp>
       <p:sp>
         <p:nvSpPr>
@@ -3259,7 +3366,7 @@
         </p:nvSpPr>
         <p:spPr>
           <a:xfrm>
-            <a:off x="3662490" y="5854278"/>
+            <a:off x="3662490" y="5524500"/>
             <a:ext cx="10963021" cy="1261110"/>
           </a:xfrm>
           <a:prstGeom prst="rect">
@@ -3278,7 +3385,7 @@
               </a:lnSpc>
             </a:pPr>
             <a:r>
-              <a:rPr lang="en-US" sz="3600" i="1" spc="-144">
+              <a:rPr lang="en-US" sz="3600" i="1" spc="-144" dirty="0" err="1">
                 <a:solidFill>
                   <a:srgbClr val="36211B"/>
                 </a:solidFill>
@@ -3287,90 +3394,281 @@
                 <a:cs typeface="IBM Plex Serif Italics"/>
                 <a:sym typeface="IBM Plex Serif Italics"/>
               </a:rPr>
-              <a:t>Інноваційний підхід до планування вашого раціону: від контролю холодильника до досягнення цілей</a:t>
-            </a:r>
-          </a:p>
-        </p:txBody>
-      </p:sp>
-      <p:sp>
-        <p:nvSpPr>
-          <p:cNvPr id="7" name="TextBox 7"/>
-          <p:cNvSpPr txBox="1"/>
-          <p:nvPr/>
-        </p:nvSpPr>
-        <p:spPr>
-          <a:xfrm>
-            <a:off x="12308576" y="8862060"/>
-            <a:ext cx="1998594" cy="396240"/>
-          </a:xfrm>
-          <a:prstGeom prst="rect">
-            <a:avLst/>
-          </a:prstGeom>
-        </p:spPr>
-        <p:txBody>
-          <a:bodyPr lIns="0" tIns="0" rIns="0" bIns="0" rtlCol="0" anchor="t">
-            <a:spAutoFit/>
-          </a:bodyPr>
-          <a:lstStyle/>
-          <a:p>
-            <a:pPr algn="r">
-              <a:lnSpc>
-                <a:spcPts val="3359"/>
-              </a:lnSpc>
-            </a:pPr>
-            <a:r>
-              <a:rPr lang="en-US" sz="2400" spc="-48">
-                <a:solidFill>
-                  <a:srgbClr val="36211B"/>
-                </a:solidFill>
-                <a:latin typeface="Canva Sans"/>
-                <a:ea typeface="Canva Sans"/>
-                <a:cs typeface="Canva Sans"/>
-                <a:sym typeface="Canva Sans"/>
-              </a:rPr>
-              <a:t>Галух Антон</a:t>
-            </a:r>
-          </a:p>
-        </p:txBody>
-      </p:sp>
-      <p:sp>
-        <p:nvSpPr>
-          <p:cNvPr id="8" name="TextBox 8"/>
-          <p:cNvSpPr txBox="1"/>
-          <p:nvPr/>
-        </p:nvSpPr>
-        <p:spPr>
-          <a:xfrm>
-            <a:off x="14831045" y="8862060"/>
-            <a:ext cx="2428255" cy="396240"/>
-          </a:xfrm>
-          <a:prstGeom prst="rect">
-            <a:avLst/>
-          </a:prstGeom>
-        </p:spPr>
-        <p:txBody>
-          <a:bodyPr lIns="0" tIns="0" rIns="0" bIns="0" rtlCol="0" anchor="t">
-            <a:spAutoFit/>
-          </a:bodyPr>
-          <a:lstStyle/>
-          <a:p>
-            <a:pPr algn="r">
-              <a:lnSpc>
-                <a:spcPts val="3359"/>
-              </a:lnSpc>
-            </a:pPr>
-            <a:r>
-              <a:rPr lang="en-US" sz="2400" spc="-48">
-                <a:solidFill>
-                  <a:srgbClr val="36211B"/>
-                </a:solidFill>
-                <a:latin typeface="Canva Sans"/>
-                <a:ea typeface="Canva Sans"/>
-                <a:cs typeface="Canva Sans"/>
-                <a:sym typeface="Canva Sans"/>
-              </a:rPr>
-              <a:t>Галух Валентин</a:t>
-            </a:r>
+              <a:t>Інноваційний</a:t>
+            </a:r>
+            <a:r>
+              <a:rPr lang="en-US" sz="3600" i="1" spc="-144" dirty="0">
+                <a:solidFill>
+                  <a:srgbClr val="36211B"/>
+                </a:solidFill>
+                <a:latin typeface="IBM Plex Serif Italics"/>
+                <a:ea typeface="IBM Plex Serif Italics"/>
+                <a:cs typeface="IBM Plex Serif Italics"/>
+                <a:sym typeface="IBM Plex Serif Italics"/>
+              </a:rPr>
+              <a:t> </a:t>
+            </a:r>
+            <a:r>
+              <a:rPr lang="en-US" sz="3600" i="1" spc="-144" dirty="0" err="1">
+                <a:solidFill>
+                  <a:srgbClr val="36211B"/>
+                </a:solidFill>
+                <a:latin typeface="IBM Plex Serif Italics"/>
+                <a:ea typeface="IBM Plex Serif Italics"/>
+                <a:cs typeface="IBM Plex Serif Italics"/>
+                <a:sym typeface="IBM Plex Serif Italics"/>
+              </a:rPr>
+              <a:t>підхід</a:t>
+            </a:r>
+            <a:r>
+              <a:rPr lang="en-US" sz="3600" i="1" spc="-144" dirty="0">
+                <a:solidFill>
+                  <a:srgbClr val="36211B"/>
+                </a:solidFill>
+                <a:latin typeface="IBM Plex Serif Italics"/>
+                <a:ea typeface="IBM Plex Serif Italics"/>
+                <a:cs typeface="IBM Plex Serif Italics"/>
+                <a:sym typeface="IBM Plex Serif Italics"/>
+              </a:rPr>
+              <a:t> </a:t>
+            </a:r>
+            <a:r>
+              <a:rPr lang="en-US" sz="3600" i="1" spc="-144" dirty="0" err="1">
+                <a:solidFill>
+                  <a:srgbClr val="36211B"/>
+                </a:solidFill>
+                <a:latin typeface="IBM Plex Serif Italics"/>
+                <a:ea typeface="IBM Plex Serif Italics"/>
+                <a:cs typeface="IBM Plex Serif Italics"/>
+                <a:sym typeface="IBM Plex Serif Italics"/>
+              </a:rPr>
+              <a:t>до</a:t>
+            </a:r>
+            <a:r>
+              <a:rPr lang="en-US" sz="3600" i="1" spc="-144" dirty="0">
+                <a:solidFill>
+                  <a:srgbClr val="36211B"/>
+                </a:solidFill>
+                <a:latin typeface="IBM Plex Serif Italics"/>
+                <a:ea typeface="IBM Plex Serif Italics"/>
+                <a:cs typeface="IBM Plex Serif Italics"/>
+                <a:sym typeface="IBM Plex Serif Italics"/>
+              </a:rPr>
+              <a:t> </a:t>
+            </a:r>
+            <a:r>
+              <a:rPr lang="en-US" sz="3600" i="1" spc="-144" dirty="0" err="1">
+                <a:solidFill>
+                  <a:srgbClr val="36211B"/>
+                </a:solidFill>
+                <a:latin typeface="IBM Plex Serif Italics"/>
+                <a:ea typeface="IBM Plex Serif Italics"/>
+                <a:cs typeface="IBM Plex Serif Italics"/>
+                <a:sym typeface="IBM Plex Serif Italics"/>
+              </a:rPr>
+              <a:t>планування</a:t>
+            </a:r>
+            <a:r>
+              <a:rPr lang="en-US" sz="3600" i="1" spc="-144" dirty="0">
+                <a:solidFill>
+                  <a:srgbClr val="36211B"/>
+                </a:solidFill>
+                <a:latin typeface="IBM Plex Serif Italics"/>
+                <a:ea typeface="IBM Plex Serif Italics"/>
+                <a:cs typeface="IBM Plex Serif Italics"/>
+                <a:sym typeface="IBM Plex Serif Italics"/>
+              </a:rPr>
+              <a:t> </a:t>
+            </a:r>
+            <a:r>
+              <a:rPr lang="en-US" sz="3600" i="1" spc="-144" dirty="0" err="1">
+                <a:solidFill>
+                  <a:srgbClr val="36211B"/>
+                </a:solidFill>
+                <a:latin typeface="IBM Plex Serif Italics"/>
+                <a:ea typeface="IBM Plex Serif Italics"/>
+                <a:cs typeface="IBM Plex Serif Italics"/>
+                <a:sym typeface="IBM Plex Serif Italics"/>
+              </a:rPr>
+              <a:t>вашого</a:t>
+            </a:r>
+            <a:r>
+              <a:rPr lang="en-US" sz="3600" i="1" spc="-144" dirty="0">
+                <a:solidFill>
+                  <a:srgbClr val="36211B"/>
+                </a:solidFill>
+                <a:latin typeface="IBM Plex Serif Italics"/>
+                <a:ea typeface="IBM Plex Serif Italics"/>
+                <a:cs typeface="IBM Plex Serif Italics"/>
+                <a:sym typeface="IBM Plex Serif Italics"/>
+              </a:rPr>
+              <a:t> </a:t>
+            </a:r>
+            <a:r>
+              <a:rPr lang="en-US" sz="3600" i="1" spc="-144" dirty="0" err="1">
+                <a:solidFill>
+                  <a:srgbClr val="36211B"/>
+                </a:solidFill>
+                <a:latin typeface="IBM Plex Serif Italics"/>
+                <a:ea typeface="IBM Plex Serif Italics"/>
+                <a:cs typeface="IBM Plex Serif Italics"/>
+                <a:sym typeface="IBM Plex Serif Italics"/>
+              </a:rPr>
+              <a:t>раціону</a:t>
+            </a:r>
+            <a:r>
+              <a:rPr lang="en-US" sz="3600" i="1" spc="-144" dirty="0">
+                <a:solidFill>
+                  <a:srgbClr val="36211B"/>
+                </a:solidFill>
+                <a:latin typeface="IBM Plex Serif Italics"/>
+                <a:ea typeface="IBM Plex Serif Italics"/>
+                <a:cs typeface="IBM Plex Serif Italics"/>
+                <a:sym typeface="IBM Plex Serif Italics"/>
+              </a:rPr>
+              <a:t>: </a:t>
+            </a:r>
+            <a:r>
+              <a:rPr lang="en-US" sz="3600" i="1" spc="-144" dirty="0" err="1">
+                <a:solidFill>
+                  <a:srgbClr val="36211B"/>
+                </a:solidFill>
+                <a:latin typeface="IBM Plex Serif Italics"/>
+                <a:ea typeface="IBM Plex Serif Italics"/>
+                <a:cs typeface="IBM Plex Serif Italics"/>
+                <a:sym typeface="IBM Plex Serif Italics"/>
+              </a:rPr>
+              <a:t>від</a:t>
+            </a:r>
+            <a:r>
+              <a:rPr lang="en-US" sz="3600" i="1" spc="-144" dirty="0">
+                <a:solidFill>
+                  <a:srgbClr val="36211B"/>
+                </a:solidFill>
+                <a:latin typeface="IBM Plex Serif Italics"/>
+                <a:ea typeface="IBM Plex Serif Italics"/>
+                <a:cs typeface="IBM Plex Serif Italics"/>
+                <a:sym typeface="IBM Plex Serif Italics"/>
+              </a:rPr>
+              <a:t> </a:t>
+            </a:r>
+            <a:r>
+              <a:rPr lang="en-US" sz="3600" i="1" spc="-144" dirty="0" err="1">
+                <a:solidFill>
+                  <a:srgbClr val="36211B"/>
+                </a:solidFill>
+                <a:latin typeface="IBM Plex Serif Italics"/>
+                <a:ea typeface="IBM Plex Serif Italics"/>
+                <a:cs typeface="IBM Plex Serif Italics"/>
+                <a:sym typeface="IBM Plex Serif Italics"/>
+              </a:rPr>
+              <a:t>контролю</a:t>
+            </a:r>
+            <a:r>
+              <a:rPr lang="en-US" sz="3600" i="1" spc="-144" dirty="0">
+                <a:solidFill>
+                  <a:srgbClr val="36211B"/>
+                </a:solidFill>
+                <a:latin typeface="IBM Plex Serif Italics"/>
+                <a:ea typeface="IBM Plex Serif Italics"/>
+                <a:cs typeface="IBM Plex Serif Italics"/>
+                <a:sym typeface="IBM Plex Serif Italics"/>
+              </a:rPr>
+              <a:t> </a:t>
+            </a:r>
+            <a:r>
+              <a:rPr lang="en-US" sz="3600" i="1" spc="-144" dirty="0" err="1">
+                <a:solidFill>
+                  <a:srgbClr val="36211B"/>
+                </a:solidFill>
+                <a:latin typeface="IBM Plex Serif Italics"/>
+                <a:ea typeface="IBM Plex Serif Italics"/>
+                <a:cs typeface="IBM Plex Serif Italics"/>
+                <a:sym typeface="IBM Plex Serif Italics"/>
+              </a:rPr>
+              <a:t>холодильника</a:t>
+            </a:r>
+            <a:r>
+              <a:rPr lang="en-US" sz="3600" i="1" spc="-144" dirty="0">
+                <a:solidFill>
+                  <a:srgbClr val="36211B"/>
+                </a:solidFill>
+                <a:latin typeface="IBM Plex Serif Italics"/>
+                <a:ea typeface="IBM Plex Serif Italics"/>
+                <a:cs typeface="IBM Plex Serif Italics"/>
+                <a:sym typeface="IBM Plex Serif Italics"/>
+              </a:rPr>
+              <a:t> </a:t>
+            </a:r>
+            <a:r>
+              <a:rPr lang="en-US" sz="3600" i="1" spc="-144" dirty="0" err="1">
+                <a:solidFill>
+                  <a:srgbClr val="36211B"/>
+                </a:solidFill>
+                <a:latin typeface="IBM Plex Serif Italics"/>
+                <a:ea typeface="IBM Plex Serif Italics"/>
+                <a:cs typeface="IBM Plex Serif Italics"/>
+                <a:sym typeface="IBM Plex Serif Italics"/>
+              </a:rPr>
+              <a:t>до</a:t>
+            </a:r>
+            <a:r>
+              <a:rPr lang="en-US" sz="3600" i="1" spc="-144" dirty="0">
+                <a:solidFill>
+                  <a:srgbClr val="36211B"/>
+                </a:solidFill>
+                <a:latin typeface="IBM Plex Serif Italics"/>
+                <a:ea typeface="IBM Plex Serif Italics"/>
+                <a:cs typeface="IBM Plex Serif Italics"/>
+                <a:sym typeface="IBM Plex Serif Italics"/>
+              </a:rPr>
+              <a:t> </a:t>
+            </a:r>
+            <a:r>
+              <a:rPr lang="en-US" sz="3600" i="1" spc="-144" dirty="0" err="1">
+                <a:solidFill>
+                  <a:srgbClr val="36211B"/>
+                </a:solidFill>
+                <a:latin typeface="IBM Plex Serif Italics"/>
+                <a:ea typeface="IBM Plex Serif Italics"/>
+                <a:cs typeface="IBM Plex Serif Italics"/>
+                <a:sym typeface="IBM Plex Serif Italics"/>
+              </a:rPr>
+              <a:t>досягнення</a:t>
+            </a:r>
+            <a:r>
+              <a:rPr lang="en-US" sz="3600" i="1" spc="-144" dirty="0">
+                <a:solidFill>
+                  <a:srgbClr val="36211B"/>
+                </a:solidFill>
+                <a:latin typeface="IBM Plex Serif Italics"/>
+                <a:ea typeface="IBM Plex Serif Italics"/>
+                <a:cs typeface="IBM Plex Serif Italics"/>
+                <a:sym typeface="IBM Plex Serif Italics"/>
+              </a:rPr>
+              <a:t> </a:t>
+            </a:r>
+            <a:r>
+              <a:rPr lang="en-US" sz="3600" i="1" spc="-144" dirty="0" err="1">
+                <a:solidFill>
+                  <a:srgbClr val="36211B"/>
+                </a:solidFill>
+                <a:latin typeface="IBM Plex Serif Italics"/>
+                <a:ea typeface="IBM Plex Serif Italics"/>
+                <a:cs typeface="IBM Plex Serif Italics"/>
+                <a:sym typeface="IBM Plex Serif Italics"/>
+              </a:rPr>
+              <a:t>цілей</a:t>
+            </a:r>
+            <a:endParaRPr lang="en-US" sz="3600" i="1" spc="-144" dirty="0">
+              <a:solidFill>
+                <a:srgbClr val="36211B"/>
+              </a:solidFill>
+              <a:latin typeface="IBM Plex Serif Italics"/>
+              <a:ea typeface="IBM Plex Serif Italics"/>
+              <a:cs typeface="IBM Plex Serif Italics"/>
+              <a:sym typeface="IBM Plex Serif Italics"/>
+            </a:endParaRPr>
           </a:p>
         </p:txBody>
       </p:sp>
@@ -3425,10 +3723,849 @@
   <p:clrMapOvr>
     <a:masterClrMapping/>
   </p:clrMapOvr>
+  <p:timing>
+    <p:tnLst>
+      <p:par>
+        <p:cTn id="1" dur="indefinite" restart="never" nodeType="tmRoot"/>
+      </p:par>
+    </p:tnLst>
+  </p:timing>
 </p:sld>
 </file>
 
 <file path=ppt/slides/slide10.xml><?xml version="1.0" encoding="utf-8"?>
+<p:sld xmlns:a="http://schemas.openxmlformats.org/drawingml/2006/main" xmlns:r="http://schemas.openxmlformats.org/officeDocument/2006/relationships" xmlns:p="http://schemas.openxmlformats.org/presentationml/2006/main">
+  <p:cSld>
+    <p:bg>
+      <p:bgPr>
+        <a:solidFill>
+          <a:srgbClr val="E8E6E3"/>
+        </a:solidFill>
+        <a:effectLst/>
+      </p:bgPr>
+    </p:bg>
+    <p:spTree>
+      <p:nvGrpSpPr>
+        <p:cNvPr id="1" name=""/>
+        <p:cNvGrpSpPr/>
+        <p:nvPr/>
+      </p:nvGrpSpPr>
+      <p:grpSpPr>
+        <a:xfrm>
+          <a:off x="0" y="0"/>
+          <a:ext cx="0" cy="0"/>
+          <a:chOff x="0" y="0"/>
+          <a:chExt cx="0" cy="0"/>
+        </a:xfrm>
+      </p:grpSpPr>
+      <p:sp>
+        <p:nvSpPr>
+          <p:cNvPr id="2" name="TextBox 2"/>
+          <p:cNvSpPr txBox="1"/>
+          <p:nvPr/>
+        </p:nvSpPr>
+        <p:spPr>
+          <a:xfrm>
+            <a:off x="12344400" y="6981092"/>
+            <a:ext cx="2547610" cy="396240"/>
+          </a:xfrm>
+          <a:prstGeom prst="rect">
+            <a:avLst/>
+          </a:prstGeom>
+        </p:spPr>
+        <p:txBody>
+          <a:bodyPr lIns="0" tIns="0" rIns="0" bIns="0" rtlCol="0" anchor="t">
+            <a:spAutoFit/>
+          </a:bodyPr>
+          <a:lstStyle/>
+          <a:p>
+            <a:pPr algn="l">
+              <a:lnSpc>
+                <a:spcPts val="3359"/>
+              </a:lnSpc>
+            </a:pPr>
+            <a:r>
+              <a:rPr lang="en-US" sz="2400" b="1" spc="-48" dirty="0">
+                <a:solidFill>
+                  <a:srgbClr val="36211B"/>
+                </a:solidFill>
+                <a:latin typeface="Canva Sans Bold"/>
+                <a:ea typeface="Canva Sans Bold"/>
+                <a:cs typeface="Canva Sans Bold"/>
+                <a:sym typeface="Canva Sans Bold"/>
+              </a:rPr>
+              <a:t>КОМАНДА:</a:t>
+            </a:r>
+          </a:p>
+        </p:txBody>
+      </p:sp>
+      <p:sp>
+        <p:nvSpPr>
+          <p:cNvPr id="4" name="TextBox 4"/>
+          <p:cNvSpPr txBox="1"/>
+          <p:nvPr/>
+        </p:nvSpPr>
+        <p:spPr>
+          <a:xfrm>
+            <a:off x="2870204" y="4035928"/>
+            <a:ext cx="12547592" cy="1609725"/>
+          </a:xfrm>
+          <a:prstGeom prst="rect">
+            <a:avLst/>
+          </a:prstGeom>
+        </p:spPr>
+        <p:txBody>
+          <a:bodyPr lIns="0" tIns="0" rIns="0" bIns="0" rtlCol="0" anchor="t">
+            <a:spAutoFit/>
+          </a:bodyPr>
+          <a:lstStyle/>
+          <a:p>
+            <a:pPr algn="ctr">
+              <a:lnSpc>
+                <a:spcPts val="12000"/>
+              </a:lnSpc>
+            </a:pPr>
+            <a:r>
+              <a:rPr lang="en-US" sz="12000" spc="-480">
+                <a:solidFill>
+                  <a:srgbClr val="36211B"/>
+                </a:solidFill>
+                <a:latin typeface="IBM Plex Serif"/>
+                <a:ea typeface="IBM Plex Serif"/>
+                <a:cs typeface="IBM Plex Serif"/>
+                <a:sym typeface="IBM Plex Serif"/>
+              </a:rPr>
+              <a:t>ДЯКУЄМО</a:t>
+            </a:r>
+          </a:p>
+        </p:txBody>
+      </p:sp>
+      <p:sp>
+        <p:nvSpPr>
+          <p:cNvPr id="5" name="TextBox 5"/>
+          <p:cNvSpPr txBox="1"/>
+          <p:nvPr/>
+        </p:nvSpPr>
+        <p:spPr>
+          <a:xfrm>
+            <a:off x="3662490" y="5847212"/>
+            <a:ext cx="10963021" cy="622935"/>
+          </a:xfrm>
+          <a:prstGeom prst="rect">
+            <a:avLst/>
+          </a:prstGeom>
+        </p:spPr>
+        <p:txBody>
+          <a:bodyPr lIns="0" tIns="0" rIns="0" bIns="0" rtlCol="0" anchor="t">
+            <a:spAutoFit/>
+          </a:bodyPr>
+          <a:lstStyle/>
+          <a:p>
+            <a:pPr algn="ctr">
+              <a:lnSpc>
+                <a:spcPts val="5040"/>
+              </a:lnSpc>
+            </a:pPr>
+            <a:r>
+              <a:rPr lang="en-US" sz="3600" i="1" spc="-144">
+                <a:solidFill>
+                  <a:srgbClr val="36211B"/>
+                </a:solidFill>
+                <a:latin typeface="IBM Plex Serif Italics"/>
+                <a:ea typeface="IBM Plex Serif Italics"/>
+                <a:cs typeface="IBM Plex Serif Italics"/>
+                <a:sym typeface="IBM Plex Serif Italics"/>
+              </a:rPr>
+              <a:t>За увагу!</a:t>
+            </a:r>
+          </a:p>
+        </p:txBody>
+      </p:sp>
+      <p:sp>
+        <p:nvSpPr>
+          <p:cNvPr id="6" name="Freeform 6"/>
+          <p:cNvSpPr/>
+          <p:nvPr/>
+        </p:nvSpPr>
+        <p:spPr>
+          <a:xfrm>
+            <a:off x="0" y="9910777"/>
+            <a:ext cx="18288000" cy="376223"/>
+          </a:xfrm>
+          <a:custGeom>
+            <a:avLst/>
+            <a:gdLst/>
+            <a:ahLst/>
+            <a:cxnLst/>
+            <a:rect l="l" t="t" r="r" b="b"/>
+            <a:pathLst>
+              <a:path w="18288000" h="376223">
+                <a:moveTo>
+                  <a:pt x="0" y="0"/>
+                </a:moveTo>
+                <a:lnTo>
+                  <a:pt x="18288000" y="0"/>
+                </a:lnTo>
+                <a:lnTo>
+                  <a:pt x="18288000" y="376223"/>
+                </a:lnTo>
+                <a:lnTo>
+                  <a:pt x="0" y="376223"/>
+                </a:lnTo>
+                <a:lnTo>
+                  <a:pt x="0" y="0"/>
+                </a:lnTo>
+                <a:close/>
+              </a:path>
+            </a:pathLst>
+          </a:custGeom>
+          <a:blipFill>
+            <a:blip r:embed="rId2"/>
+            <a:stretch>
+              <a:fillRect t="-1531929" b="-1102351"/>
+            </a:stretch>
+          </a:blipFill>
+        </p:spPr>
+      </p:sp>
+      <p:sp>
+        <p:nvSpPr>
+          <p:cNvPr id="7" name="TextBox 7"/>
+          <p:cNvSpPr txBox="1"/>
+          <p:nvPr/>
+        </p:nvSpPr>
+        <p:spPr>
+          <a:xfrm>
+            <a:off x="14097000" y="6981092"/>
+            <a:ext cx="4419600" cy="2180084"/>
+          </a:xfrm>
+          <a:prstGeom prst="rect">
+            <a:avLst/>
+          </a:prstGeom>
+        </p:spPr>
+        <p:txBody>
+          <a:bodyPr wrap="square" lIns="0" tIns="0" rIns="0" bIns="0" rtlCol="0" anchor="t">
+            <a:spAutoFit/>
+          </a:bodyPr>
+          <a:lstStyle/>
+          <a:p>
+            <a:pPr>
+              <a:lnSpc>
+                <a:spcPts val="3359"/>
+              </a:lnSpc>
+            </a:pPr>
+            <a:r>
+              <a:rPr lang="uk-UA" sz="2400" spc="-48" dirty="0" err="1">
+                <a:solidFill>
+                  <a:srgbClr val="36211B"/>
+                </a:solidFill>
+                <a:latin typeface="Canva Sans"/>
+                <a:ea typeface="Canva Sans"/>
+                <a:cs typeface="Canva Sans"/>
+                <a:sym typeface="Canva Sans"/>
+              </a:rPr>
+              <a:t>Галух</a:t>
+            </a:r>
+            <a:r>
+              <a:rPr lang="uk-UA" sz="2400" spc="-48" dirty="0">
+                <a:solidFill>
+                  <a:srgbClr val="36211B"/>
+                </a:solidFill>
+                <a:latin typeface="Canva Sans"/>
+                <a:ea typeface="Canva Sans"/>
+                <a:cs typeface="Canva Sans"/>
+                <a:sym typeface="Canva Sans"/>
+              </a:rPr>
+              <a:t> Антон   </a:t>
+            </a:r>
+          </a:p>
+          <a:p>
+            <a:pPr>
+              <a:lnSpc>
+                <a:spcPts val="3359"/>
+              </a:lnSpc>
+            </a:pPr>
+            <a:r>
+              <a:rPr lang="uk-UA" sz="2400" spc="-48" dirty="0">
+                <a:solidFill>
+                  <a:srgbClr val="36211B"/>
+                </a:solidFill>
+                <a:latin typeface="Canva Sans"/>
+                <a:ea typeface="Canva Sans"/>
+                <a:cs typeface="Canva Sans"/>
+                <a:sym typeface="Canva Sans"/>
+              </a:rPr>
+              <a:t>Ковальчук  Влад</a:t>
+            </a:r>
+          </a:p>
+          <a:p>
+            <a:pPr>
+              <a:lnSpc>
+                <a:spcPts val="3359"/>
+              </a:lnSpc>
+            </a:pPr>
+            <a:r>
+              <a:rPr lang="uk-UA" sz="2400" spc="-48" dirty="0" err="1">
+                <a:solidFill>
+                  <a:srgbClr val="36211B"/>
+                </a:solidFill>
+                <a:latin typeface="Canva Sans"/>
+                <a:ea typeface="Canva Sans"/>
+                <a:cs typeface="Canva Sans"/>
+                <a:sym typeface="Canva Sans"/>
+              </a:rPr>
+              <a:t>Джавала</a:t>
+            </a:r>
+            <a:r>
+              <a:rPr lang="uk-UA" sz="2400" spc="-48" dirty="0">
+                <a:solidFill>
+                  <a:srgbClr val="36211B"/>
+                </a:solidFill>
+                <a:latin typeface="Canva Sans"/>
+                <a:ea typeface="Canva Sans"/>
+                <a:cs typeface="Canva Sans"/>
+                <a:sym typeface="Canva Sans"/>
+              </a:rPr>
+              <a:t> Анна</a:t>
+            </a:r>
+          </a:p>
+          <a:p>
+            <a:pPr>
+              <a:lnSpc>
+                <a:spcPts val="3359"/>
+              </a:lnSpc>
+            </a:pPr>
+            <a:r>
+              <a:rPr lang="uk-UA" sz="2400" spc="-48" dirty="0" err="1">
+                <a:solidFill>
+                  <a:srgbClr val="36211B"/>
+                </a:solidFill>
+                <a:latin typeface="Canva Sans"/>
+                <a:ea typeface="Canva Sans"/>
+                <a:cs typeface="Canva Sans"/>
+                <a:sym typeface="Canva Sans"/>
+              </a:rPr>
+              <a:t>Кахновець</a:t>
+            </a:r>
+            <a:r>
+              <a:rPr lang="uk-UA" sz="2400" spc="-48" dirty="0">
+                <a:solidFill>
+                  <a:srgbClr val="36211B"/>
+                </a:solidFill>
+                <a:latin typeface="Canva Sans"/>
+                <a:ea typeface="Canva Sans"/>
+                <a:cs typeface="Canva Sans"/>
+                <a:sym typeface="Canva Sans"/>
+              </a:rPr>
+              <a:t> Андрій</a:t>
+            </a:r>
+          </a:p>
+          <a:p>
+            <a:pPr>
+              <a:lnSpc>
+                <a:spcPts val="3359"/>
+              </a:lnSpc>
+            </a:pPr>
+            <a:r>
+              <a:rPr lang="uk-UA" sz="2400" spc="-48" dirty="0" err="1">
+                <a:solidFill>
+                  <a:srgbClr val="36211B"/>
+                </a:solidFill>
+                <a:latin typeface="Canva Sans"/>
+                <a:ea typeface="Canva Sans"/>
+                <a:cs typeface="Canva Sans"/>
+                <a:sym typeface="Canva Sans"/>
+              </a:rPr>
+              <a:t>Чвартковська</a:t>
+            </a:r>
+            <a:r>
+              <a:rPr lang="uk-UA" sz="2400" spc="-48" dirty="0">
+                <a:solidFill>
+                  <a:srgbClr val="36211B"/>
+                </a:solidFill>
+                <a:latin typeface="Canva Sans"/>
+                <a:ea typeface="Canva Sans"/>
+                <a:cs typeface="Canva Sans"/>
+                <a:sym typeface="Canva Sans"/>
+              </a:rPr>
+              <a:t> Соломія</a:t>
+            </a:r>
+            <a:endParaRPr lang="en-US" sz="2400" spc="-48" dirty="0">
+              <a:solidFill>
+                <a:srgbClr val="36211B"/>
+              </a:solidFill>
+              <a:latin typeface="Canva Sans"/>
+              <a:ea typeface="Canva Sans"/>
+              <a:cs typeface="Canva Sans"/>
+              <a:sym typeface="Canva Sans"/>
+            </a:endParaRPr>
+          </a:p>
+        </p:txBody>
+      </p:sp>
+    </p:spTree>
+  </p:cSld>
+  <p:clrMapOvr>
+    <a:masterClrMapping/>
+  </p:clrMapOvr>
+  <p:timing>
+    <p:tnLst>
+      <p:par>
+        <p:cTn id="1" dur="indefinite" restart="never" nodeType="tmRoot"/>
+      </p:par>
+    </p:tnLst>
+  </p:timing>
+</p:sld>
+</file>
+
+<file path=ppt/slides/slide11.xml><?xml version="1.0" encoding="utf-8"?>
+<p:sld xmlns:a="http://schemas.openxmlformats.org/drawingml/2006/main" xmlns:r="http://schemas.openxmlformats.org/officeDocument/2006/relationships" xmlns:p="http://schemas.openxmlformats.org/presentationml/2006/main">
+  <p:cSld>
+    <p:bg>
+      <p:bgPr>
+        <a:solidFill>
+          <a:srgbClr val="E8E6E3"/>
+        </a:solidFill>
+        <a:effectLst/>
+      </p:bgPr>
+    </p:bg>
+    <p:spTree>
+      <p:nvGrpSpPr>
+        <p:cNvPr id="1" name=""/>
+        <p:cNvGrpSpPr/>
+        <p:nvPr/>
+      </p:nvGrpSpPr>
+      <p:grpSpPr>
+        <a:xfrm>
+          <a:off x="0" y="0"/>
+          <a:ext cx="0" cy="0"/>
+          <a:chOff x="0" y="0"/>
+          <a:chExt cx="0" cy="0"/>
+        </a:xfrm>
+      </p:grpSpPr>
+      <p:sp>
+        <p:nvSpPr>
+          <p:cNvPr id="2" name="Freeform 2"/>
+          <p:cNvSpPr/>
+          <p:nvPr/>
+        </p:nvSpPr>
+        <p:spPr>
+          <a:xfrm>
+            <a:off x="0" y="9910777"/>
+            <a:ext cx="18288000" cy="376223"/>
+          </a:xfrm>
+          <a:custGeom>
+            <a:avLst/>
+            <a:gdLst/>
+            <a:ahLst/>
+            <a:cxnLst/>
+            <a:rect l="l" t="t" r="r" b="b"/>
+            <a:pathLst>
+              <a:path w="18288000" h="376223">
+                <a:moveTo>
+                  <a:pt x="0" y="0"/>
+                </a:moveTo>
+                <a:lnTo>
+                  <a:pt x="18288000" y="0"/>
+                </a:lnTo>
+                <a:lnTo>
+                  <a:pt x="18288000" y="376223"/>
+                </a:lnTo>
+                <a:lnTo>
+                  <a:pt x="0" y="376223"/>
+                </a:lnTo>
+                <a:lnTo>
+                  <a:pt x="0" y="0"/>
+                </a:lnTo>
+                <a:close/>
+              </a:path>
+            </a:pathLst>
+          </a:custGeom>
+          <a:blipFill>
+            <a:blip r:embed="rId2"/>
+            <a:stretch>
+              <a:fillRect t="-1531929" b="-1102351"/>
+            </a:stretch>
+          </a:blipFill>
+        </p:spPr>
+      </p:sp>
+      <p:sp>
+        <p:nvSpPr>
+          <p:cNvPr id="3" name="Freeform 3"/>
+          <p:cNvSpPr/>
+          <p:nvPr/>
+        </p:nvSpPr>
+        <p:spPr>
+          <a:xfrm>
+            <a:off x="6406104" y="1028700"/>
+            <a:ext cx="6286802" cy="5375447"/>
+          </a:xfrm>
+          <a:custGeom>
+            <a:avLst/>
+            <a:gdLst/>
+            <a:ahLst/>
+            <a:cxnLst/>
+            <a:rect l="l" t="t" r="r" b="b"/>
+            <a:pathLst>
+              <a:path w="6286802" h="5375447">
+                <a:moveTo>
+                  <a:pt x="0" y="0"/>
+                </a:moveTo>
+                <a:lnTo>
+                  <a:pt x="6286802" y="0"/>
+                </a:lnTo>
+                <a:lnTo>
+                  <a:pt x="6286802" y="5375447"/>
+                </a:lnTo>
+                <a:lnTo>
+                  <a:pt x="0" y="5375447"/>
+                </a:lnTo>
+                <a:lnTo>
+                  <a:pt x="0" y="0"/>
+                </a:lnTo>
+                <a:close/>
+              </a:path>
+            </a:pathLst>
+          </a:custGeom>
+          <a:blipFill>
+            <a:blip r:embed="rId3"/>
+            <a:stretch>
+              <a:fillRect/>
+            </a:stretch>
+          </a:blipFill>
+        </p:spPr>
+      </p:sp>
+      <p:sp>
+        <p:nvSpPr>
+          <p:cNvPr id="4" name="TextBox 4"/>
+          <p:cNvSpPr txBox="1"/>
+          <p:nvPr/>
+        </p:nvSpPr>
+        <p:spPr>
+          <a:xfrm>
+            <a:off x="3662490" y="6743591"/>
+            <a:ext cx="10963021" cy="1282402"/>
+          </a:xfrm>
+          <a:prstGeom prst="rect">
+            <a:avLst/>
+          </a:prstGeom>
+        </p:spPr>
+        <p:txBody>
+          <a:bodyPr lIns="0" tIns="0" rIns="0" bIns="0" rtlCol="0" anchor="t">
+            <a:spAutoFit/>
+          </a:bodyPr>
+          <a:lstStyle/>
+          <a:p>
+            <a:pPr algn="ctr">
+              <a:lnSpc>
+                <a:spcPts val="5040"/>
+              </a:lnSpc>
+            </a:pPr>
+            <a:r>
+              <a:rPr lang="en-US" sz="3600" i="1" spc="-144" dirty="0" err="1">
+                <a:solidFill>
+                  <a:srgbClr val="36211B"/>
+                </a:solidFill>
+                <a:latin typeface="IBM Plex Serif Italics"/>
+                <a:ea typeface="IBM Plex Serif Italics"/>
+                <a:cs typeface="IBM Plex Serif Italics"/>
+                <a:sym typeface="IBM Plex Serif Italics"/>
+              </a:rPr>
+              <a:t>Якщо</a:t>
+            </a:r>
+            <a:r>
+              <a:rPr lang="en-US" sz="3600" i="1" spc="-144" dirty="0">
+                <a:solidFill>
+                  <a:srgbClr val="36211B"/>
+                </a:solidFill>
+                <a:latin typeface="IBM Plex Serif Italics"/>
+                <a:ea typeface="IBM Plex Serif Italics"/>
+                <a:cs typeface="IBM Plex Serif Italics"/>
+                <a:sym typeface="IBM Plex Serif Italics"/>
+              </a:rPr>
+              <a:t> у </a:t>
+            </a:r>
+            <a:r>
+              <a:rPr lang="en-US" sz="3600" i="1" spc="-144" dirty="0" err="1">
+                <a:solidFill>
+                  <a:srgbClr val="36211B"/>
+                </a:solidFill>
+                <a:latin typeface="IBM Plex Serif Italics"/>
+                <a:ea typeface="IBM Plex Serif Italics"/>
+                <a:cs typeface="IBM Plex Serif Italics"/>
+                <a:sym typeface="IBM Plex Serif Italics"/>
+              </a:rPr>
+              <a:t>Вас</a:t>
+            </a:r>
+            <a:r>
+              <a:rPr lang="en-US" sz="3600" i="1" spc="-144" dirty="0">
+                <a:solidFill>
+                  <a:srgbClr val="36211B"/>
+                </a:solidFill>
+                <a:latin typeface="IBM Plex Serif Italics"/>
+                <a:ea typeface="IBM Plex Serif Italics"/>
+                <a:cs typeface="IBM Plex Serif Italics"/>
+                <a:sym typeface="IBM Plex Serif Italics"/>
+              </a:rPr>
+              <a:t> </a:t>
+            </a:r>
+            <a:r>
+              <a:rPr lang="en-US" sz="3600" i="1" spc="-144" dirty="0" err="1">
+                <a:solidFill>
+                  <a:srgbClr val="36211B"/>
+                </a:solidFill>
+                <a:latin typeface="IBM Plex Serif Italics"/>
+                <a:ea typeface="IBM Plex Serif Italics"/>
+                <a:cs typeface="IBM Plex Serif Italics"/>
+                <a:sym typeface="IBM Plex Serif Italics"/>
+              </a:rPr>
+              <a:t>залишились</a:t>
+            </a:r>
+            <a:r>
+              <a:rPr lang="en-US" sz="3600" i="1" spc="-144" dirty="0">
+                <a:solidFill>
+                  <a:srgbClr val="36211B"/>
+                </a:solidFill>
+                <a:latin typeface="IBM Plex Serif Italics"/>
+                <a:ea typeface="IBM Plex Serif Italics"/>
+                <a:cs typeface="IBM Plex Serif Italics"/>
+                <a:sym typeface="IBM Plex Serif Italics"/>
+              </a:rPr>
+              <a:t> </a:t>
+            </a:r>
+            <a:r>
+              <a:rPr lang="en-US" sz="3600" i="1" spc="-144" dirty="0" err="1">
+                <a:solidFill>
+                  <a:srgbClr val="36211B"/>
+                </a:solidFill>
+                <a:latin typeface="IBM Plex Serif Italics"/>
+                <a:ea typeface="IBM Plex Serif Italics"/>
+                <a:cs typeface="IBM Plex Serif Italics"/>
+                <a:sym typeface="IBM Plex Serif Italics"/>
+              </a:rPr>
+              <a:t>якісь</a:t>
+            </a:r>
+            <a:r>
+              <a:rPr lang="en-US" sz="3600" i="1" spc="-144" dirty="0">
+                <a:solidFill>
+                  <a:srgbClr val="36211B"/>
+                </a:solidFill>
+                <a:latin typeface="IBM Plex Serif Italics"/>
+                <a:ea typeface="IBM Plex Serif Italics"/>
+                <a:cs typeface="IBM Plex Serif Italics"/>
+                <a:sym typeface="IBM Plex Serif Italics"/>
+              </a:rPr>
+              <a:t> </a:t>
+            </a:r>
+            <a:r>
+              <a:rPr lang="en-US" sz="3600" i="1" spc="-144" dirty="0" err="1">
+                <a:solidFill>
+                  <a:srgbClr val="36211B"/>
+                </a:solidFill>
+                <a:latin typeface="IBM Plex Serif Italics"/>
+                <a:ea typeface="IBM Plex Serif Italics"/>
+                <a:cs typeface="IBM Plex Serif Italics"/>
+                <a:sym typeface="IBM Plex Serif Italics"/>
+              </a:rPr>
+              <a:t>запитання</a:t>
+            </a:r>
+            <a:r>
+              <a:rPr lang="en-US" sz="3600" i="1" spc="-144" dirty="0">
+                <a:solidFill>
+                  <a:srgbClr val="36211B"/>
+                </a:solidFill>
+                <a:latin typeface="IBM Plex Serif Italics"/>
+                <a:ea typeface="IBM Plex Serif Italics"/>
+                <a:cs typeface="IBM Plex Serif Italics"/>
+                <a:sym typeface="IBM Plex Serif Italics"/>
+              </a:rPr>
+              <a:t> - </a:t>
+            </a:r>
+            <a:r>
+              <a:rPr lang="en-US" sz="3600" i="1" spc="-144" dirty="0" err="1">
+                <a:solidFill>
+                  <a:srgbClr val="36211B"/>
+                </a:solidFill>
+                <a:latin typeface="IBM Plex Serif Italics"/>
+                <a:ea typeface="IBM Plex Serif Italics"/>
+                <a:cs typeface="IBM Plex Serif Italics"/>
+                <a:sym typeface="IBM Plex Serif Italics"/>
+              </a:rPr>
+              <a:t>тримайте</a:t>
+            </a:r>
+            <a:r>
+              <a:rPr lang="en-US" sz="3600" i="1" spc="-144" dirty="0">
+                <a:solidFill>
+                  <a:srgbClr val="36211B"/>
+                </a:solidFill>
+                <a:latin typeface="IBM Plex Serif Italics"/>
+                <a:ea typeface="IBM Plex Serif Italics"/>
+                <a:cs typeface="IBM Plex Serif Italics"/>
+                <a:sym typeface="IBM Plex Serif Italics"/>
+              </a:rPr>
+              <a:t> </a:t>
+            </a:r>
+            <a:r>
+              <a:rPr lang="en-US" sz="3600" i="1" spc="-144" dirty="0" err="1">
+                <a:solidFill>
+                  <a:srgbClr val="36211B"/>
+                </a:solidFill>
+                <a:latin typeface="IBM Plex Serif Italics"/>
+                <a:ea typeface="IBM Plex Serif Italics"/>
+                <a:cs typeface="IBM Plex Serif Italics"/>
+                <a:sym typeface="IBM Plex Serif Italics"/>
+              </a:rPr>
+              <a:t>їх</a:t>
+            </a:r>
+            <a:r>
+              <a:rPr lang="en-US" sz="3600" i="1" spc="-144" dirty="0">
+                <a:solidFill>
+                  <a:srgbClr val="36211B"/>
+                </a:solidFill>
+                <a:latin typeface="IBM Plex Serif Italics"/>
+                <a:ea typeface="IBM Plex Serif Italics"/>
+                <a:cs typeface="IBM Plex Serif Italics"/>
+                <a:sym typeface="IBM Plex Serif Italics"/>
+              </a:rPr>
+              <a:t> </a:t>
+            </a:r>
+            <a:r>
+              <a:rPr lang="en-US" sz="3600" i="1" spc="-144" dirty="0" err="1">
+                <a:solidFill>
+                  <a:srgbClr val="36211B"/>
+                </a:solidFill>
+                <a:latin typeface="IBM Plex Serif Italics"/>
+                <a:ea typeface="IBM Plex Serif Italics"/>
+                <a:cs typeface="IBM Plex Serif Italics"/>
+                <a:sym typeface="IBM Plex Serif Italics"/>
+              </a:rPr>
+              <a:t>при</a:t>
+            </a:r>
+            <a:r>
+              <a:rPr lang="en-US" sz="3600" i="1" spc="-144" dirty="0">
+                <a:solidFill>
+                  <a:srgbClr val="36211B"/>
+                </a:solidFill>
+                <a:latin typeface="IBM Plex Serif Italics"/>
+                <a:ea typeface="IBM Plex Serif Italics"/>
+                <a:cs typeface="IBM Plex Serif Italics"/>
+                <a:sym typeface="IBM Plex Serif Italics"/>
+              </a:rPr>
+              <a:t> </a:t>
+            </a:r>
+            <a:r>
+              <a:rPr lang="en-US" sz="3600" i="1" spc="-144" dirty="0" err="1">
+                <a:solidFill>
+                  <a:srgbClr val="36211B"/>
+                </a:solidFill>
+                <a:latin typeface="IBM Plex Serif Italics"/>
+                <a:ea typeface="IBM Plex Serif Italics"/>
+                <a:cs typeface="IBM Plex Serif Italics"/>
+                <a:sym typeface="IBM Plex Serif Italics"/>
+              </a:rPr>
+              <a:t>собі</a:t>
+            </a:r>
+            <a:r>
+              <a:rPr lang="en-US" sz="3600" i="1" spc="-144" dirty="0">
+                <a:solidFill>
+                  <a:srgbClr val="36211B"/>
+                </a:solidFill>
+                <a:latin typeface="IBM Plex Serif Italics"/>
+                <a:ea typeface="IBM Plex Serif Italics"/>
+                <a:cs typeface="IBM Plex Serif Italics"/>
+                <a:sym typeface="IBM Plex Serif Italics"/>
+              </a:rPr>
+              <a:t>, </a:t>
+            </a:r>
+            <a:r>
+              <a:rPr lang="uk-UA" sz="3600" i="1" spc="-144" dirty="0" smtClean="0">
+                <a:solidFill>
+                  <a:srgbClr val="36211B"/>
+                </a:solidFill>
+                <a:latin typeface="IBM Plex Serif Italics"/>
+                <a:ea typeface="IBM Plex Serif Italics"/>
+                <a:cs typeface="IBM Plex Serif Italics"/>
+                <a:sym typeface="IBM Plex Serif Italics"/>
+              </a:rPr>
+              <a:t>ми</a:t>
+            </a:r>
+            <a:r>
+              <a:rPr lang="en-US" sz="3600" i="1" spc="-144" dirty="0" smtClean="0">
+                <a:solidFill>
+                  <a:srgbClr val="36211B"/>
+                </a:solidFill>
+                <a:latin typeface="IBM Plex Serif Italics"/>
+                <a:ea typeface="IBM Plex Serif Italics"/>
+                <a:cs typeface="IBM Plex Serif Italics"/>
+                <a:sym typeface="IBM Plex Serif Italics"/>
+              </a:rPr>
+              <a:t> </a:t>
+            </a:r>
+            <a:r>
+              <a:rPr lang="en-US" sz="3600" i="1" spc="-144" dirty="0" err="1">
+                <a:solidFill>
+                  <a:srgbClr val="36211B"/>
+                </a:solidFill>
+                <a:latin typeface="IBM Plex Serif Italics"/>
+                <a:ea typeface="IBM Plex Serif Italics"/>
+                <a:cs typeface="IBM Plex Serif Italics"/>
+                <a:sym typeface="IBM Plex Serif Italics"/>
+              </a:rPr>
+              <a:t>Вам</a:t>
+            </a:r>
+            <a:r>
+              <a:rPr lang="en-US" sz="3600" i="1" spc="-144" dirty="0">
+                <a:solidFill>
+                  <a:srgbClr val="36211B"/>
+                </a:solidFill>
+                <a:latin typeface="IBM Plex Serif Italics"/>
+                <a:ea typeface="IBM Plex Serif Italics"/>
+                <a:cs typeface="IBM Plex Serif Italics"/>
+                <a:sym typeface="IBM Plex Serif Italics"/>
+              </a:rPr>
+              <a:t> </a:t>
+            </a:r>
+            <a:r>
+              <a:rPr lang="en-US" sz="3600" i="1" spc="-144" dirty="0" err="1">
+                <a:solidFill>
+                  <a:srgbClr val="36211B"/>
+                </a:solidFill>
+                <a:latin typeface="IBM Plex Serif Italics"/>
+                <a:ea typeface="IBM Plex Serif Italics"/>
+                <a:cs typeface="IBM Plex Serif Italics"/>
+                <a:sym typeface="IBM Plex Serif Italics"/>
+              </a:rPr>
+              <a:t>не</a:t>
+            </a:r>
+            <a:r>
+              <a:rPr lang="en-US" sz="3600" i="1" spc="-144" dirty="0">
+                <a:solidFill>
+                  <a:srgbClr val="36211B"/>
+                </a:solidFill>
+                <a:latin typeface="IBM Plex Serif Italics"/>
+                <a:ea typeface="IBM Plex Serif Italics"/>
+                <a:cs typeface="IBM Plex Serif Italics"/>
+                <a:sym typeface="IBM Plex Serif Italics"/>
+              </a:rPr>
+              <a:t> Google :)</a:t>
+            </a:r>
+          </a:p>
+        </p:txBody>
+      </p:sp>
+    </p:spTree>
+  </p:cSld>
+  <p:clrMapOvr>
+    <a:masterClrMapping/>
+  </p:clrMapOvr>
+  <p:timing>
+    <p:tnLst>
+      <p:par>
+        <p:cTn id="1" dur="indefinite" restart="never" nodeType="tmRoot"/>
+      </p:par>
+    </p:tnLst>
+  </p:timing>
+</p:sld>
+</file>
+
+<file path=ppt/slides/slide2.xml><?xml version="1.0" encoding="utf-8"?>
 <p:sld xmlns:a="http://schemas.openxmlformats.org/drawingml/2006/main" xmlns:r="http://schemas.openxmlformats.org/officeDocument/2006/relationships" xmlns:p="http://schemas.openxmlformats.org/presentationml/2006/main">
   <p:cSld>
     <p:bg>
@@ -3501,238 +4638,14 @@
       </p:sp>
       <p:sp>
         <p:nvSpPr>
-          <p:cNvPr id="3" name="AutoShape 3"/>
-          <p:cNvSpPr/>
+          <p:cNvPr id="3" name="TextBox 3"/>
+          <p:cNvSpPr txBox="1"/>
           <p:nvPr/>
         </p:nvSpPr>
         <p:spPr>
           <a:xfrm>
-            <a:off x="1222950" y="2881210"/>
-            <a:ext cx="2138399" cy="0"/>
-          </a:xfrm>
-          <a:prstGeom prst="line">
-            <a:avLst/>
-          </a:prstGeom>
-          <a:ln w="38100" cap="flat">
-            <a:solidFill>
-              <a:srgbClr val="000000"/>
-            </a:solidFill>
-            <a:prstDash val="solid"/>
-            <a:headEnd type="none" w="sm" len="sm"/>
-            <a:tailEnd type="triangle" w="lg" len="med"/>
-          </a:ln>
-        </p:spPr>
-      </p:sp>
-      <p:sp>
-        <p:nvSpPr>
-          <p:cNvPr id="4" name="TextBox 4"/>
-          <p:cNvSpPr txBox="1"/>
-          <p:nvPr/>
-        </p:nvSpPr>
-        <p:spPr>
-          <a:xfrm>
-            <a:off x="1222950" y="1686876"/>
-            <a:ext cx="6416152" cy="661143"/>
-          </a:xfrm>
-          <a:prstGeom prst="rect">
-            <a:avLst/>
-          </a:prstGeom>
-        </p:spPr>
-        <p:txBody>
-          <a:bodyPr wrap="square" lIns="0" tIns="0" rIns="0" bIns="0" rtlCol="0" anchor="t">
-            <a:spAutoFit/>
-          </a:bodyPr>
-          <a:lstStyle/>
-          <a:p>
-            <a:pPr>
-              <a:lnSpc>
-                <a:spcPts val="5599"/>
-              </a:lnSpc>
-              <a:spcBef>
-                <a:spcPct val="0"/>
-              </a:spcBef>
-            </a:pPr>
-            <a:r>
-              <a:rPr lang="en-US" sz="3999" i="1" spc="-79" dirty="0" err="1">
-                <a:solidFill>
-                  <a:srgbClr val="000000"/>
-                </a:solidFill>
-                <a:latin typeface="IBM Plex Serif Italics"/>
-                <a:ea typeface="IBM Plex Serif Italics"/>
-                <a:cs typeface="IBM Plex Serif Italics"/>
-                <a:sym typeface="IBM Plex Serif Italics"/>
-              </a:rPr>
-              <a:t>Технологічний</a:t>
-            </a:r>
-            <a:r>
-              <a:rPr lang="en-US" sz="3999" i="1" spc="-79" dirty="0">
-                <a:solidFill>
-                  <a:srgbClr val="000000"/>
-                </a:solidFill>
-                <a:latin typeface="IBM Plex Serif Italics"/>
-                <a:ea typeface="IBM Plex Serif Italics"/>
-                <a:cs typeface="IBM Plex Serif Italics"/>
-                <a:sym typeface="IBM Plex Serif Italics"/>
-              </a:rPr>
-              <a:t> </a:t>
-            </a:r>
-            <a:r>
-              <a:rPr lang="en-US" sz="3999" i="1" spc="-79" dirty="0" err="1">
-                <a:solidFill>
-                  <a:srgbClr val="000000"/>
-                </a:solidFill>
-                <a:latin typeface="IBM Plex Serif Italics"/>
-                <a:ea typeface="IBM Plex Serif Italics"/>
-                <a:cs typeface="IBM Plex Serif Italics"/>
-                <a:sym typeface="IBM Plex Serif Italics"/>
-              </a:rPr>
-              <a:t>стек</a:t>
-            </a:r>
-            <a:r>
-              <a:rPr lang="en-US" sz="3999" i="1" spc="-79" dirty="0">
-                <a:solidFill>
-                  <a:srgbClr val="000000"/>
-                </a:solidFill>
-                <a:latin typeface="IBM Plex Serif Italics"/>
-                <a:ea typeface="IBM Plex Serif Italics"/>
-                <a:cs typeface="IBM Plex Serif Italics"/>
-                <a:sym typeface="IBM Plex Serif Italics"/>
-              </a:rPr>
-              <a:t>:</a:t>
-            </a:r>
-          </a:p>
-        </p:txBody>
-      </p:sp>
-      <p:sp>
-        <p:nvSpPr>
-          <p:cNvPr id="5" name="AutoShape 5"/>
-          <p:cNvSpPr/>
-          <p:nvPr/>
-        </p:nvSpPr>
-        <p:spPr>
-          <a:xfrm>
-            <a:off x="1222950" y="3908647"/>
-            <a:ext cx="2138399" cy="0"/>
-          </a:xfrm>
-          <a:prstGeom prst="line">
-            <a:avLst/>
-          </a:prstGeom>
-          <a:ln w="38100" cap="flat">
-            <a:solidFill>
-              <a:srgbClr val="000000"/>
-            </a:solidFill>
-            <a:prstDash val="solid"/>
-            <a:headEnd type="none" w="sm" len="sm"/>
-            <a:tailEnd type="triangle" w="lg" len="med"/>
-          </a:ln>
-        </p:spPr>
-      </p:sp>
-      <p:sp>
-        <p:nvSpPr>
-          <p:cNvPr id="6" name="AutoShape 6"/>
-          <p:cNvSpPr/>
-          <p:nvPr/>
-        </p:nvSpPr>
-        <p:spPr>
-          <a:xfrm>
-            <a:off x="1222950" y="4936083"/>
-            <a:ext cx="2138399" cy="0"/>
-          </a:xfrm>
-          <a:prstGeom prst="line">
-            <a:avLst/>
-          </a:prstGeom>
-          <a:ln w="38100" cap="flat">
-            <a:solidFill>
-              <a:srgbClr val="000000"/>
-            </a:solidFill>
-            <a:prstDash val="solid"/>
-            <a:headEnd type="none" w="sm" len="sm"/>
-            <a:tailEnd type="triangle" w="lg" len="med"/>
-          </a:ln>
-        </p:spPr>
-      </p:sp>
-      <p:sp>
-        <p:nvSpPr>
-          <p:cNvPr id="7" name="AutoShape 7"/>
-          <p:cNvSpPr/>
-          <p:nvPr/>
-        </p:nvSpPr>
-        <p:spPr>
-          <a:xfrm>
-            <a:off x="1222950" y="5963520"/>
-            <a:ext cx="2138399" cy="0"/>
-          </a:xfrm>
-          <a:prstGeom prst="line">
-            <a:avLst/>
-          </a:prstGeom>
-          <a:ln w="38100" cap="flat">
-            <a:solidFill>
-              <a:srgbClr val="000000"/>
-            </a:solidFill>
-            <a:prstDash val="solid"/>
-            <a:headEnd type="none" w="sm" len="sm"/>
-            <a:tailEnd type="triangle" w="lg" len="med"/>
-          </a:ln>
-        </p:spPr>
-      </p:sp>
-      <p:sp>
-        <p:nvSpPr>
-          <p:cNvPr id="8" name="AutoShape 8"/>
-          <p:cNvSpPr/>
-          <p:nvPr/>
-        </p:nvSpPr>
-        <p:spPr>
-          <a:xfrm>
-            <a:off x="1222950" y="6990957"/>
-            <a:ext cx="2138399" cy="0"/>
-          </a:xfrm>
-          <a:prstGeom prst="line">
-            <a:avLst/>
-          </a:prstGeom>
-          <a:ln w="38100" cap="flat">
-            <a:solidFill>
-              <a:srgbClr val="000000"/>
-            </a:solidFill>
-            <a:prstDash val="solid"/>
-            <a:headEnd type="none" w="sm" len="sm"/>
-            <a:tailEnd type="triangle" w="lg" len="med"/>
-          </a:ln>
-        </p:spPr>
-      </p:sp>
-      <p:sp>
-        <p:nvSpPr>
-          <p:cNvPr id="9" name="AutoShape 9"/>
-          <p:cNvSpPr/>
-          <p:nvPr/>
-        </p:nvSpPr>
-        <p:spPr>
-          <a:xfrm>
-            <a:off x="1222950" y="8018393"/>
-            <a:ext cx="2138399" cy="0"/>
-          </a:xfrm>
-          <a:prstGeom prst="line">
-            <a:avLst/>
-          </a:prstGeom>
-          <a:ln w="38100" cap="flat">
-            <a:solidFill>
-              <a:srgbClr val="000000"/>
-            </a:solidFill>
-            <a:prstDash val="solid"/>
-            <a:headEnd type="none" w="sm" len="sm"/>
-            <a:tailEnd type="triangle" w="lg" len="med"/>
-          </a:ln>
-        </p:spPr>
-      </p:sp>
-      <p:sp>
-        <p:nvSpPr>
-          <p:cNvPr id="10" name="TextBox 10"/>
-          <p:cNvSpPr txBox="1"/>
-          <p:nvPr/>
-        </p:nvSpPr>
-        <p:spPr>
-          <a:xfrm>
-            <a:off x="3656671" y="2644990"/>
-            <a:ext cx="2650616" cy="1012190"/>
+            <a:off x="1028700" y="1584078"/>
+            <a:ext cx="4477275" cy="622935"/>
           </a:xfrm>
           <a:prstGeom prst="rect">
             <a:avLst/>
@@ -3744,82 +4657,36 @@
           </a:bodyPr>
           <a:lstStyle/>
           <a:p>
-            <a:pPr algn="ctr">
+            <a:pPr algn="l">
               <a:lnSpc>
-                <a:spcPts val="4059"/>
+                <a:spcPts val="5040"/>
               </a:lnSpc>
-              <a:spcBef>
-                <a:spcPct val="0"/>
-              </a:spcBef>
             </a:pPr>
             <a:r>
-              <a:rPr lang="en-US" sz="2899" b="1" u="sng" spc="-57" dirty="0" err="1">
-                <a:solidFill>
-                  <a:srgbClr val="000000"/>
-                </a:solidFill>
-                <a:latin typeface="Canva Sans Bold"/>
-                <a:ea typeface="Canva Sans Bold"/>
-                <a:cs typeface="Canva Sans Bold"/>
-                <a:sym typeface="Canva Sans Bold"/>
-              </a:rPr>
-              <a:t>Мова</a:t>
-            </a:r>
-            <a:r>
-              <a:rPr lang="en-US" sz="2899" b="1" u="sng" spc="-57" dirty="0">
-                <a:solidFill>
-                  <a:srgbClr val="000000"/>
-                </a:solidFill>
-                <a:latin typeface="Canva Sans Bold"/>
-                <a:ea typeface="Canva Sans Bold"/>
-                <a:cs typeface="Canva Sans Bold"/>
-                <a:sym typeface="Canva Sans Bold"/>
-              </a:rPr>
-              <a:t>: </a:t>
-            </a:r>
-            <a:r>
-              <a:rPr lang="en-US" sz="2899" spc="-57" dirty="0">
-                <a:solidFill>
-                  <a:srgbClr val="000000"/>
-                </a:solidFill>
-                <a:latin typeface="Canva Sans"/>
-                <a:ea typeface="Canva Sans"/>
-                <a:cs typeface="Canva Sans"/>
-                <a:sym typeface="Canva Sans"/>
-              </a:rPr>
-              <a:t>C#</a:t>
-            </a:r>
-          </a:p>
-          <a:p>
-            <a:pPr algn="ctr">
-              <a:lnSpc>
-                <a:spcPts val="4059"/>
-              </a:lnSpc>
-              <a:spcBef>
-                <a:spcPct val="0"/>
-              </a:spcBef>
-            </a:pPr>
-            <a:endParaRPr lang="en-US" sz="2899" spc="-57" dirty="0">
-              <a:solidFill>
-                <a:srgbClr val="000000"/>
-              </a:solidFill>
-              <a:latin typeface="Canva Sans"/>
-              <a:ea typeface="Canva Sans"/>
-              <a:cs typeface="Canva Sans"/>
-              <a:sym typeface="Canva Sans"/>
-            </a:endParaRPr>
+              <a:rPr lang="en-US" sz="3600" i="1" spc="-144">
+                <a:solidFill>
+                  <a:srgbClr val="36211B"/>
+                </a:solidFill>
+                <a:latin typeface="IBM Plex Serif Italics"/>
+                <a:ea typeface="IBM Plex Serif Italics"/>
+                <a:cs typeface="IBM Plex Serif Italics"/>
+                <a:sym typeface="IBM Plex Serif Italics"/>
+              </a:rPr>
+              <a:t>Ідея та ціль продукту</a:t>
+            </a:r>
           </a:p>
         </p:txBody>
       </p:sp>
       <p:sp>
         <p:nvSpPr>
-          <p:cNvPr id="11" name="TextBox 11"/>
+          <p:cNvPr id="4" name="TextBox 4"/>
           <p:cNvSpPr txBox="1"/>
           <p:nvPr/>
         </p:nvSpPr>
         <p:spPr>
           <a:xfrm>
-            <a:off x="3656671" y="3631152"/>
-            <a:ext cx="11294271" cy="1012190"/>
+            <a:off x="1028700" y="2445138"/>
+            <a:ext cx="4477275" cy="3887470"/>
           </a:xfrm>
           <a:prstGeom prst="rect">
             <a:avLst/>
@@ -3831,111 +4698,33 @@
           </a:bodyPr>
           <a:lstStyle/>
           <a:p>
-            <a:pPr algn="ctr">
+            <a:pPr algn="l">
               <a:lnSpc>
-                <a:spcPts val="4059"/>
+                <a:spcPts val="3080"/>
               </a:lnSpc>
-              <a:spcBef>
-                <a:spcPct val="0"/>
-              </a:spcBef>
             </a:pPr>
             <a:r>
-              <a:rPr lang="en-US" sz="2899" b="1" u="sng" spc="-57" dirty="0" err="1">
-                <a:solidFill>
-                  <a:srgbClr val="000000"/>
-                </a:solidFill>
-                <a:latin typeface="Canva Sans Bold"/>
-                <a:ea typeface="Canva Sans Bold"/>
-                <a:cs typeface="Canva Sans Bold"/>
-                <a:sym typeface="Canva Sans Bold"/>
-              </a:rPr>
-              <a:t>Платформа</a:t>
-            </a:r>
-            <a:r>
-              <a:rPr lang="en-US" sz="2899" b="1" u="sng" spc="-57" dirty="0">
-                <a:solidFill>
-                  <a:srgbClr val="000000"/>
-                </a:solidFill>
-                <a:latin typeface="Canva Sans Bold"/>
-                <a:ea typeface="Canva Sans Bold"/>
-                <a:cs typeface="Canva Sans Bold"/>
-                <a:sym typeface="Canva Sans Bold"/>
-              </a:rPr>
-              <a:t>:</a:t>
-            </a:r>
-            <a:r>
-              <a:rPr lang="en-US" sz="2899" spc="-57" dirty="0">
-                <a:solidFill>
-                  <a:srgbClr val="000000"/>
-                </a:solidFill>
-                <a:latin typeface="Canva Sans"/>
-                <a:ea typeface="Canva Sans"/>
-                <a:cs typeface="Canva Sans"/>
-                <a:sym typeface="Canva Sans"/>
-              </a:rPr>
-              <a:t> .NET (</a:t>
-            </a:r>
-            <a:r>
-              <a:rPr lang="en-US" sz="2899" spc="-57" dirty="0" err="1">
-                <a:solidFill>
-                  <a:srgbClr val="000000"/>
-                </a:solidFill>
-                <a:latin typeface="Canva Sans"/>
-                <a:ea typeface="Canva Sans"/>
-                <a:cs typeface="Canva Sans"/>
-                <a:sym typeface="Canva Sans"/>
-              </a:rPr>
-              <a:t>сучасний</a:t>
-            </a:r>
-            <a:r>
-              <a:rPr lang="en-US" sz="2899" spc="-57" dirty="0">
-                <a:solidFill>
-                  <a:srgbClr val="000000"/>
-                </a:solidFill>
-                <a:latin typeface="Canva Sans"/>
-                <a:ea typeface="Canva Sans"/>
-                <a:cs typeface="Canva Sans"/>
-                <a:sym typeface="Canva Sans"/>
-              </a:rPr>
-              <a:t> .NET 6/7/8 </a:t>
-            </a:r>
-            <a:r>
-              <a:rPr lang="en-US" sz="2899" spc="-57" dirty="0" err="1">
-                <a:solidFill>
-                  <a:srgbClr val="000000"/>
-                </a:solidFill>
-                <a:latin typeface="Canva Sans"/>
-                <a:ea typeface="Canva Sans"/>
-                <a:cs typeface="Canva Sans"/>
-                <a:sym typeface="Canva Sans"/>
-              </a:rPr>
-              <a:t>або</a:t>
-            </a:r>
-            <a:r>
-              <a:rPr lang="en-US" sz="2899" spc="-57" dirty="0">
-                <a:solidFill>
-                  <a:srgbClr val="000000"/>
-                </a:solidFill>
-                <a:latin typeface="Canva Sans"/>
-                <a:ea typeface="Canva Sans"/>
-                <a:cs typeface="Canva Sans"/>
-                <a:sym typeface="Canva Sans"/>
-              </a:rPr>
-              <a:t> .NET Framework)</a:t>
-            </a:r>
-          </a:p>
-          <a:p>
-            <a:pPr algn="ctr">
+              <a:rPr lang="en-US" sz="2200" spc="-44">
+                <a:solidFill>
+                  <a:srgbClr val="36211B"/>
+                </a:solidFill>
+                <a:latin typeface="Canva Sans"/>
+                <a:ea typeface="Canva Sans"/>
+                <a:cs typeface="Canva Sans"/>
+                <a:sym typeface="Canva Sans"/>
+              </a:rPr>
+              <a:t>Проєкт має на меті спростити процес планування харчування, дозволяючи користувачам швидко отримувати збалансоване меню з різноманітними стравами. Додаток генерує рецепти на основі вашої цільової кількості калорій та наявних інгредієнтів.</a:t>
+            </a:r>
+          </a:p>
+          <a:p>
+            <a:pPr algn="l">
               <a:lnSpc>
-                <a:spcPts val="4059"/>
+                <a:spcPts val="3080"/>
               </a:lnSpc>
-              <a:spcBef>
-                <a:spcPct val="0"/>
-              </a:spcBef>
             </a:pPr>
-            <a:endParaRPr lang="en-US" sz="2899" spc="-57" dirty="0">
+            <a:endParaRPr lang="en-US" sz="2200" spc="-44">
               <a:solidFill>
-                <a:srgbClr val="000000"/>
+                <a:srgbClr val="36211B"/>
               </a:solidFill>
               <a:latin typeface="Canva Sans"/>
               <a:ea typeface="Canva Sans"/>
@@ -3947,198 +4736,14 @@
       </p:sp>
       <p:sp>
         <p:nvSpPr>
-          <p:cNvPr id="12" name="TextBox 12"/>
+          <p:cNvPr id="5" name="TextBox 5"/>
           <p:cNvSpPr txBox="1"/>
           <p:nvPr/>
         </p:nvSpPr>
         <p:spPr>
           <a:xfrm>
-            <a:off x="3962400" y="4617313"/>
-            <a:ext cx="7659134" cy="1051570"/>
-          </a:xfrm>
-          <a:prstGeom prst="rect">
-            <a:avLst/>
-          </a:prstGeom>
-        </p:spPr>
-        <p:txBody>
-          <a:bodyPr wrap="square" lIns="0" tIns="0" rIns="0" bIns="0" rtlCol="0" anchor="t">
-            <a:spAutoFit/>
-          </a:bodyPr>
-          <a:lstStyle/>
-          <a:p>
-            <a:pPr algn="ctr">
-              <a:lnSpc>
-                <a:spcPts val="4059"/>
-              </a:lnSpc>
-              <a:spcBef>
-                <a:spcPct val="0"/>
-              </a:spcBef>
-            </a:pPr>
-            <a:r>
-              <a:rPr lang="en-US" sz="2899" b="1" u="sng" spc="-57" dirty="0" smtClean="0">
-                <a:solidFill>
-                  <a:srgbClr val="000000"/>
-                </a:solidFill>
-                <a:latin typeface="Canva Sans Bold"/>
-                <a:ea typeface="Canva Sans Bold"/>
-                <a:cs typeface="Canva Sans Bold"/>
-                <a:sym typeface="Canva Sans Bold"/>
-              </a:rPr>
-              <a:t>Backend-</a:t>
-            </a:r>
-            <a:r>
-              <a:rPr lang="en-US" sz="2899" b="1" u="sng" spc="-57" dirty="0" err="1" smtClean="0">
-                <a:solidFill>
-                  <a:srgbClr val="000000"/>
-                </a:solidFill>
-                <a:latin typeface="Canva Sans Bold"/>
-                <a:ea typeface="Canva Sans Bold"/>
-                <a:cs typeface="Canva Sans Bold"/>
-                <a:sym typeface="Canva Sans Bold"/>
-              </a:rPr>
-              <a:t>фреймворк</a:t>
-            </a:r>
-            <a:r>
-              <a:rPr lang="en-US" sz="2899" b="1" u="sng" spc="-57" dirty="0">
-                <a:solidFill>
-                  <a:srgbClr val="000000"/>
-                </a:solidFill>
-                <a:latin typeface="Canva Sans Bold"/>
-                <a:ea typeface="Canva Sans Bold"/>
-                <a:cs typeface="Canva Sans Bold"/>
-                <a:sym typeface="Canva Sans Bold"/>
-              </a:rPr>
-              <a:t>:</a:t>
-            </a:r>
-            <a:r>
-              <a:rPr lang="en-US" sz="2899" spc="-57" dirty="0">
-                <a:solidFill>
-                  <a:srgbClr val="000000"/>
-                </a:solidFill>
-                <a:latin typeface="Canva Sans"/>
-                <a:ea typeface="Canva Sans"/>
-                <a:cs typeface="Canva Sans"/>
-                <a:sym typeface="Canva Sans"/>
-              </a:rPr>
-              <a:t> ASP.NET Core MVC</a:t>
-            </a:r>
-          </a:p>
-          <a:p>
-            <a:pPr algn="ctr">
-              <a:lnSpc>
-                <a:spcPts val="4059"/>
-              </a:lnSpc>
-              <a:spcBef>
-                <a:spcPct val="0"/>
-              </a:spcBef>
-            </a:pPr>
-            <a:endParaRPr lang="en-US" sz="2899" spc="-57" dirty="0">
-              <a:solidFill>
-                <a:srgbClr val="000000"/>
-              </a:solidFill>
-              <a:latin typeface="Canva Sans"/>
-              <a:ea typeface="Canva Sans"/>
-              <a:cs typeface="Canva Sans"/>
-              <a:sym typeface="Canva Sans"/>
-            </a:endParaRPr>
-          </a:p>
-        </p:txBody>
-      </p:sp>
-      <p:sp>
-        <p:nvSpPr>
-          <p:cNvPr id="13" name="TextBox 13"/>
-          <p:cNvSpPr txBox="1"/>
-          <p:nvPr/>
-        </p:nvSpPr>
-        <p:spPr>
-          <a:xfrm>
-            <a:off x="4114800" y="5686025"/>
-            <a:ext cx="5189006" cy="525785"/>
-          </a:xfrm>
-          <a:prstGeom prst="rect">
-            <a:avLst/>
-          </a:prstGeom>
-        </p:spPr>
-        <p:txBody>
-          <a:bodyPr wrap="square" lIns="0" tIns="0" rIns="0" bIns="0" rtlCol="0" anchor="t">
-            <a:spAutoFit/>
-          </a:bodyPr>
-          <a:lstStyle/>
-          <a:p>
-            <a:pPr algn="ctr">
-              <a:lnSpc>
-                <a:spcPts val="4059"/>
-              </a:lnSpc>
-              <a:spcBef>
-                <a:spcPct val="0"/>
-              </a:spcBef>
-            </a:pPr>
-            <a:r>
-              <a:rPr lang="en-US" sz="2899" b="1" u="sng" spc="-57" dirty="0" smtClean="0">
-                <a:solidFill>
-                  <a:srgbClr val="000000"/>
-                </a:solidFill>
-                <a:latin typeface="Canva Sans Bold"/>
-                <a:ea typeface="Canva Sans Bold"/>
-                <a:cs typeface="Canva Sans Bold"/>
-                <a:sym typeface="Canva Sans Bold"/>
-              </a:rPr>
-              <a:t>Frontend :</a:t>
-            </a:r>
-            <a:r>
-              <a:rPr lang="uk-UA" sz="2899" b="1" u="sng" spc="-57" dirty="0" smtClean="0">
-                <a:solidFill>
-                  <a:srgbClr val="000000"/>
-                </a:solidFill>
-                <a:latin typeface="Canva Sans Bold"/>
-                <a:ea typeface="Canva Sans Bold"/>
-                <a:cs typeface="Canva Sans Bold"/>
-                <a:sym typeface="Canva Sans Bold"/>
-              </a:rPr>
-              <a:t> </a:t>
-            </a:r>
-            <a:r>
-              <a:rPr lang="en-US" sz="3200" dirty="0" smtClean="0"/>
-              <a:t>Razor </a:t>
-            </a:r>
-            <a:r>
-              <a:rPr lang="en-US" sz="3200" dirty="0"/>
-              <a:t>(HTML + C#)</a:t>
-            </a:r>
-            <a:r>
-              <a:rPr lang="en-US" sz="2899" spc="-57" dirty="0" smtClean="0">
-                <a:solidFill>
-                  <a:srgbClr val="000000"/>
-                </a:solidFill>
-                <a:latin typeface="Canva Sans"/>
-                <a:ea typeface="Canva Sans"/>
-                <a:cs typeface="Canva Sans"/>
-                <a:sym typeface="Canva Sans"/>
-              </a:rPr>
-              <a:t> </a:t>
-            </a:r>
-            <a:endParaRPr lang="en-US" sz="2899" spc="-57" dirty="0">
-              <a:solidFill>
-                <a:srgbClr val="000000"/>
-              </a:solidFill>
-              <a:latin typeface="Canva Sans"/>
-              <a:ea typeface="Canva Sans"/>
-              <a:cs typeface="Canva Sans"/>
-              <a:sym typeface="Canva Sans"/>
-            </a:endParaRPr>
-          </a:p>
-        </p:txBody>
-      </p:sp>
-      <p:sp>
-        <p:nvSpPr>
-          <p:cNvPr id="14" name="TextBox 14"/>
-          <p:cNvSpPr txBox="1"/>
-          <p:nvPr/>
-        </p:nvSpPr>
-        <p:spPr>
-          <a:xfrm>
-            <a:off x="3656671" y="6669640"/>
-            <a:ext cx="5254383" cy="497840"/>
+            <a:off x="6755706" y="1584078"/>
+            <a:ext cx="4477275" cy="622935"/>
           </a:xfrm>
           <a:prstGeom prst="rect">
             <a:avLst/>
@@ -4150,212 +4755,36 @@
           </a:bodyPr>
           <a:lstStyle/>
           <a:p>
-            <a:pPr algn="ctr">
+            <a:pPr algn="l">
               <a:lnSpc>
-                <a:spcPts val="4059"/>
+                <a:spcPts val="5040"/>
               </a:lnSpc>
-              <a:spcBef>
-                <a:spcPct val="0"/>
-              </a:spcBef>
             </a:pPr>
             <a:r>
-              <a:rPr lang="en-US" sz="2899" b="1" u="sng" spc="-57">
-                <a:solidFill>
-                  <a:srgbClr val="000000"/>
-                </a:solidFill>
-                <a:latin typeface="Canva Sans Bold"/>
-                <a:ea typeface="Canva Sans Bold"/>
-                <a:cs typeface="Canva Sans Bold"/>
-                <a:sym typeface="Canva Sans Bold"/>
-              </a:rPr>
-              <a:t>Бази даних:</a:t>
-            </a:r>
-            <a:r>
-              <a:rPr lang="en-US" sz="2899" spc="-57">
-                <a:solidFill>
-                  <a:srgbClr val="000000"/>
-                </a:solidFill>
-                <a:latin typeface="Canva Sans"/>
-                <a:ea typeface="Canva Sans"/>
-                <a:cs typeface="Canva Sans"/>
-                <a:sym typeface="Canva Sans"/>
-              </a:rPr>
-              <a:t> PostgreSQL </a:t>
+              <a:rPr lang="en-US" sz="3600" i="1" spc="-144">
+                <a:solidFill>
+                  <a:srgbClr val="36211B"/>
+                </a:solidFill>
+                <a:latin typeface="IBM Plex Serif Italics"/>
+                <a:ea typeface="IBM Plex Serif Italics"/>
+                <a:cs typeface="IBM Plex Serif Italics"/>
+                <a:sym typeface="IBM Plex Serif Italics"/>
+              </a:rPr>
+              <a:t>Актуальність</a:t>
             </a:r>
           </a:p>
         </p:txBody>
       </p:sp>
       <p:sp>
         <p:nvSpPr>
-          <p:cNvPr id="15" name="TextBox 15"/>
+          <p:cNvPr id="6" name="TextBox 6"/>
           <p:cNvSpPr txBox="1"/>
           <p:nvPr/>
         </p:nvSpPr>
         <p:spPr>
           <a:xfrm>
-            <a:off x="3656671" y="7653256"/>
-            <a:ext cx="9678329" cy="525785"/>
-          </a:xfrm>
-          <a:prstGeom prst="rect">
-            <a:avLst/>
-          </a:prstGeom>
-        </p:spPr>
-        <p:txBody>
-          <a:bodyPr wrap="square" lIns="0" tIns="0" rIns="0" bIns="0" rtlCol="0" anchor="t">
-            <a:spAutoFit/>
-          </a:bodyPr>
-          <a:lstStyle/>
-          <a:p>
-            <a:pPr algn="ctr">
-              <a:lnSpc>
-                <a:spcPts val="4059"/>
-              </a:lnSpc>
-              <a:spcBef>
-                <a:spcPct val="0"/>
-              </a:spcBef>
-            </a:pPr>
-            <a:r>
-              <a:rPr lang="en-US" sz="2899" b="1" u="sng" spc="-57" dirty="0" err="1">
-                <a:solidFill>
-                  <a:srgbClr val="000000"/>
-                </a:solidFill>
-                <a:latin typeface="Canva Sans Bold"/>
-                <a:ea typeface="Canva Sans Bold"/>
-                <a:cs typeface="Canva Sans Bold"/>
-                <a:sym typeface="Canva Sans Bold"/>
-              </a:rPr>
-              <a:t>Інструменти</a:t>
-            </a:r>
-            <a:r>
-              <a:rPr lang="en-US" sz="2899" b="1" u="sng" spc="-57" dirty="0">
-                <a:solidFill>
-                  <a:srgbClr val="000000"/>
-                </a:solidFill>
-                <a:latin typeface="Canva Sans Bold"/>
-                <a:ea typeface="Canva Sans Bold"/>
-                <a:cs typeface="Canva Sans Bold"/>
-                <a:sym typeface="Canva Sans Bold"/>
-              </a:rPr>
-              <a:t>:</a:t>
-            </a:r>
-            <a:r>
-              <a:rPr lang="en-US" sz="2899" spc="-57" dirty="0">
-                <a:solidFill>
-                  <a:srgbClr val="000000"/>
-                </a:solidFill>
-                <a:latin typeface="Canva Sans"/>
-                <a:ea typeface="Canva Sans"/>
-                <a:cs typeface="Canva Sans"/>
-                <a:sym typeface="Canva Sans"/>
-              </a:rPr>
-              <a:t> Visual Studio, </a:t>
-            </a:r>
-            <a:r>
-              <a:rPr lang="en-US" sz="2899" spc="-57" dirty="0" err="1">
-                <a:solidFill>
-                  <a:srgbClr val="000000"/>
-                </a:solidFill>
-                <a:latin typeface="Canva Sans"/>
-                <a:ea typeface="Canva Sans"/>
-                <a:cs typeface="Canva Sans"/>
-                <a:sym typeface="Canva Sans"/>
-              </a:rPr>
-              <a:t>JetBrains</a:t>
-            </a:r>
-            <a:r>
-              <a:rPr lang="en-US" sz="2899" spc="-57" dirty="0">
-                <a:solidFill>
-                  <a:srgbClr val="000000"/>
-                </a:solidFill>
-                <a:latin typeface="Canva Sans"/>
-                <a:ea typeface="Canva Sans"/>
-                <a:cs typeface="Canva Sans"/>
-                <a:sym typeface="Canva Sans"/>
-              </a:rPr>
-              <a:t> </a:t>
-            </a:r>
-            <a:r>
-              <a:rPr lang="en-US" sz="2899" spc="-57" dirty="0" err="1" smtClean="0">
-                <a:solidFill>
-                  <a:srgbClr val="000000"/>
-                </a:solidFill>
-                <a:latin typeface="Canva Sans"/>
-                <a:ea typeface="Canva Sans"/>
-                <a:cs typeface="Canva Sans"/>
-                <a:sym typeface="Canva Sans"/>
-              </a:rPr>
-              <a:t>або</a:t>
-            </a:r>
-            <a:r>
-              <a:rPr lang="en-US" sz="2899" spc="-57" dirty="0" smtClean="0">
-                <a:solidFill>
-                  <a:srgbClr val="000000"/>
-                </a:solidFill>
-                <a:latin typeface="Canva Sans"/>
-                <a:ea typeface="Canva Sans"/>
-                <a:cs typeface="Canva Sans"/>
-                <a:sym typeface="Canva Sans"/>
-              </a:rPr>
-              <a:t> </a:t>
-            </a:r>
-            <a:r>
-              <a:rPr lang="en-US" sz="2899" spc="-57" dirty="0">
-                <a:solidFill>
-                  <a:srgbClr val="000000"/>
-                </a:solidFill>
-                <a:latin typeface="Canva Sans"/>
-                <a:ea typeface="Canva Sans"/>
-                <a:cs typeface="Canva Sans"/>
-                <a:sym typeface="Canva Sans"/>
-              </a:rPr>
-              <a:t>VS Code</a:t>
-            </a:r>
-          </a:p>
-        </p:txBody>
-      </p:sp>
-    </p:spTree>
-  </p:cSld>
-  <p:clrMapOvr>
-    <a:masterClrMapping/>
-  </p:clrMapOvr>
-</p:sld>
-</file>
-
-<file path=ppt/slides/slide11.xml><?xml version="1.0" encoding="utf-8"?>
-<p:sld xmlns:a="http://schemas.openxmlformats.org/drawingml/2006/main" xmlns:r="http://schemas.openxmlformats.org/officeDocument/2006/relationships" xmlns:p="http://schemas.openxmlformats.org/presentationml/2006/main">
-  <p:cSld>
-    <p:bg>
-      <p:bgPr>
-        <a:solidFill>
-          <a:srgbClr val="E8E6E3"/>
-        </a:solidFill>
-        <a:effectLst/>
-      </p:bgPr>
-    </p:bg>
-    <p:spTree>
-      <p:nvGrpSpPr>
-        <p:cNvPr id="1" name=""/>
-        <p:cNvGrpSpPr/>
-        <p:nvPr/>
-      </p:nvGrpSpPr>
-      <p:grpSpPr>
-        <a:xfrm>
-          <a:off x="0" y="0"/>
-          <a:ext cx="0" cy="0"/>
-          <a:chOff x="0" y="0"/>
-          <a:chExt cx="0" cy="0"/>
-        </a:xfrm>
-      </p:grpSpPr>
-      <p:sp>
-        <p:nvSpPr>
-          <p:cNvPr id="2" name="TextBox 2"/>
-          <p:cNvSpPr txBox="1"/>
-          <p:nvPr/>
-        </p:nvSpPr>
-        <p:spPr>
-          <a:xfrm>
-            <a:off x="1028700" y="8862060"/>
-            <a:ext cx="2547610" cy="396240"/>
+            <a:off x="6905362" y="2445138"/>
+            <a:ext cx="4477275" cy="3106420"/>
           </a:xfrm>
           <a:prstGeom prst="rect">
             <a:avLst/>
@@ -4369,58 +4798,662 @@
           <a:p>
             <a:pPr algn="l">
               <a:lnSpc>
-                <a:spcPts val="3359"/>
+                <a:spcPts val="3080"/>
               </a:lnSpc>
             </a:pPr>
             <a:r>
-              <a:rPr lang="en-US" sz="2400" b="1" spc="-48">
-                <a:solidFill>
-                  <a:srgbClr val="36211B"/>
-                </a:solidFill>
-                <a:latin typeface="Canva Sans Bold"/>
-                <a:ea typeface="Canva Sans Bold"/>
-                <a:cs typeface="Canva Sans Bold"/>
-                <a:sym typeface="Canva Sans Bold"/>
-              </a:rPr>
-              <a:t>КОМАНДА:</a:t>
-            </a:r>
+              <a:rPr lang="en-US" sz="2200" spc="-44" dirty="0" err="1">
+                <a:solidFill>
+                  <a:srgbClr val="36211B"/>
+                </a:solidFill>
+                <a:latin typeface="Canva Sans"/>
+                <a:ea typeface="Canva Sans"/>
+                <a:cs typeface="Canva Sans"/>
+                <a:sym typeface="Canva Sans"/>
+              </a:rPr>
+              <a:t>Люди</a:t>
+            </a:r>
+            <a:r>
+              <a:rPr lang="en-US" sz="2200" spc="-44" dirty="0">
+                <a:solidFill>
+                  <a:srgbClr val="36211B"/>
+                </a:solidFill>
+                <a:latin typeface="Canva Sans"/>
+                <a:ea typeface="Canva Sans"/>
+                <a:cs typeface="Canva Sans"/>
+                <a:sym typeface="Canva Sans"/>
+              </a:rPr>
+              <a:t> </a:t>
+            </a:r>
+            <a:r>
+              <a:rPr lang="en-US" sz="2200" spc="-44" dirty="0" err="1">
+                <a:solidFill>
+                  <a:srgbClr val="36211B"/>
+                </a:solidFill>
+                <a:latin typeface="Canva Sans"/>
+                <a:ea typeface="Canva Sans"/>
+                <a:cs typeface="Canva Sans"/>
+                <a:sym typeface="Canva Sans"/>
+              </a:rPr>
+              <a:t>часто</a:t>
+            </a:r>
+            <a:r>
+              <a:rPr lang="en-US" sz="2200" spc="-44" dirty="0">
+                <a:solidFill>
+                  <a:srgbClr val="36211B"/>
+                </a:solidFill>
+                <a:latin typeface="Canva Sans"/>
+                <a:ea typeface="Canva Sans"/>
+                <a:cs typeface="Canva Sans"/>
+                <a:sym typeface="Canva Sans"/>
+              </a:rPr>
+              <a:t> </a:t>
+            </a:r>
+            <a:r>
+              <a:rPr lang="en-US" sz="2200" spc="-44" dirty="0" err="1">
+                <a:solidFill>
+                  <a:srgbClr val="36211B"/>
+                </a:solidFill>
+                <a:latin typeface="Canva Sans"/>
+                <a:ea typeface="Canva Sans"/>
+                <a:cs typeface="Canva Sans"/>
+                <a:sym typeface="Canva Sans"/>
+              </a:rPr>
+              <a:t>витрачають</a:t>
+            </a:r>
+            <a:r>
+              <a:rPr lang="en-US" sz="2200" spc="-44" dirty="0">
+                <a:solidFill>
+                  <a:srgbClr val="36211B"/>
+                </a:solidFill>
+                <a:latin typeface="Canva Sans"/>
+                <a:ea typeface="Canva Sans"/>
+                <a:cs typeface="Canva Sans"/>
+                <a:sym typeface="Canva Sans"/>
+              </a:rPr>
+              <a:t> </a:t>
+            </a:r>
+            <a:r>
+              <a:rPr lang="en-US" sz="2200" spc="-44" dirty="0" err="1">
+                <a:solidFill>
+                  <a:srgbClr val="36211B"/>
+                </a:solidFill>
+                <a:latin typeface="Canva Sans"/>
+                <a:ea typeface="Canva Sans"/>
+                <a:cs typeface="Canva Sans"/>
+                <a:sym typeface="Canva Sans"/>
+              </a:rPr>
+              <a:t>багато</a:t>
+            </a:r>
+            <a:r>
+              <a:rPr lang="en-US" sz="2200" spc="-44" dirty="0">
+                <a:solidFill>
+                  <a:srgbClr val="36211B"/>
+                </a:solidFill>
+                <a:latin typeface="Canva Sans"/>
+                <a:ea typeface="Canva Sans"/>
+                <a:cs typeface="Canva Sans"/>
+                <a:sym typeface="Canva Sans"/>
+              </a:rPr>
+              <a:t> </a:t>
+            </a:r>
+            <a:r>
+              <a:rPr lang="en-US" sz="2200" spc="-44" dirty="0" err="1">
+                <a:solidFill>
+                  <a:srgbClr val="36211B"/>
+                </a:solidFill>
+                <a:latin typeface="Canva Sans"/>
+                <a:ea typeface="Canva Sans"/>
+                <a:cs typeface="Canva Sans"/>
+                <a:sym typeface="Canva Sans"/>
+              </a:rPr>
+              <a:t>часу</a:t>
+            </a:r>
+            <a:r>
+              <a:rPr lang="en-US" sz="2200" spc="-44" dirty="0">
+                <a:solidFill>
+                  <a:srgbClr val="36211B"/>
+                </a:solidFill>
+                <a:latin typeface="Canva Sans"/>
+                <a:ea typeface="Canva Sans"/>
+                <a:cs typeface="Canva Sans"/>
+                <a:sym typeface="Canva Sans"/>
+              </a:rPr>
+              <a:t> </a:t>
+            </a:r>
+            <a:r>
+              <a:rPr lang="en-US" sz="2200" spc="-44" dirty="0" err="1">
+                <a:solidFill>
+                  <a:srgbClr val="36211B"/>
+                </a:solidFill>
+                <a:latin typeface="Canva Sans"/>
+                <a:ea typeface="Canva Sans"/>
+                <a:cs typeface="Canva Sans"/>
+                <a:sym typeface="Canva Sans"/>
+              </a:rPr>
+              <a:t>на</a:t>
+            </a:r>
+            <a:r>
+              <a:rPr lang="en-US" sz="2200" spc="-44" dirty="0">
+                <a:solidFill>
+                  <a:srgbClr val="36211B"/>
+                </a:solidFill>
+                <a:latin typeface="Canva Sans"/>
+                <a:ea typeface="Canva Sans"/>
+                <a:cs typeface="Canva Sans"/>
+                <a:sym typeface="Canva Sans"/>
+              </a:rPr>
+              <a:t> </a:t>
+            </a:r>
+            <a:r>
+              <a:rPr lang="en-US" sz="2200" spc="-44" dirty="0" err="1">
+                <a:solidFill>
+                  <a:srgbClr val="36211B"/>
+                </a:solidFill>
+                <a:latin typeface="Canva Sans"/>
+                <a:ea typeface="Canva Sans"/>
+                <a:cs typeface="Canva Sans"/>
+                <a:sym typeface="Canva Sans"/>
+              </a:rPr>
+              <a:t>планування</a:t>
+            </a:r>
+            <a:r>
+              <a:rPr lang="en-US" sz="2200" spc="-44" dirty="0">
+                <a:solidFill>
+                  <a:srgbClr val="36211B"/>
+                </a:solidFill>
+                <a:latin typeface="Canva Sans"/>
+                <a:ea typeface="Canva Sans"/>
+                <a:cs typeface="Canva Sans"/>
+                <a:sym typeface="Canva Sans"/>
+              </a:rPr>
+              <a:t> </a:t>
+            </a:r>
+            <a:r>
+              <a:rPr lang="en-US" sz="2200" spc="-44" dirty="0" err="1">
+                <a:solidFill>
+                  <a:srgbClr val="36211B"/>
+                </a:solidFill>
+                <a:latin typeface="Canva Sans"/>
+                <a:ea typeface="Canva Sans"/>
+                <a:cs typeface="Canva Sans"/>
+                <a:sym typeface="Canva Sans"/>
+              </a:rPr>
+              <a:t>своїх</a:t>
+            </a:r>
+            <a:r>
+              <a:rPr lang="en-US" sz="2200" spc="-44" dirty="0">
+                <a:solidFill>
+                  <a:srgbClr val="36211B"/>
+                </a:solidFill>
+                <a:latin typeface="Canva Sans"/>
+                <a:ea typeface="Canva Sans"/>
+                <a:cs typeface="Canva Sans"/>
+                <a:sym typeface="Canva Sans"/>
+              </a:rPr>
+              <a:t> </a:t>
+            </a:r>
+            <a:r>
+              <a:rPr lang="en-US" sz="2200" spc="-44" dirty="0" err="1">
+                <a:solidFill>
+                  <a:srgbClr val="36211B"/>
+                </a:solidFill>
+                <a:latin typeface="Canva Sans"/>
+                <a:ea typeface="Canva Sans"/>
+                <a:cs typeface="Canva Sans"/>
+                <a:sym typeface="Canva Sans"/>
+              </a:rPr>
+              <a:t>страв</a:t>
+            </a:r>
+            <a:r>
+              <a:rPr lang="en-US" sz="2200" spc="-44" dirty="0">
+                <a:solidFill>
+                  <a:srgbClr val="36211B"/>
+                </a:solidFill>
+                <a:latin typeface="Canva Sans"/>
+                <a:ea typeface="Canva Sans"/>
+                <a:cs typeface="Canva Sans"/>
+                <a:sym typeface="Canva Sans"/>
+              </a:rPr>
+              <a:t> </a:t>
+            </a:r>
+            <a:r>
+              <a:rPr lang="en-US" sz="2200" spc="-44" dirty="0" err="1">
+                <a:solidFill>
+                  <a:srgbClr val="36211B"/>
+                </a:solidFill>
+                <a:latin typeface="Canva Sans"/>
+                <a:ea typeface="Canva Sans"/>
+                <a:cs typeface="Canva Sans"/>
+                <a:sym typeface="Canva Sans"/>
+              </a:rPr>
+              <a:t>та</a:t>
+            </a:r>
+            <a:r>
+              <a:rPr lang="en-US" sz="2200" spc="-44" dirty="0">
+                <a:solidFill>
+                  <a:srgbClr val="36211B"/>
+                </a:solidFill>
+                <a:latin typeface="Canva Sans"/>
+                <a:ea typeface="Canva Sans"/>
+                <a:cs typeface="Canva Sans"/>
+                <a:sym typeface="Canva Sans"/>
+              </a:rPr>
+              <a:t> </a:t>
+            </a:r>
+            <a:r>
+              <a:rPr lang="en-US" sz="2200" spc="-44" dirty="0" err="1">
+                <a:solidFill>
+                  <a:srgbClr val="36211B"/>
+                </a:solidFill>
+                <a:latin typeface="Canva Sans"/>
+                <a:ea typeface="Canva Sans"/>
+                <a:cs typeface="Canva Sans"/>
+                <a:sym typeface="Canva Sans"/>
+              </a:rPr>
+              <a:t>пошук</a:t>
+            </a:r>
+            <a:r>
+              <a:rPr lang="en-US" sz="2200" spc="-44" dirty="0">
+                <a:solidFill>
+                  <a:srgbClr val="36211B"/>
+                </a:solidFill>
+                <a:latin typeface="Canva Sans"/>
+                <a:ea typeface="Canva Sans"/>
+                <a:cs typeface="Canva Sans"/>
+                <a:sym typeface="Canva Sans"/>
+              </a:rPr>
+              <a:t> </a:t>
+            </a:r>
+            <a:r>
+              <a:rPr lang="en-US" sz="2200" spc="-44" dirty="0" err="1">
+                <a:solidFill>
+                  <a:srgbClr val="36211B"/>
+                </a:solidFill>
+                <a:latin typeface="Canva Sans"/>
+                <a:ea typeface="Canva Sans"/>
+                <a:cs typeface="Canva Sans"/>
+                <a:sym typeface="Canva Sans"/>
+              </a:rPr>
+              <a:t>рецептів</a:t>
+            </a:r>
+            <a:r>
+              <a:rPr lang="en-US" sz="2200" spc="-44" dirty="0">
+                <a:solidFill>
+                  <a:srgbClr val="36211B"/>
+                </a:solidFill>
+                <a:latin typeface="Canva Sans"/>
+                <a:ea typeface="Canva Sans"/>
+                <a:cs typeface="Canva Sans"/>
+                <a:sym typeface="Canva Sans"/>
+              </a:rPr>
+              <a:t>. </a:t>
+            </a:r>
+            <a:r>
+              <a:rPr lang="en-US" sz="2200" spc="-44" dirty="0" err="1">
+                <a:solidFill>
+                  <a:srgbClr val="36211B"/>
+                </a:solidFill>
+                <a:latin typeface="Canva Sans"/>
+                <a:ea typeface="Canva Sans"/>
+                <a:cs typeface="Canva Sans"/>
+                <a:sym typeface="Canva Sans"/>
+              </a:rPr>
+              <a:t>Наш</a:t>
+            </a:r>
+            <a:r>
+              <a:rPr lang="en-US" sz="2200" spc="-44" dirty="0">
+                <a:solidFill>
+                  <a:srgbClr val="36211B"/>
+                </a:solidFill>
+                <a:latin typeface="Canva Sans"/>
+                <a:ea typeface="Canva Sans"/>
+                <a:cs typeface="Canva Sans"/>
+                <a:sym typeface="Canva Sans"/>
+              </a:rPr>
+              <a:t> </a:t>
+            </a:r>
+            <a:r>
+              <a:rPr lang="en-US" sz="2200" spc="-44" dirty="0" err="1">
+                <a:solidFill>
+                  <a:srgbClr val="36211B"/>
+                </a:solidFill>
+                <a:latin typeface="Canva Sans"/>
+                <a:ea typeface="Canva Sans"/>
+                <a:cs typeface="Canva Sans"/>
+                <a:sym typeface="Canva Sans"/>
+              </a:rPr>
+              <a:t>додаток</a:t>
+            </a:r>
+            <a:r>
+              <a:rPr lang="en-US" sz="2200" spc="-44" dirty="0">
+                <a:solidFill>
+                  <a:srgbClr val="36211B"/>
+                </a:solidFill>
+                <a:latin typeface="Canva Sans"/>
+                <a:ea typeface="Canva Sans"/>
+                <a:cs typeface="Canva Sans"/>
+                <a:sym typeface="Canva Sans"/>
+              </a:rPr>
+              <a:t> </a:t>
+            </a:r>
+            <a:r>
+              <a:rPr lang="en-US" sz="2200" spc="-44" dirty="0" err="1">
+                <a:solidFill>
+                  <a:srgbClr val="36211B"/>
+                </a:solidFill>
+                <a:latin typeface="Canva Sans"/>
+                <a:ea typeface="Canva Sans"/>
+                <a:cs typeface="Canva Sans"/>
+                <a:sym typeface="Canva Sans"/>
+              </a:rPr>
+              <a:t>автоматизує</a:t>
+            </a:r>
+            <a:r>
+              <a:rPr lang="en-US" sz="2200" spc="-44" dirty="0">
+                <a:solidFill>
+                  <a:srgbClr val="36211B"/>
+                </a:solidFill>
+                <a:latin typeface="Canva Sans"/>
+                <a:ea typeface="Canva Sans"/>
+                <a:cs typeface="Canva Sans"/>
+                <a:sym typeface="Canva Sans"/>
+              </a:rPr>
+              <a:t> </a:t>
+            </a:r>
+            <a:r>
+              <a:rPr lang="en-US" sz="2200" spc="-44" dirty="0" err="1">
+                <a:solidFill>
+                  <a:srgbClr val="36211B"/>
+                </a:solidFill>
+                <a:latin typeface="Canva Sans"/>
+                <a:ea typeface="Canva Sans"/>
+                <a:cs typeface="Canva Sans"/>
+                <a:sym typeface="Canva Sans"/>
+              </a:rPr>
+              <a:t>цей</a:t>
+            </a:r>
+            <a:r>
+              <a:rPr lang="en-US" sz="2200" spc="-44" dirty="0">
+                <a:solidFill>
+                  <a:srgbClr val="36211B"/>
+                </a:solidFill>
+                <a:latin typeface="Canva Sans"/>
+                <a:ea typeface="Canva Sans"/>
+                <a:cs typeface="Canva Sans"/>
+                <a:sym typeface="Canva Sans"/>
+              </a:rPr>
+              <a:t> </a:t>
+            </a:r>
+            <a:r>
+              <a:rPr lang="en-US" sz="2200" spc="-44" dirty="0" err="1">
+                <a:solidFill>
+                  <a:srgbClr val="36211B"/>
+                </a:solidFill>
+                <a:latin typeface="Canva Sans"/>
+                <a:ea typeface="Canva Sans"/>
+                <a:cs typeface="Canva Sans"/>
+                <a:sym typeface="Canva Sans"/>
+              </a:rPr>
+              <a:t>процес</a:t>
+            </a:r>
+            <a:r>
+              <a:rPr lang="en-US" sz="2200" spc="-44" dirty="0">
+                <a:solidFill>
+                  <a:srgbClr val="36211B"/>
+                </a:solidFill>
+                <a:latin typeface="Canva Sans"/>
+                <a:ea typeface="Canva Sans"/>
+                <a:cs typeface="Canva Sans"/>
+                <a:sym typeface="Canva Sans"/>
+              </a:rPr>
+              <a:t>, </a:t>
+            </a:r>
+            <a:r>
+              <a:rPr lang="en-US" sz="2200" spc="-44" dirty="0" err="1">
+                <a:solidFill>
+                  <a:srgbClr val="36211B"/>
+                </a:solidFill>
+                <a:latin typeface="Canva Sans"/>
+                <a:ea typeface="Canva Sans"/>
+                <a:cs typeface="Canva Sans"/>
+                <a:sym typeface="Canva Sans"/>
+              </a:rPr>
+              <a:t>пропонуючи</a:t>
+            </a:r>
+            <a:r>
+              <a:rPr lang="en-US" sz="2200" spc="-44" dirty="0">
+                <a:solidFill>
+                  <a:srgbClr val="36211B"/>
+                </a:solidFill>
+                <a:latin typeface="Canva Sans"/>
+                <a:ea typeface="Canva Sans"/>
+                <a:cs typeface="Canva Sans"/>
+                <a:sym typeface="Canva Sans"/>
+              </a:rPr>
+              <a:t> </a:t>
+            </a:r>
+            <a:r>
+              <a:rPr lang="en-US" sz="2200" spc="-44" dirty="0" err="1">
+                <a:solidFill>
+                  <a:srgbClr val="36211B"/>
+                </a:solidFill>
+                <a:latin typeface="Canva Sans"/>
+                <a:ea typeface="Canva Sans"/>
+                <a:cs typeface="Canva Sans"/>
+                <a:sym typeface="Canva Sans"/>
+              </a:rPr>
+              <a:t>готові</a:t>
+            </a:r>
+            <a:r>
+              <a:rPr lang="en-US" sz="2200" spc="-44" dirty="0">
+                <a:solidFill>
+                  <a:srgbClr val="36211B"/>
+                </a:solidFill>
+                <a:latin typeface="Canva Sans"/>
+                <a:ea typeface="Canva Sans"/>
+                <a:cs typeface="Canva Sans"/>
+                <a:sym typeface="Canva Sans"/>
+              </a:rPr>
+              <a:t> </a:t>
+            </a:r>
+            <a:r>
+              <a:rPr lang="en-US" sz="2200" spc="-44" dirty="0" err="1">
+                <a:solidFill>
+                  <a:srgbClr val="36211B"/>
+                </a:solidFill>
+                <a:latin typeface="Canva Sans"/>
+                <a:ea typeface="Canva Sans"/>
+                <a:cs typeface="Canva Sans"/>
+                <a:sym typeface="Canva Sans"/>
+              </a:rPr>
+              <a:t>варіанти</a:t>
+            </a:r>
+            <a:r>
+              <a:rPr lang="en-US" sz="2200" spc="-44" dirty="0">
+                <a:solidFill>
+                  <a:srgbClr val="36211B"/>
+                </a:solidFill>
+                <a:latin typeface="Canva Sans"/>
+                <a:ea typeface="Canva Sans"/>
+                <a:cs typeface="Canva Sans"/>
+                <a:sym typeface="Canva Sans"/>
+              </a:rPr>
+              <a:t> </a:t>
+            </a:r>
+            <a:r>
+              <a:rPr lang="en-US" sz="2200" spc="-44" dirty="0" err="1">
+                <a:solidFill>
+                  <a:srgbClr val="36211B"/>
+                </a:solidFill>
+                <a:latin typeface="Canva Sans"/>
+                <a:ea typeface="Canva Sans"/>
+                <a:cs typeface="Canva Sans"/>
+                <a:sym typeface="Canva Sans"/>
+              </a:rPr>
+              <a:t>страв</a:t>
+            </a:r>
+            <a:r>
+              <a:rPr lang="en-US" sz="2200" spc="-44" dirty="0">
+                <a:solidFill>
+                  <a:srgbClr val="36211B"/>
+                </a:solidFill>
+                <a:latin typeface="Canva Sans"/>
+                <a:ea typeface="Canva Sans"/>
+                <a:cs typeface="Canva Sans"/>
+                <a:sym typeface="Canva Sans"/>
+              </a:rPr>
+              <a:t> </a:t>
+            </a:r>
+            <a:r>
+              <a:rPr lang="en-US" sz="2200" spc="-44" dirty="0" err="1">
+                <a:solidFill>
+                  <a:srgbClr val="36211B"/>
+                </a:solidFill>
+                <a:latin typeface="Canva Sans"/>
+                <a:ea typeface="Canva Sans"/>
+                <a:cs typeface="Canva Sans"/>
+                <a:sym typeface="Canva Sans"/>
+              </a:rPr>
+              <a:t>без</a:t>
+            </a:r>
+            <a:r>
+              <a:rPr lang="en-US" sz="2200" spc="-44" dirty="0">
+                <a:solidFill>
+                  <a:srgbClr val="36211B"/>
+                </a:solidFill>
+                <a:latin typeface="Canva Sans"/>
+                <a:ea typeface="Canva Sans"/>
+                <a:cs typeface="Canva Sans"/>
+                <a:sym typeface="Canva Sans"/>
+              </a:rPr>
+              <a:t> </a:t>
+            </a:r>
+            <a:r>
+              <a:rPr lang="en-US" sz="2200" spc="-44" dirty="0" err="1">
+                <a:solidFill>
+                  <a:srgbClr val="36211B"/>
+                </a:solidFill>
+                <a:latin typeface="Canva Sans"/>
+                <a:ea typeface="Canva Sans"/>
+                <a:cs typeface="Canva Sans"/>
+                <a:sym typeface="Canva Sans"/>
+              </a:rPr>
+              <a:t>необхідності</a:t>
+            </a:r>
+            <a:r>
+              <a:rPr lang="en-US" sz="2200" spc="-44" dirty="0">
+                <a:solidFill>
+                  <a:srgbClr val="36211B"/>
+                </a:solidFill>
+                <a:latin typeface="Canva Sans"/>
+                <a:ea typeface="Canva Sans"/>
+                <a:cs typeface="Canva Sans"/>
+                <a:sym typeface="Canva Sans"/>
+              </a:rPr>
+              <a:t> </a:t>
+            </a:r>
+            <a:r>
+              <a:rPr lang="en-US" sz="2200" spc="-44" dirty="0" err="1">
+                <a:solidFill>
+                  <a:srgbClr val="36211B"/>
+                </a:solidFill>
+                <a:latin typeface="Canva Sans"/>
+                <a:ea typeface="Canva Sans"/>
+                <a:cs typeface="Canva Sans"/>
+                <a:sym typeface="Canva Sans"/>
+              </a:rPr>
+              <a:t>вибирати</a:t>
+            </a:r>
+            <a:r>
+              <a:rPr lang="en-US" sz="2200" spc="-44" dirty="0">
+                <a:solidFill>
+                  <a:srgbClr val="36211B"/>
+                </a:solidFill>
+                <a:latin typeface="Canva Sans"/>
+                <a:ea typeface="Canva Sans"/>
+                <a:cs typeface="Canva Sans"/>
+                <a:sym typeface="Canva Sans"/>
+              </a:rPr>
+              <a:t> </a:t>
+            </a:r>
+            <a:r>
+              <a:rPr lang="en-US" sz="2200" spc="-44" dirty="0" err="1">
+                <a:solidFill>
+                  <a:srgbClr val="36211B"/>
+                </a:solidFill>
+                <a:latin typeface="Canva Sans"/>
+                <a:ea typeface="Canva Sans"/>
+                <a:cs typeface="Canva Sans"/>
+                <a:sym typeface="Canva Sans"/>
+              </a:rPr>
+              <a:t>страви</a:t>
+            </a:r>
+            <a:r>
+              <a:rPr lang="en-US" sz="2200" spc="-44" dirty="0">
+                <a:solidFill>
+                  <a:srgbClr val="36211B"/>
+                </a:solidFill>
+                <a:latin typeface="Canva Sans"/>
+                <a:ea typeface="Canva Sans"/>
+                <a:cs typeface="Canva Sans"/>
+                <a:sym typeface="Canva Sans"/>
+              </a:rPr>
+              <a:t> </a:t>
+            </a:r>
+            <a:r>
+              <a:rPr lang="en-US" sz="2200" spc="-44" dirty="0" err="1">
+                <a:solidFill>
+                  <a:srgbClr val="36211B"/>
+                </a:solidFill>
+                <a:latin typeface="Canva Sans"/>
+                <a:ea typeface="Canva Sans"/>
+                <a:cs typeface="Canva Sans"/>
+                <a:sym typeface="Canva Sans"/>
+              </a:rPr>
+              <a:t>вручну</a:t>
+            </a:r>
+            <a:r>
+              <a:rPr lang="en-US" sz="2200" spc="-44" dirty="0">
+                <a:solidFill>
+                  <a:srgbClr val="36211B"/>
+                </a:solidFill>
+                <a:latin typeface="Canva Sans"/>
+                <a:ea typeface="Canva Sans"/>
+                <a:cs typeface="Canva Sans"/>
+                <a:sym typeface="Canva Sans"/>
+              </a:rPr>
+              <a:t>.</a:t>
+            </a:r>
+          </a:p>
+          <a:p>
+            <a:pPr algn="l">
+              <a:lnSpc>
+                <a:spcPts val="3080"/>
+              </a:lnSpc>
+            </a:pPr>
+            <a:endParaRPr lang="en-US" sz="2200" spc="-44" dirty="0">
+              <a:solidFill>
+                <a:srgbClr val="36211B"/>
+              </a:solidFill>
+              <a:latin typeface="Canva Sans"/>
+              <a:ea typeface="Canva Sans"/>
+              <a:cs typeface="Canva Sans"/>
+              <a:sym typeface="Canva Sans"/>
+            </a:endParaRPr>
           </a:p>
         </p:txBody>
       </p:sp>
       <p:sp>
         <p:nvSpPr>
-          <p:cNvPr id="3" name="AutoShape 3"/>
-          <p:cNvSpPr/>
+          <p:cNvPr id="7" name="TextBox 7"/>
+          <p:cNvSpPr txBox="1"/>
           <p:nvPr/>
         </p:nvSpPr>
         <p:spPr>
           <a:xfrm>
-            <a:off x="3576310" y="9079230"/>
-            <a:ext cx="5588773" cy="0"/>
-          </a:xfrm>
-          <a:prstGeom prst="line">
-            <a:avLst/>
-          </a:prstGeom>
-          <a:ln w="9525" cap="flat">
-            <a:solidFill>
-              <a:srgbClr val="36211B"/>
-            </a:solidFill>
-            <a:prstDash val="solid"/>
-            <a:headEnd type="none" w="sm" len="sm"/>
-            <a:tailEnd type="none" w="sm" len="sm"/>
-          </a:ln>
-        </p:spPr>
-      </p:sp>
-      <p:sp>
-        <p:nvSpPr>
-          <p:cNvPr id="4" name="TextBox 4"/>
-          <p:cNvSpPr txBox="1"/>
-          <p:nvPr/>
-        </p:nvSpPr>
-        <p:spPr>
-          <a:xfrm>
-            <a:off x="2870204" y="4035928"/>
-            <a:ext cx="12547592" cy="1609725"/>
+            <a:off x="12582843" y="1584078"/>
+            <a:ext cx="4477275" cy="622935"/>
           </a:xfrm>
           <a:prstGeom prst="rect">
             <a:avLst/>
@@ -4432,36 +5465,36 @@
           </a:bodyPr>
           <a:lstStyle/>
           <a:p>
-            <a:pPr algn="ctr">
+            <a:pPr algn="l">
               <a:lnSpc>
-                <a:spcPts val="12000"/>
+                <a:spcPts val="5040"/>
               </a:lnSpc>
             </a:pPr>
             <a:r>
-              <a:rPr lang="en-US" sz="12000" spc="-480">
-                <a:solidFill>
-                  <a:srgbClr val="36211B"/>
-                </a:solidFill>
-                <a:latin typeface="IBM Plex Serif"/>
-                <a:ea typeface="IBM Plex Serif"/>
-                <a:cs typeface="IBM Plex Serif"/>
-                <a:sym typeface="IBM Plex Serif"/>
-              </a:rPr>
-              <a:t>ДЯКУЄМО</a:t>
+              <a:rPr lang="en-US" sz="3600" i="1" spc="-144">
+                <a:solidFill>
+                  <a:srgbClr val="36211B"/>
+                </a:solidFill>
+                <a:latin typeface="IBM Plex Serif Italics"/>
+                <a:ea typeface="IBM Plex Serif Italics"/>
+                <a:cs typeface="IBM Plex Serif Italics"/>
+                <a:sym typeface="IBM Plex Serif Italics"/>
+              </a:rPr>
+              <a:t>Унікальність</a:t>
             </a:r>
           </a:p>
         </p:txBody>
       </p:sp>
       <p:sp>
         <p:nvSpPr>
-          <p:cNvPr id="5" name="TextBox 5"/>
+          <p:cNvPr id="8" name="TextBox 8"/>
           <p:cNvSpPr txBox="1"/>
           <p:nvPr/>
         </p:nvSpPr>
         <p:spPr>
           <a:xfrm>
-            <a:off x="3662490" y="5847212"/>
-            <a:ext cx="10963021" cy="622935"/>
+            <a:off x="12582843" y="2445138"/>
+            <a:ext cx="4477275" cy="7792720"/>
           </a:xfrm>
           <a:prstGeom prst="rect">
             <a:avLst/>
@@ -4473,82 +5506,52 @@
           </a:bodyPr>
           <a:lstStyle/>
           <a:p>
-            <a:pPr algn="ctr">
+            <a:pPr algn="l">
               <a:lnSpc>
-                <a:spcPts val="5040"/>
+                <a:spcPts val="3080"/>
               </a:lnSpc>
             </a:pPr>
             <a:r>
-              <a:rPr lang="en-US" sz="3600" i="1" spc="-144">
-                <a:solidFill>
-                  <a:srgbClr val="36211B"/>
-                </a:solidFill>
-                <a:latin typeface="IBM Plex Serif Italics"/>
-                <a:ea typeface="IBM Plex Serif Italics"/>
-                <a:cs typeface="IBM Plex Serif Italics"/>
-                <a:sym typeface="IBM Plex Serif Italics"/>
-              </a:rPr>
-              <a:t>За увагу!</a:t>
-            </a:r>
+              <a:rPr lang="en-US" sz="2200" spc="-44">
+                <a:solidFill>
+                  <a:srgbClr val="36211B"/>
+                </a:solidFill>
+                <a:latin typeface="Canva Sans"/>
+                <a:ea typeface="Canva Sans"/>
+                <a:cs typeface="Canva Sans"/>
+                <a:sym typeface="Canva Sans"/>
+              </a:rPr>
+              <a:t>На відміну від інших сервісів, наш пропонує комплексний підхід до харчування, поєднуючи персоналізацію, зручність та ефективність. Персоналізований підхід – враховує дієтичні потреби, споживання калорій тощо. Гнучке планування харчування – дозволяє користувачам змінювати страви та коригувати меню відповідно до уподобань. Відстеження запасів – унікальна функція, яка допомагає контролювати доступні інгредієнти та уникати непотрібних витрат. Аналіз харчової цінності – автоматично розраховує калорії та поживні речовини для кожного рецепту.</a:t>
+            </a:r>
+          </a:p>
+          <a:p>
+            <a:pPr algn="l">
+              <a:lnSpc>
+                <a:spcPts val="3080"/>
+              </a:lnSpc>
+            </a:pPr>
+            <a:endParaRPr lang="en-US" sz="2200" spc="-44">
+              <a:solidFill>
+                <a:srgbClr val="36211B"/>
+              </a:solidFill>
+              <a:latin typeface="Canva Sans"/>
+              <a:ea typeface="Canva Sans"/>
+              <a:cs typeface="Canva Sans"/>
+              <a:sym typeface="Canva Sans"/>
+            </a:endParaRPr>
           </a:p>
         </p:txBody>
       </p:sp>
       <p:sp>
         <p:nvSpPr>
-          <p:cNvPr id="6" name="Freeform 6"/>
-          <p:cNvSpPr/>
+          <p:cNvPr id="9" name="TextBox 9"/>
+          <p:cNvSpPr txBox="1"/>
           <p:nvPr/>
         </p:nvSpPr>
         <p:spPr>
           <a:xfrm>
-            <a:off x="0" y="9910777"/>
-            <a:ext cx="18288000" cy="376223"/>
-          </a:xfrm>
-          <a:custGeom>
-            <a:avLst/>
-            <a:gdLst/>
-            <a:ahLst/>
-            <a:cxnLst/>
-            <a:rect l="l" t="t" r="r" b="b"/>
-            <a:pathLst>
-              <a:path w="18288000" h="376223">
-                <a:moveTo>
-                  <a:pt x="0" y="0"/>
-                </a:moveTo>
-                <a:lnTo>
-                  <a:pt x="18288000" y="0"/>
-                </a:lnTo>
-                <a:lnTo>
-                  <a:pt x="18288000" y="376223"/>
-                </a:lnTo>
-                <a:lnTo>
-                  <a:pt x="0" y="376223"/>
-                </a:lnTo>
-                <a:lnTo>
-                  <a:pt x="0" y="0"/>
-                </a:lnTo>
-                <a:close/>
-              </a:path>
-            </a:pathLst>
-          </a:custGeom>
-          <a:blipFill>
-            <a:blip r:embed="rId2"/>
-            <a:stretch>
-              <a:fillRect t="-1531929" b="-1102351"/>
-            </a:stretch>
-          </a:blipFill>
-        </p:spPr>
-      </p:sp>
-      <p:sp>
-        <p:nvSpPr>
-          <p:cNvPr id="7" name="TextBox 7"/>
-          <p:cNvSpPr txBox="1"/>
-          <p:nvPr/>
-        </p:nvSpPr>
-        <p:spPr>
-          <a:xfrm>
-            <a:off x="9165083" y="8862060"/>
-            <a:ext cx="2788261" cy="396240"/>
+            <a:off x="1028700" y="981075"/>
+            <a:ext cx="398364" cy="405765"/>
           </a:xfrm>
           <a:prstGeom prst="rect">
             <a:avLst/>
@@ -4560,36 +5563,36 @@
           </a:bodyPr>
           <a:lstStyle/>
           <a:p>
-            <a:pPr algn="r">
+            <a:pPr algn="l">
               <a:lnSpc>
                 <a:spcPts val="3359"/>
               </a:lnSpc>
             </a:pPr>
             <a:r>
-              <a:rPr lang="en-US" sz="2400" spc="-48">
-                <a:solidFill>
-                  <a:srgbClr val="36211B"/>
-                </a:solidFill>
-                <a:latin typeface="Canva Sans"/>
-                <a:ea typeface="Canva Sans"/>
-                <a:cs typeface="Canva Sans"/>
-                <a:sym typeface="Canva Sans"/>
-              </a:rPr>
-              <a:t>Боцьків Любомир</a:t>
+              <a:rPr lang="en-US" sz="2400" spc="-96">
+                <a:solidFill>
+                  <a:srgbClr val="36211B"/>
+                </a:solidFill>
+                <a:latin typeface="IBM Plex Serif"/>
+                <a:ea typeface="IBM Plex Serif"/>
+                <a:cs typeface="IBM Plex Serif"/>
+                <a:sym typeface="IBM Plex Serif"/>
+              </a:rPr>
+              <a:t>1</a:t>
             </a:r>
           </a:p>
         </p:txBody>
       </p:sp>
       <p:sp>
         <p:nvSpPr>
-          <p:cNvPr id="8" name="TextBox 8"/>
+          <p:cNvPr id="10" name="TextBox 10"/>
           <p:cNvSpPr txBox="1"/>
           <p:nvPr/>
         </p:nvSpPr>
         <p:spPr>
           <a:xfrm>
-            <a:off x="12451095" y="8862060"/>
-            <a:ext cx="1998594" cy="396240"/>
+            <a:off x="6905362" y="981075"/>
+            <a:ext cx="398364" cy="405765"/>
           </a:xfrm>
           <a:prstGeom prst="rect">
             <a:avLst/>
@@ -4601,36 +5604,36 @@
           </a:bodyPr>
           <a:lstStyle/>
           <a:p>
-            <a:pPr algn="r">
+            <a:pPr algn="l">
               <a:lnSpc>
                 <a:spcPts val="3359"/>
               </a:lnSpc>
             </a:pPr>
             <a:r>
-              <a:rPr lang="en-US" sz="2400" spc="-48">
-                <a:solidFill>
-                  <a:srgbClr val="36211B"/>
-                </a:solidFill>
-                <a:latin typeface="Canva Sans"/>
-                <a:ea typeface="Canva Sans"/>
-                <a:cs typeface="Canva Sans"/>
-                <a:sym typeface="Canva Sans"/>
-              </a:rPr>
-              <a:t>Галух Антон</a:t>
+              <a:rPr lang="en-US" sz="2400" spc="-96">
+                <a:solidFill>
+                  <a:srgbClr val="36211B"/>
+                </a:solidFill>
+                <a:latin typeface="IBM Plex Serif"/>
+                <a:ea typeface="IBM Plex Serif"/>
+                <a:cs typeface="IBM Plex Serif"/>
+                <a:sym typeface="IBM Plex Serif"/>
+              </a:rPr>
+              <a:t>2</a:t>
             </a:r>
           </a:p>
         </p:txBody>
       </p:sp>
       <p:sp>
         <p:nvSpPr>
-          <p:cNvPr id="9" name="TextBox 9"/>
+          <p:cNvPr id="11" name="TextBox 11"/>
           <p:cNvSpPr txBox="1"/>
           <p:nvPr/>
         </p:nvSpPr>
         <p:spPr>
           <a:xfrm>
-            <a:off x="14947441" y="8862060"/>
-            <a:ext cx="2311859" cy="396240"/>
+            <a:off x="12582843" y="981075"/>
+            <a:ext cx="398364" cy="405765"/>
           </a:xfrm>
           <a:prstGeom prst="rect">
             <a:avLst/>
@@ -4642,22 +5645,22 @@
           </a:bodyPr>
           <a:lstStyle/>
           <a:p>
-            <a:pPr algn="r">
+            <a:pPr algn="l">
               <a:lnSpc>
                 <a:spcPts val="3359"/>
               </a:lnSpc>
             </a:pPr>
             <a:r>
-              <a:rPr lang="en-US" sz="2400" spc="-48">
-                <a:solidFill>
-                  <a:srgbClr val="36211B"/>
-                </a:solidFill>
-                <a:latin typeface="Canva Sans"/>
-                <a:ea typeface="Canva Sans"/>
-                <a:cs typeface="Canva Sans"/>
-                <a:sym typeface="Canva Sans"/>
-              </a:rPr>
-              <a:t>Галух Валентин</a:t>
+              <a:rPr lang="en-US" sz="2400" spc="-96">
+                <a:solidFill>
+                  <a:srgbClr val="36211B"/>
+                </a:solidFill>
+                <a:latin typeface="IBM Plex Serif"/>
+                <a:ea typeface="IBM Plex Serif"/>
+                <a:cs typeface="IBM Plex Serif"/>
+                <a:sym typeface="IBM Plex Serif"/>
+              </a:rPr>
+              <a:t>3</a:t>
             </a:r>
           </a:p>
         </p:txBody>
@@ -4667,461 +5670,17 @@
   <p:clrMapOvr>
     <a:masterClrMapping/>
   </p:clrMapOvr>
+  <p:timing>
+    <p:tnLst>
+      <p:par>
+        <p:cTn id="1" dur="indefinite" restart="never" nodeType="tmRoot"/>
+      </p:par>
+    </p:tnLst>
+  </p:timing>
 </p:sld>
 </file>
 
-<file path=ppt/slides/slide12.xml><?xml version="1.0" encoding="utf-8"?>
-<p:sld xmlns:a="http://schemas.openxmlformats.org/drawingml/2006/main" xmlns:r="http://schemas.openxmlformats.org/officeDocument/2006/relationships" xmlns:p="http://schemas.openxmlformats.org/presentationml/2006/main">
-  <p:cSld>
-    <p:bg>
-      <p:bgPr>
-        <a:solidFill>
-          <a:srgbClr val="E8E6E3"/>
-        </a:solidFill>
-        <a:effectLst/>
-      </p:bgPr>
-    </p:bg>
-    <p:spTree>
-      <p:nvGrpSpPr>
-        <p:cNvPr id="1" name=""/>
-        <p:cNvGrpSpPr/>
-        <p:nvPr/>
-      </p:nvGrpSpPr>
-      <p:grpSpPr>
-        <a:xfrm>
-          <a:off x="0" y="0"/>
-          <a:ext cx="0" cy="0"/>
-          <a:chOff x="0" y="0"/>
-          <a:chExt cx="0" cy="0"/>
-        </a:xfrm>
-      </p:grpSpPr>
-      <p:sp>
-        <p:nvSpPr>
-          <p:cNvPr id="2" name="Freeform 2"/>
-          <p:cNvSpPr/>
-          <p:nvPr/>
-        </p:nvSpPr>
-        <p:spPr>
-          <a:xfrm>
-            <a:off x="0" y="9910777"/>
-            <a:ext cx="18288000" cy="376223"/>
-          </a:xfrm>
-          <a:custGeom>
-            <a:avLst/>
-            <a:gdLst/>
-            <a:ahLst/>
-            <a:cxnLst/>
-            <a:rect l="l" t="t" r="r" b="b"/>
-            <a:pathLst>
-              <a:path w="18288000" h="376223">
-                <a:moveTo>
-                  <a:pt x="0" y="0"/>
-                </a:moveTo>
-                <a:lnTo>
-                  <a:pt x="18288000" y="0"/>
-                </a:lnTo>
-                <a:lnTo>
-                  <a:pt x="18288000" y="376223"/>
-                </a:lnTo>
-                <a:lnTo>
-                  <a:pt x="0" y="376223"/>
-                </a:lnTo>
-                <a:lnTo>
-                  <a:pt x="0" y="0"/>
-                </a:lnTo>
-                <a:close/>
-              </a:path>
-            </a:pathLst>
-          </a:custGeom>
-          <a:blipFill>
-            <a:blip r:embed="rId2"/>
-            <a:stretch>
-              <a:fillRect t="-1531929" b="-1102351"/>
-            </a:stretch>
-          </a:blipFill>
-        </p:spPr>
-      </p:sp>
-      <p:sp>
-        <p:nvSpPr>
-          <p:cNvPr id="3" name="Freeform 3"/>
-          <p:cNvSpPr/>
-          <p:nvPr/>
-        </p:nvSpPr>
-        <p:spPr>
-          <a:xfrm>
-            <a:off x="6406104" y="1028700"/>
-            <a:ext cx="6286802" cy="5375447"/>
-          </a:xfrm>
-          <a:custGeom>
-            <a:avLst/>
-            <a:gdLst/>
-            <a:ahLst/>
-            <a:cxnLst/>
-            <a:rect l="l" t="t" r="r" b="b"/>
-            <a:pathLst>
-              <a:path w="6286802" h="5375447">
-                <a:moveTo>
-                  <a:pt x="0" y="0"/>
-                </a:moveTo>
-                <a:lnTo>
-                  <a:pt x="6286802" y="0"/>
-                </a:lnTo>
-                <a:lnTo>
-                  <a:pt x="6286802" y="5375447"/>
-                </a:lnTo>
-                <a:lnTo>
-                  <a:pt x="0" y="5375447"/>
-                </a:lnTo>
-                <a:lnTo>
-                  <a:pt x="0" y="0"/>
-                </a:lnTo>
-                <a:close/>
-              </a:path>
-            </a:pathLst>
-          </a:custGeom>
-          <a:blipFill>
-            <a:blip r:embed="rId3"/>
-            <a:stretch>
-              <a:fillRect/>
-            </a:stretch>
-          </a:blipFill>
-        </p:spPr>
-      </p:sp>
-      <p:sp>
-        <p:nvSpPr>
-          <p:cNvPr id="4" name="TextBox 4"/>
-          <p:cNvSpPr txBox="1"/>
-          <p:nvPr/>
-        </p:nvSpPr>
-        <p:spPr>
-          <a:xfrm>
-            <a:off x="3662490" y="6743591"/>
-            <a:ext cx="10963021" cy="1261110"/>
-          </a:xfrm>
-          <a:prstGeom prst="rect">
-            <a:avLst/>
-          </a:prstGeom>
-        </p:spPr>
-        <p:txBody>
-          <a:bodyPr lIns="0" tIns="0" rIns="0" bIns="0" rtlCol="0" anchor="t">
-            <a:spAutoFit/>
-          </a:bodyPr>
-          <a:lstStyle/>
-          <a:p>
-            <a:pPr algn="ctr">
-              <a:lnSpc>
-                <a:spcPts val="5040"/>
-              </a:lnSpc>
-            </a:pPr>
-            <a:r>
-              <a:rPr lang="en-US" sz="3600" i="1" spc="-144" dirty="0" err="1">
-                <a:solidFill>
-                  <a:srgbClr val="36211B"/>
-                </a:solidFill>
-                <a:latin typeface="IBM Plex Serif Italics"/>
-                <a:ea typeface="IBM Plex Serif Italics"/>
-                <a:cs typeface="IBM Plex Serif Italics"/>
-                <a:sym typeface="IBM Plex Serif Italics"/>
-              </a:rPr>
-              <a:t>Якщо</a:t>
-            </a:r>
-            <a:r>
-              <a:rPr lang="en-US" sz="3600" i="1" spc="-144" dirty="0">
-                <a:solidFill>
-                  <a:srgbClr val="36211B"/>
-                </a:solidFill>
-                <a:latin typeface="IBM Plex Serif Italics"/>
-                <a:ea typeface="IBM Plex Serif Italics"/>
-                <a:cs typeface="IBM Plex Serif Italics"/>
-                <a:sym typeface="IBM Plex Serif Italics"/>
-              </a:rPr>
-              <a:t> у </a:t>
-            </a:r>
-            <a:r>
-              <a:rPr lang="en-US" sz="3600" i="1" spc="-144" dirty="0" err="1">
-                <a:solidFill>
-                  <a:srgbClr val="36211B"/>
-                </a:solidFill>
-                <a:latin typeface="IBM Plex Serif Italics"/>
-                <a:ea typeface="IBM Plex Serif Italics"/>
-                <a:cs typeface="IBM Plex Serif Italics"/>
-                <a:sym typeface="IBM Plex Serif Italics"/>
-              </a:rPr>
-              <a:t>Вас</a:t>
-            </a:r>
-            <a:r>
-              <a:rPr lang="en-US" sz="3600" i="1" spc="-144" dirty="0">
-                <a:solidFill>
-                  <a:srgbClr val="36211B"/>
-                </a:solidFill>
-                <a:latin typeface="IBM Plex Serif Italics"/>
-                <a:ea typeface="IBM Plex Serif Italics"/>
-                <a:cs typeface="IBM Plex Serif Italics"/>
-                <a:sym typeface="IBM Plex Serif Italics"/>
-              </a:rPr>
-              <a:t> </a:t>
-            </a:r>
-            <a:r>
-              <a:rPr lang="en-US" sz="3600" i="1" spc="-144" dirty="0" err="1">
-                <a:solidFill>
-                  <a:srgbClr val="36211B"/>
-                </a:solidFill>
-                <a:latin typeface="IBM Plex Serif Italics"/>
-                <a:ea typeface="IBM Plex Serif Italics"/>
-                <a:cs typeface="IBM Plex Serif Italics"/>
-                <a:sym typeface="IBM Plex Serif Italics"/>
-              </a:rPr>
-              <a:t>залишились</a:t>
-            </a:r>
-            <a:r>
-              <a:rPr lang="en-US" sz="3600" i="1" spc="-144" dirty="0">
-                <a:solidFill>
-                  <a:srgbClr val="36211B"/>
-                </a:solidFill>
-                <a:latin typeface="IBM Plex Serif Italics"/>
-                <a:ea typeface="IBM Plex Serif Italics"/>
-                <a:cs typeface="IBM Plex Serif Italics"/>
-                <a:sym typeface="IBM Plex Serif Italics"/>
-              </a:rPr>
-              <a:t> </a:t>
-            </a:r>
-            <a:r>
-              <a:rPr lang="en-US" sz="3600" i="1" spc="-144" dirty="0" err="1">
-                <a:solidFill>
-                  <a:srgbClr val="36211B"/>
-                </a:solidFill>
-                <a:latin typeface="IBM Plex Serif Italics"/>
-                <a:ea typeface="IBM Plex Serif Italics"/>
-                <a:cs typeface="IBM Plex Serif Italics"/>
-                <a:sym typeface="IBM Plex Serif Italics"/>
-              </a:rPr>
-              <a:t>якісь</a:t>
-            </a:r>
-            <a:r>
-              <a:rPr lang="en-US" sz="3600" i="1" spc="-144" dirty="0">
-                <a:solidFill>
-                  <a:srgbClr val="36211B"/>
-                </a:solidFill>
-                <a:latin typeface="IBM Plex Serif Italics"/>
-                <a:ea typeface="IBM Plex Serif Italics"/>
-                <a:cs typeface="IBM Plex Serif Italics"/>
-                <a:sym typeface="IBM Plex Serif Italics"/>
-              </a:rPr>
-              <a:t> </a:t>
-            </a:r>
-            <a:r>
-              <a:rPr lang="en-US" sz="3600" i="1" spc="-144" dirty="0" err="1">
-                <a:solidFill>
-                  <a:srgbClr val="36211B"/>
-                </a:solidFill>
-                <a:latin typeface="IBM Plex Serif Italics"/>
-                <a:ea typeface="IBM Plex Serif Italics"/>
-                <a:cs typeface="IBM Plex Serif Italics"/>
-                <a:sym typeface="IBM Plex Serif Italics"/>
-              </a:rPr>
-              <a:t>запитання</a:t>
-            </a:r>
-            <a:r>
-              <a:rPr lang="en-US" sz="3600" i="1" spc="-144" dirty="0">
-                <a:solidFill>
-                  <a:srgbClr val="36211B"/>
-                </a:solidFill>
-                <a:latin typeface="IBM Plex Serif Italics"/>
-                <a:ea typeface="IBM Plex Serif Italics"/>
-                <a:cs typeface="IBM Plex Serif Italics"/>
-                <a:sym typeface="IBM Plex Serif Italics"/>
-              </a:rPr>
-              <a:t> - </a:t>
-            </a:r>
-            <a:r>
-              <a:rPr lang="en-US" sz="3600" i="1" spc="-144" dirty="0" err="1">
-                <a:solidFill>
-                  <a:srgbClr val="36211B"/>
-                </a:solidFill>
-                <a:latin typeface="IBM Plex Serif Italics"/>
-                <a:ea typeface="IBM Plex Serif Italics"/>
-                <a:cs typeface="IBM Plex Serif Italics"/>
-                <a:sym typeface="IBM Plex Serif Italics"/>
-              </a:rPr>
-              <a:t>тримайте</a:t>
-            </a:r>
-            <a:r>
-              <a:rPr lang="en-US" sz="3600" i="1" spc="-144" dirty="0">
-                <a:solidFill>
-                  <a:srgbClr val="36211B"/>
-                </a:solidFill>
-                <a:latin typeface="IBM Plex Serif Italics"/>
-                <a:ea typeface="IBM Plex Serif Italics"/>
-                <a:cs typeface="IBM Plex Serif Italics"/>
-                <a:sym typeface="IBM Plex Serif Italics"/>
-              </a:rPr>
-              <a:t> </a:t>
-            </a:r>
-            <a:r>
-              <a:rPr lang="en-US" sz="3600" i="1" spc="-144" dirty="0" err="1">
-                <a:solidFill>
-                  <a:srgbClr val="36211B"/>
-                </a:solidFill>
-                <a:latin typeface="IBM Plex Serif Italics"/>
-                <a:ea typeface="IBM Plex Serif Italics"/>
-                <a:cs typeface="IBM Plex Serif Italics"/>
-                <a:sym typeface="IBM Plex Serif Italics"/>
-              </a:rPr>
-              <a:t>їх</a:t>
-            </a:r>
-            <a:r>
-              <a:rPr lang="en-US" sz="3600" i="1" spc="-144" dirty="0">
-                <a:solidFill>
-                  <a:srgbClr val="36211B"/>
-                </a:solidFill>
-                <a:latin typeface="IBM Plex Serif Italics"/>
-                <a:ea typeface="IBM Plex Serif Italics"/>
-                <a:cs typeface="IBM Plex Serif Italics"/>
-                <a:sym typeface="IBM Plex Serif Italics"/>
-              </a:rPr>
-              <a:t> </a:t>
-            </a:r>
-            <a:r>
-              <a:rPr lang="en-US" sz="3600" i="1" spc="-144" dirty="0" err="1">
-                <a:solidFill>
-                  <a:srgbClr val="36211B"/>
-                </a:solidFill>
-                <a:latin typeface="IBM Plex Serif Italics"/>
-                <a:ea typeface="IBM Plex Serif Italics"/>
-                <a:cs typeface="IBM Plex Serif Italics"/>
-                <a:sym typeface="IBM Plex Serif Italics"/>
-              </a:rPr>
-              <a:t>при</a:t>
-            </a:r>
-            <a:r>
-              <a:rPr lang="en-US" sz="3600" i="1" spc="-144" dirty="0">
-                <a:solidFill>
-                  <a:srgbClr val="36211B"/>
-                </a:solidFill>
-                <a:latin typeface="IBM Plex Serif Italics"/>
-                <a:ea typeface="IBM Plex Serif Italics"/>
-                <a:cs typeface="IBM Plex Serif Italics"/>
-                <a:sym typeface="IBM Plex Serif Italics"/>
-              </a:rPr>
-              <a:t> </a:t>
-            </a:r>
-            <a:r>
-              <a:rPr lang="en-US" sz="3600" i="1" spc="-144" dirty="0" err="1">
-                <a:solidFill>
-                  <a:srgbClr val="36211B"/>
-                </a:solidFill>
-                <a:latin typeface="IBM Plex Serif Italics"/>
-                <a:ea typeface="IBM Plex Serif Italics"/>
-                <a:cs typeface="IBM Plex Serif Italics"/>
-                <a:sym typeface="IBM Plex Serif Italics"/>
-              </a:rPr>
-              <a:t>собі</a:t>
-            </a:r>
-            <a:r>
-              <a:rPr lang="en-US" sz="3600" i="1" spc="-144" dirty="0">
-                <a:solidFill>
-                  <a:srgbClr val="36211B"/>
-                </a:solidFill>
-                <a:latin typeface="IBM Plex Serif Italics"/>
-                <a:ea typeface="IBM Plex Serif Italics"/>
-                <a:cs typeface="IBM Plex Serif Italics"/>
-                <a:sym typeface="IBM Plex Serif Italics"/>
-              </a:rPr>
-              <a:t>, я </a:t>
-            </a:r>
-            <a:r>
-              <a:rPr lang="en-US" sz="3600" i="1" spc="-144" dirty="0" err="1">
-                <a:solidFill>
-                  <a:srgbClr val="36211B"/>
-                </a:solidFill>
-                <a:latin typeface="IBM Plex Serif Italics"/>
-                <a:ea typeface="IBM Plex Serif Italics"/>
-                <a:cs typeface="IBM Plex Serif Italics"/>
-                <a:sym typeface="IBM Plex Serif Italics"/>
-              </a:rPr>
-              <a:t>Вам</a:t>
-            </a:r>
-            <a:r>
-              <a:rPr lang="en-US" sz="3600" i="1" spc="-144" dirty="0">
-                <a:solidFill>
-                  <a:srgbClr val="36211B"/>
-                </a:solidFill>
-                <a:latin typeface="IBM Plex Serif Italics"/>
-                <a:ea typeface="IBM Plex Serif Italics"/>
-                <a:cs typeface="IBM Plex Serif Italics"/>
-                <a:sym typeface="IBM Plex Serif Italics"/>
-              </a:rPr>
-              <a:t> </a:t>
-            </a:r>
-            <a:r>
-              <a:rPr lang="en-US" sz="3600" i="1" spc="-144" dirty="0" err="1">
-                <a:solidFill>
-                  <a:srgbClr val="36211B"/>
-                </a:solidFill>
-                <a:latin typeface="IBM Plex Serif Italics"/>
-                <a:ea typeface="IBM Plex Serif Italics"/>
-                <a:cs typeface="IBM Plex Serif Italics"/>
-                <a:sym typeface="IBM Plex Serif Italics"/>
-              </a:rPr>
-              <a:t>не</a:t>
-            </a:r>
-            <a:r>
-              <a:rPr lang="en-US" sz="3600" i="1" spc="-144" dirty="0">
-                <a:solidFill>
-                  <a:srgbClr val="36211B"/>
-                </a:solidFill>
-                <a:latin typeface="IBM Plex Serif Italics"/>
-                <a:ea typeface="IBM Plex Serif Italics"/>
-                <a:cs typeface="IBM Plex Serif Italics"/>
-                <a:sym typeface="IBM Plex Serif Italics"/>
-              </a:rPr>
-              <a:t> Google :)</a:t>
-            </a:r>
-          </a:p>
-        </p:txBody>
-      </p:sp>
-    </p:spTree>
-  </p:cSld>
-  <p:clrMapOvr>
-    <a:masterClrMapping/>
-  </p:clrMapOvr>
-</p:sld>
-</file>
-
-<file path=ppt/slides/slide13.xml><?xml version="1.0" encoding="utf-8"?>
-<p:sld xmlns:a="http://schemas.openxmlformats.org/drawingml/2006/main" xmlns:r="http://schemas.openxmlformats.org/officeDocument/2006/relationships" xmlns:p="http://schemas.openxmlformats.org/presentationml/2006/main">
-  <p:cSld>
-    <p:bg>
-      <p:bgPr>
-        <a:solidFill>
-          <a:srgbClr val="E8E6E3"/>
-        </a:solidFill>
-        <a:effectLst/>
-      </p:bgPr>
-    </p:bg>
-    <p:spTree>
-      <p:nvGrpSpPr>
-        <p:cNvPr id="1" name=""/>
-        <p:cNvGrpSpPr/>
-        <p:nvPr/>
-      </p:nvGrpSpPr>
-      <p:grpSpPr>
-        <a:xfrm>
-          <a:off x="0" y="0"/>
-          <a:ext cx="0" cy="0"/>
-          <a:chOff x="0" y="0"/>
-          <a:chExt cx="0" cy="0"/>
-        </a:xfrm>
-      </p:grpSpPr>
-    </p:spTree>
-  </p:cSld>
-  <p:clrMapOvr>
-    <a:masterClrMapping/>
-  </p:clrMapOvr>
-</p:sld>
-</file>
-
-<file path=ppt/slides/slide2.xml><?xml version="1.0" encoding="utf-8"?>
+<file path=ppt/slides/slide3.xml><?xml version="1.0" encoding="utf-8"?>
 <p:sld xmlns:a="http://schemas.openxmlformats.org/drawingml/2006/main" xmlns:r="http://schemas.openxmlformats.org/officeDocument/2006/relationships" xmlns:p="http://schemas.openxmlformats.org/presentationml/2006/main">
   <p:cSld>
     <p:bg>
@@ -5200,8 +5759,8 @@
         </p:nvSpPr>
         <p:spPr>
           <a:xfrm>
-            <a:off x="1028700" y="1584078"/>
-            <a:ext cx="4477275" cy="622935"/>
+            <a:off x="7038796" y="1231343"/>
+            <a:ext cx="4210407" cy="679450"/>
           </a:xfrm>
           <a:prstGeom prst="rect">
             <a:avLst/>
@@ -5213,36 +5772,63 @@
           </a:bodyPr>
           <a:lstStyle/>
           <a:p>
-            <a:pPr algn="l">
+            <a:pPr algn="ctr">
               <a:lnSpc>
-                <a:spcPts val="5040"/>
+                <a:spcPts val="5599"/>
               </a:lnSpc>
+              <a:spcBef>
+                <a:spcPct val="0"/>
+              </a:spcBef>
             </a:pPr>
             <a:r>
-              <a:rPr lang="en-US" sz="3600" i="1" spc="-144">
-                <a:solidFill>
-                  <a:srgbClr val="36211B"/>
+              <a:rPr lang="en-US" sz="3999" i="1" spc="-159">
+                <a:solidFill>
+                  <a:srgbClr val="000000"/>
                 </a:solidFill>
                 <a:latin typeface="IBM Plex Serif Italics"/>
                 <a:ea typeface="IBM Plex Serif Italics"/>
                 <a:cs typeface="IBM Plex Serif Italics"/>
                 <a:sym typeface="IBM Plex Serif Italics"/>
               </a:rPr>
-              <a:t>Ідея та ціль продукту</a:t>
+              <a:t>Цінність продукту </a:t>
             </a:r>
           </a:p>
         </p:txBody>
       </p:sp>
       <p:sp>
         <p:nvSpPr>
-          <p:cNvPr id="4" name="TextBox 4"/>
+          <p:cNvPr id="4" name="AutoShape 4"/>
+          <p:cNvSpPr/>
+          <p:nvPr/>
+        </p:nvSpPr>
+        <p:spPr>
+          <a:xfrm>
+            <a:off x="1028700" y="3038813"/>
+            <a:ext cx="1391580" cy="0"/>
+          </a:xfrm>
+          <a:prstGeom prst="line">
+            <a:avLst/>
+          </a:prstGeom>
+          <a:ln w="38100" cap="flat">
+            <a:solidFill>
+              <a:srgbClr val="000000"/>
+            </a:solidFill>
+            <a:prstDash val="solid"/>
+            <a:headEnd type="none" w="sm" len="sm"/>
+            <a:tailEnd type="triangle" w="lg" len="med"/>
+          </a:ln>
+        </p:spPr>
+      </p:sp>
+      <p:sp>
+        <p:nvSpPr>
+          <p:cNvPr id="5" name="TextBox 5"/>
           <p:cNvSpPr txBox="1"/>
           <p:nvPr/>
         </p:nvSpPr>
         <p:spPr>
           <a:xfrm>
-            <a:off x="1028700" y="2445138"/>
-            <a:ext cx="4477275" cy="3887470"/>
+            <a:off x="2048866" y="2784963"/>
+            <a:ext cx="15210434" cy="1526540"/>
           </a:xfrm>
           <a:prstGeom prst="rect">
             <a:avLst/>
@@ -5254,33 +5840,63 @@
           </a:bodyPr>
           <a:lstStyle/>
           <a:p>
-            <a:pPr algn="l">
+            <a:pPr algn="ctr">
               <a:lnSpc>
-                <a:spcPts val="3080"/>
+                <a:spcPts val="4060"/>
               </a:lnSpc>
+              <a:spcBef>
+                <a:spcPct val="0"/>
+              </a:spcBef>
             </a:pPr>
             <a:r>
-              <a:rPr lang="en-US" sz="2200" spc="-44">
-                <a:solidFill>
-                  <a:srgbClr val="36211B"/>
-                </a:solidFill>
-                <a:latin typeface="Canva Sans"/>
-                <a:ea typeface="Canva Sans"/>
-                <a:cs typeface="Canva Sans"/>
-                <a:sym typeface="Canva Sans"/>
-              </a:rPr>
-              <a:t>Проєкт має на меті спростити процес планування харчування, дозволяючи користувачам швидко отримувати збалансоване меню з різноманітними стравами. Додаток генерує рецепти на основі вашої цільової кількості калорій та наявних інгредієнтів.</a:t>
-            </a:r>
-          </a:p>
-          <a:p>
-            <a:pPr algn="l">
+              <a:rPr lang="en-US" sz="2900" spc="-116">
+                <a:solidFill>
+                  <a:srgbClr val="000000"/>
+                </a:solidFill>
+                <a:latin typeface="Canva Sans"/>
+                <a:ea typeface="Canva Sans"/>
+                <a:cs typeface="Canva Sans"/>
+                <a:sym typeface="Canva Sans"/>
+              </a:rPr>
+              <a:t>    </a:t>
+            </a:r>
+            <a:r>
+              <a:rPr lang="en-US" sz="2900" b="1" spc="-116">
+                <a:solidFill>
+                  <a:srgbClr val="000000"/>
+                </a:solidFill>
+                <a:latin typeface="Canva Sans Bold"/>
+                <a:ea typeface="Canva Sans Bold"/>
+                <a:cs typeface="Canva Sans Bold"/>
+                <a:sym typeface="Canva Sans Bold"/>
+              </a:rPr>
+              <a:t>Економія часу: </a:t>
+            </a:r>
+            <a:r>
+              <a:rPr lang="en-US" sz="2900" spc="-116">
+                <a:solidFill>
+                  <a:srgbClr val="000000"/>
+                </a:solidFill>
+                <a:latin typeface="Canva Sans"/>
+                <a:ea typeface="Canva Sans"/>
+                <a:cs typeface="Canva Sans"/>
+                <a:sym typeface="Canva Sans"/>
+              </a:rPr>
+              <a:t>Автоматизоване планування харчування усуває необхідність вручну підбирати рецепти та складати меню.</a:t>
+            </a:r>
+          </a:p>
+          <a:p>
+            <a:pPr algn="ctr">
               <a:lnSpc>
-                <a:spcPts val="3080"/>
+                <a:spcPts val="4060"/>
               </a:lnSpc>
+              <a:spcBef>
+                <a:spcPct val="0"/>
+              </a:spcBef>
             </a:pPr>
-            <a:endParaRPr lang="en-US" sz="2200" spc="-44">
+            <a:endParaRPr lang="en-US" sz="2900" spc="-116">
               <a:solidFill>
-                <a:srgbClr val="36211B"/>
+                <a:srgbClr val="000000"/>
               </a:solidFill>
               <a:latin typeface="Canva Sans"/>
               <a:ea typeface="Canva Sans"/>
@@ -5292,14 +5908,38 @@
       </p:sp>
       <p:sp>
         <p:nvSpPr>
-          <p:cNvPr id="5" name="TextBox 5"/>
+          <p:cNvPr id="6" name="AutoShape 6"/>
+          <p:cNvSpPr/>
+          <p:nvPr/>
+        </p:nvSpPr>
+        <p:spPr>
+          <a:xfrm>
+            <a:off x="1028700" y="4311503"/>
+            <a:ext cx="1391580" cy="0"/>
+          </a:xfrm>
+          <a:prstGeom prst="line">
+            <a:avLst/>
+          </a:prstGeom>
+          <a:ln w="38100" cap="flat">
+            <a:solidFill>
+              <a:srgbClr val="000000"/>
+            </a:solidFill>
+            <a:prstDash val="solid"/>
+            <a:headEnd type="none" w="sm" len="sm"/>
+            <a:tailEnd type="triangle" w="lg" len="med"/>
+          </a:ln>
+        </p:spPr>
+      </p:sp>
+      <p:sp>
+        <p:nvSpPr>
+          <p:cNvPr id="7" name="TextBox 7"/>
           <p:cNvSpPr txBox="1"/>
           <p:nvPr/>
         </p:nvSpPr>
         <p:spPr>
           <a:xfrm>
-            <a:off x="6755706" y="1584078"/>
-            <a:ext cx="4477275" cy="622935"/>
+            <a:off x="2420280" y="4065059"/>
+            <a:ext cx="14587238" cy="1012190"/>
           </a:xfrm>
           <a:prstGeom prst="rect">
             <a:avLst/>
@@ -5311,36 +5951,375 @@
           </a:bodyPr>
           <a:lstStyle/>
           <a:p>
-            <a:pPr algn="l">
+            <a:pPr algn="ctr">
               <a:lnSpc>
-                <a:spcPts val="5040"/>
+                <a:spcPts val="4060"/>
               </a:lnSpc>
+              <a:spcBef>
+                <a:spcPct val="0"/>
+              </a:spcBef>
             </a:pPr>
             <a:r>
-              <a:rPr lang="en-US" sz="3600" i="1" spc="-144">
-                <a:solidFill>
-                  <a:srgbClr val="36211B"/>
-                </a:solidFill>
-                <a:latin typeface="IBM Plex Serif Italics"/>
-                <a:ea typeface="IBM Plex Serif Italics"/>
-                <a:cs typeface="IBM Plex Serif Italics"/>
-                <a:sym typeface="IBM Plex Serif Italics"/>
-              </a:rPr>
-              <a:t>Актуальність</a:t>
+              <a:rPr lang="en-US" sz="2900" b="1" spc="-116" dirty="0" err="1">
+                <a:solidFill>
+                  <a:srgbClr val="000000"/>
+                </a:solidFill>
+                <a:latin typeface="Canva Sans Bold"/>
+                <a:ea typeface="Canva Sans Bold"/>
+                <a:cs typeface="Canva Sans Bold"/>
+                <a:sym typeface="Canva Sans Bold"/>
+              </a:rPr>
+              <a:t>Монетизація</a:t>
+            </a:r>
+            <a:r>
+              <a:rPr lang="en-US" sz="2900" b="1" spc="-116" dirty="0">
+                <a:solidFill>
+                  <a:srgbClr val="000000"/>
+                </a:solidFill>
+                <a:latin typeface="Canva Sans Bold"/>
+                <a:ea typeface="Canva Sans Bold"/>
+                <a:cs typeface="Canva Sans Bold"/>
+                <a:sym typeface="Canva Sans Bold"/>
+              </a:rPr>
+              <a:t>:</a:t>
+            </a:r>
+            <a:r>
+              <a:rPr lang="en-US" sz="2900" spc="-116" dirty="0">
+                <a:solidFill>
+                  <a:srgbClr val="000000"/>
+                </a:solidFill>
+                <a:latin typeface="Canva Sans"/>
+                <a:ea typeface="Canva Sans"/>
+                <a:cs typeface="Canva Sans"/>
+                <a:sym typeface="Canva Sans"/>
+              </a:rPr>
+              <a:t> </a:t>
+            </a:r>
+            <a:r>
+              <a:rPr lang="en-US" sz="2900" spc="-116" dirty="0" err="1">
+                <a:solidFill>
+                  <a:srgbClr val="000000"/>
+                </a:solidFill>
+                <a:latin typeface="Canva Sans"/>
+                <a:ea typeface="Canva Sans"/>
+                <a:cs typeface="Canva Sans"/>
+                <a:sym typeface="Canva Sans"/>
+              </a:rPr>
+              <a:t>Можливість</a:t>
+            </a:r>
+            <a:r>
+              <a:rPr lang="en-US" sz="2900" spc="-116" dirty="0">
+                <a:solidFill>
+                  <a:srgbClr val="000000"/>
+                </a:solidFill>
+                <a:latin typeface="Canva Sans"/>
+                <a:ea typeface="Canva Sans"/>
+                <a:cs typeface="Canva Sans"/>
+                <a:sym typeface="Canva Sans"/>
+              </a:rPr>
+              <a:t> </a:t>
+            </a:r>
+            <a:r>
+              <a:rPr lang="en-US" sz="2900" spc="-116" dirty="0" err="1">
+                <a:solidFill>
+                  <a:srgbClr val="000000"/>
+                </a:solidFill>
+                <a:latin typeface="Canva Sans"/>
+                <a:ea typeface="Canva Sans"/>
+                <a:cs typeface="Canva Sans"/>
+                <a:sym typeface="Canva Sans"/>
+              </a:rPr>
+              <a:t>впровадження</a:t>
+            </a:r>
+            <a:r>
+              <a:rPr lang="en-US" sz="2900" spc="-116" dirty="0">
+                <a:solidFill>
+                  <a:srgbClr val="000000"/>
+                </a:solidFill>
+                <a:latin typeface="Canva Sans"/>
+                <a:ea typeface="Canva Sans"/>
+                <a:cs typeface="Canva Sans"/>
+                <a:sym typeface="Canva Sans"/>
+              </a:rPr>
+              <a:t> </a:t>
+            </a:r>
+            <a:r>
+              <a:rPr lang="en-US" sz="2900" spc="-116" dirty="0" err="1">
+                <a:solidFill>
+                  <a:srgbClr val="000000"/>
+                </a:solidFill>
+                <a:latin typeface="Canva Sans"/>
+                <a:ea typeface="Canva Sans"/>
+                <a:cs typeface="Canva Sans"/>
+                <a:sym typeface="Canva Sans"/>
+              </a:rPr>
+              <a:t>преміум-функцій</a:t>
+            </a:r>
+            <a:r>
+              <a:rPr lang="en-US" sz="2900" spc="-116" dirty="0">
+                <a:solidFill>
+                  <a:srgbClr val="000000"/>
+                </a:solidFill>
+                <a:latin typeface="Canva Sans"/>
+                <a:ea typeface="Canva Sans"/>
+                <a:cs typeface="Canva Sans"/>
+                <a:sym typeface="Canva Sans"/>
+              </a:rPr>
+              <a:t>, </a:t>
+            </a:r>
+            <a:r>
+              <a:rPr lang="en-US" sz="2900" spc="-116" dirty="0" err="1">
+                <a:solidFill>
+                  <a:srgbClr val="000000"/>
+                </a:solidFill>
+                <a:latin typeface="Canva Sans"/>
+                <a:ea typeface="Canva Sans"/>
+                <a:cs typeface="Canva Sans"/>
+                <a:sym typeface="Canva Sans"/>
+              </a:rPr>
+              <a:t>підписок</a:t>
+            </a:r>
+            <a:r>
+              <a:rPr lang="en-US" sz="2900" spc="-116" dirty="0">
+                <a:solidFill>
+                  <a:srgbClr val="000000"/>
+                </a:solidFill>
+                <a:latin typeface="Canva Sans"/>
+                <a:ea typeface="Canva Sans"/>
+                <a:cs typeface="Canva Sans"/>
+                <a:sym typeface="Canva Sans"/>
+              </a:rPr>
+              <a:t> </a:t>
+            </a:r>
+            <a:r>
+              <a:rPr lang="en-US" sz="2900" spc="-116" dirty="0" err="1">
+                <a:solidFill>
+                  <a:srgbClr val="000000"/>
+                </a:solidFill>
+                <a:latin typeface="Canva Sans"/>
+                <a:ea typeface="Canva Sans"/>
+                <a:cs typeface="Canva Sans"/>
+                <a:sym typeface="Canva Sans"/>
+              </a:rPr>
+              <a:t>або</a:t>
+            </a:r>
+            <a:r>
+              <a:rPr lang="en-US" sz="2900" spc="-116" dirty="0">
+                <a:solidFill>
+                  <a:srgbClr val="000000"/>
+                </a:solidFill>
+                <a:latin typeface="Canva Sans"/>
+                <a:ea typeface="Canva Sans"/>
+                <a:cs typeface="Canva Sans"/>
+                <a:sym typeface="Canva Sans"/>
+              </a:rPr>
+              <a:t> </a:t>
+            </a:r>
+            <a:r>
+              <a:rPr lang="en-US" sz="2900" spc="-116" dirty="0" err="1">
+                <a:solidFill>
+                  <a:srgbClr val="000000"/>
+                </a:solidFill>
+                <a:latin typeface="Canva Sans"/>
+                <a:ea typeface="Canva Sans"/>
+                <a:cs typeface="Canva Sans"/>
+                <a:sym typeface="Canva Sans"/>
+              </a:rPr>
+              <a:t>реклами</a:t>
+            </a:r>
+            <a:r>
+              <a:rPr lang="en-US" sz="2900" spc="-116" dirty="0">
+                <a:solidFill>
+                  <a:srgbClr val="000000"/>
+                </a:solidFill>
+                <a:latin typeface="Canva Sans"/>
+                <a:ea typeface="Canva Sans"/>
+                <a:cs typeface="Canva Sans"/>
+                <a:sym typeface="Canva Sans"/>
+              </a:rPr>
+              <a:t> </a:t>
+            </a:r>
+            <a:r>
+              <a:rPr lang="en-US" sz="2900" spc="-116" dirty="0" err="1">
+                <a:solidFill>
+                  <a:srgbClr val="000000"/>
+                </a:solidFill>
+                <a:latin typeface="Canva Sans"/>
+                <a:ea typeface="Canva Sans"/>
+                <a:cs typeface="Canva Sans"/>
+                <a:sym typeface="Canva Sans"/>
+              </a:rPr>
+              <a:t>партнерських</a:t>
+            </a:r>
+            <a:r>
+              <a:rPr lang="en-US" sz="2900" spc="-116" dirty="0">
+                <a:solidFill>
+                  <a:srgbClr val="000000"/>
+                </a:solidFill>
+                <a:latin typeface="Canva Sans"/>
+                <a:ea typeface="Canva Sans"/>
+                <a:cs typeface="Canva Sans"/>
+                <a:sym typeface="Canva Sans"/>
+              </a:rPr>
+              <a:t> </a:t>
+            </a:r>
+            <a:r>
+              <a:rPr lang="en-US" sz="2900" spc="-116" dirty="0" err="1">
+                <a:solidFill>
+                  <a:srgbClr val="000000"/>
+                </a:solidFill>
+                <a:latin typeface="Canva Sans"/>
+                <a:ea typeface="Canva Sans"/>
+                <a:cs typeface="Canva Sans"/>
+                <a:sym typeface="Canva Sans"/>
+              </a:rPr>
+              <a:t>сервісів</a:t>
+            </a:r>
+            <a:r>
+              <a:rPr lang="en-US" sz="2900" spc="-116" dirty="0">
+                <a:solidFill>
+                  <a:srgbClr val="000000"/>
+                </a:solidFill>
+                <a:latin typeface="Canva Sans"/>
+                <a:ea typeface="Canva Sans"/>
+                <a:cs typeface="Canva Sans"/>
+                <a:sym typeface="Canva Sans"/>
+              </a:rPr>
+              <a:t> (</a:t>
+            </a:r>
+            <a:r>
+              <a:rPr lang="en-US" sz="2900" spc="-116" dirty="0" err="1">
+                <a:solidFill>
+                  <a:srgbClr val="000000"/>
+                </a:solidFill>
+                <a:latin typeface="Canva Sans"/>
+                <a:ea typeface="Canva Sans"/>
+                <a:cs typeface="Canva Sans"/>
+                <a:sym typeface="Canva Sans"/>
+              </a:rPr>
+              <a:t>рецепти</a:t>
+            </a:r>
+            <a:r>
+              <a:rPr lang="en-US" sz="2900" spc="-116" dirty="0">
+                <a:solidFill>
+                  <a:srgbClr val="000000"/>
+                </a:solidFill>
+                <a:latin typeface="Canva Sans"/>
+                <a:ea typeface="Canva Sans"/>
+                <a:cs typeface="Canva Sans"/>
+                <a:sym typeface="Canva Sans"/>
+              </a:rPr>
+              <a:t>, </a:t>
+            </a:r>
+            <a:r>
+              <a:rPr lang="en-US" sz="2900" spc="-116" dirty="0" err="1">
+                <a:solidFill>
+                  <a:srgbClr val="000000"/>
+                </a:solidFill>
+                <a:latin typeface="Canva Sans"/>
+                <a:ea typeface="Canva Sans"/>
+                <a:cs typeface="Canva Sans"/>
+                <a:sym typeface="Canva Sans"/>
+              </a:rPr>
+              <a:t>кулінарні</a:t>
+            </a:r>
+            <a:r>
+              <a:rPr lang="en-US" sz="2900" spc="-116" dirty="0">
+                <a:solidFill>
+                  <a:srgbClr val="000000"/>
+                </a:solidFill>
+                <a:latin typeface="Canva Sans"/>
+                <a:ea typeface="Canva Sans"/>
+                <a:cs typeface="Canva Sans"/>
+                <a:sym typeface="Canva Sans"/>
+              </a:rPr>
+              <a:t> </a:t>
+            </a:r>
+            <a:r>
+              <a:rPr lang="en-US" sz="2900" spc="-116" dirty="0" err="1">
+                <a:solidFill>
+                  <a:srgbClr val="000000"/>
+                </a:solidFill>
+                <a:latin typeface="Canva Sans"/>
+                <a:ea typeface="Canva Sans"/>
+                <a:cs typeface="Canva Sans"/>
+                <a:sym typeface="Canva Sans"/>
+              </a:rPr>
+              <a:t>бренди</a:t>
+            </a:r>
+            <a:r>
+              <a:rPr lang="en-US" sz="2900" spc="-116" dirty="0">
+                <a:solidFill>
+                  <a:srgbClr val="000000"/>
+                </a:solidFill>
+                <a:latin typeface="Canva Sans"/>
+                <a:ea typeface="Canva Sans"/>
+                <a:cs typeface="Canva Sans"/>
+                <a:sym typeface="Canva Sans"/>
+              </a:rPr>
+              <a:t> </a:t>
+            </a:r>
+            <a:r>
+              <a:rPr lang="en-US" sz="2900" spc="-116" dirty="0" err="1">
+                <a:solidFill>
+                  <a:srgbClr val="000000"/>
+                </a:solidFill>
+                <a:latin typeface="Canva Sans"/>
+                <a:ea typeface="Canva Sans"/>
+                <a:cs typeface="Canva Sans"/>
+                <a:sym typeface="Canva Sans"/>
+              </a:rPr>
+              <a:t>тощо</a:t>
+            </a:r>
+            <a:r>
+              <a:rPr lang="en-US" sz="2900" spc="-116" dirty="0">
+                <a:solidFill>
+                  <a:srgbClr val="000000"/>
+                </a:solidFill>
+                <a:latin typeface="Canva Sans"/>
+                <a:ea typeface="Canva Sans"/>
+                <a:cs typeface="Canva Sans"/>
+                <a:sym typeface="Canva Sans"/>
+              </a:rPr>
+              <a:t>).</a:t>
             </a:r>
           </a:p>
         </p:txBody>
       </p:sp>
       <p:sp>
         <p:nvSpPr>
-          <p:cNvPr id="6" name="TextBox 6"/>
+          <p:cNvPr id="8" name="AutoShape 8"/>
+          <p:cNvSpPr/>
+          <p:nvPr/>
+        </p:nvSpPr>
+        <p:spPr>
+          <a:xfrm>
+            <a:off x="1028700" y="5720454"/>
+            <a:ext cx="1391580" cy="0"/>
+          </a:xfrm>
+          <a:prstGeom prst="line">
+            <a:avLst/>
+          </a:prstGeom>
+          <a:ln w="38100" cap="flat">
+            <a:solidFill>
+              <a:srgbClr val="000000"/>
+            </a:solidFill>
+            <a:prstDash val="solid"/>
+            <a:headEnd type="none" w="sm" len="sm"/>
+            <a:tailEnd type="triangle" w="lg" len="med"/>
+          </a:ln>
+        </p:spPr>
+      </p:sp>
+      <p:sp>
+        <p:nvSpPr>
+          <p:cNvPr id="9" name="TextBox 9"/>
           <p:cNvSpPr txBox="1"/>
           <p:nvPr/>
         </p:nvSpPr>
         <p:spPr>
           <a:xfrm>
-            <a:off x="6905362" y="2445138"/>
-            <a:ext cx="4477275" cy="3106420"/>
+            <a:off x="2420280" y="5429205"/>
+            <a:ext cx="14839020" cy="1526540"/>
           </a:xfrm>
           <a:prstGeom prst="rect">
             <a:avLst/>
@@ -5352,231 +6331,294 @@
           </a:bodyPr>
           <a:lstStyle/>
           <a:p>
-            <a:pPr algn="l">
+            <a:pPr algn="ctr">
               <a:lnSpc>
-                <a:spcPts val="3080"/>
+                <a:spcPts val="4060"/>
               </a:lnSpc>
+              <a:spcBef>
+                <a:spcPct val="0"/>
+              </a:spcBef>
             </a:pPr>
             <a:r>
-              <a:rPr lang="en-US" sz="2200" spc="-44" dirty="0" err="1">
-                <a:solidFill>
-                  <a:srgbClr val="36211B"/>
-                </a:solidFill>
-                <a:latin typeface="Canva Sans"/>
-                <a:ea typeface="Canva Sans"/>
-                <a:cs typeface="Canva Sans"/>
-                <a:sym typeface="Canva Sans"/>
-              </a:rPr>
-              <a:t>Люди</a:t>
-            </a:r>
-            <a:r>
-              <a:rPr lang="en-US" sz="2200" spc="-44" dirty="0">
-                <a:solidFill>
-                  <a:srgbClr val="36211B"/>
-                </a:solidFill>
-                <a:latin typeface="Canva Sans"/>
-                <a:ea typeface="Canva Sans"/>
-                <a:cs typeface="Canva Sans"/>
-                <a:sym typeface="Canva Sans"/>
-              </a:rPr>
-              <a:t> </a:t>
-            </a:r>
-            <a:r>
-              <a:rPr lang="en-US" sz="2200" spc="-44" dirty="0" err="1">
-                <a:solidFill>
-                  <a:srgbClr val="36211B"/>
-                </a:solidFill>
-                <a:latin typeface="Canva Sans"/>
-                <a:ea typeface="Canva Sans"/>
-                <a:cs typeface="Canva Sans"/>
-                <a:sym typeface="Canva Sans"/>
-              </a:rPr>
-              <a:t>часто</a:t>
-            </a:r>
-            <a:r>
-              <a:rPr lang="en-US" sz="2200" spc="-44" dirty="0">
-                <a:solidFill>
-                  <a:srgbClr val="36211B"/>
-                </a:solidFill>
-                <a:latin typeface="Canva Sans"/>
-                <a:ea typeface="Canva Sans"/>
-                <a:cs typeface="Canva Sans"/>
-                <a:sym typeface="Canva Sans"/>
-              </a:rPr>
-              <a:t> </a:t>
-            </a:r>
-            <a:r>
-              <a:rPr lang="en-US" sz="2200" spc="-44" dirty="0" err="1">
-                <a:solidFill>
-                  <a:srgbClr val="36211B"/>
-                </a:solidFill>
-                <a:latin typeface="Canva Sans"/>
-                <a:ea typeface="Canva Sans"/>
-                <a:cs typeface="Canva Sans"/>
-                <a:sym typeface="Canva Sans"/>
-              </a:rPr>
-              <a:t>витрачають</a:t>
-            </a:r>
-            <a:r>
-              <a:rPr lang="en-US" sz="2200" spc="-44" dirty="0">
-                <a:solidFill>
-                  <a:srgbClr val="36211B"/>
-                </a:solidFill>
-                <a:latin typeface="Canva Sans"/>
-                <a:ea typeface="Canva Sans"/>
-                <a:cs typeface="Canva Sans"/>
-                <a:sym typeface="Canva Sans"/>
-              </a:rPr>
-              <a:t> </a:t>
-            </a:r>
-            <a:r>
-              <a:rPr lang="en-US" sz="2200" spc="-44" dirty="0" err="1">
-                <a:solidFill>
-                  <a:srgbClr val="36211B"/>
-                </a:solidFill>
-                <a:latin typeface="Canva Sans"/>
-                <a:ea typeface="Canva Sans"/>
-                <a:cs typeface="Canva Sans"/>
-                <a:sym typeface="Canva Sans"/>
-              </a:rPr>
-              <a:t>багато</a:t>
-            </a:r>
-            <a:r>
-              <a:rPr lang="en-US" sz="2200" spc="-44" dirty="0">
-                <a:solidFill>
-                  <a:srgbClr val="36211B"/>
-                </a:solidFill>
-                <a:latin typeface="Canva Sans"/>
-                <a:ea typeface="Canva Sans"/>
-                <a:cs typeface="Canva Sans"/>
-                <a:sym typeface="Canva Sans"/>
-              </a:rPr>
-              <a:t> </a:t>
-            </a:r>
-            <a:r>
-              <a:rPr lang="en-US" sz="2200" spc="-44" dirty="0" err="1">
-                <a:solidFill>
-                  <a:srgbClr val="36211B"/>
-                </a:solidFill>
-                <a:latin typeface="Canva Sans"/>
-                <a:ea typeface="Canva Sans"/>
-                <a:cs typeface="Canva Sans"/>
-                <a:sym typeface="Canva Sans"/>
-              </a:rPr>
-              <a:t>часу</a:t>
-            </a:r>
-            <a:r>
-              <a:rPr lang="en-US" sz="2200" spc="-44" dirty="0">
-                <a:solidFill>
-                  <a:srgbClr val="36211B"/>
-                </a:solidFill>
-                <a:latin typeface="Canva Sans"/>
-                <a:ea typeface="Canva Sans"/>
-                <a:cs typeface="Canva Sans"/>
-                <a:sym typeface="Canva Sans"/>
-              </a:rPr>
-              <a:t> </a:t>
-            </a:r>
-            <a:r>
-              <a:rPr lang="en-US" sz="2200" spc="-44" dirty="0" err="1">
-                <a:solidFill>
-                  <a:srgbClr val="36211B"/>
-                </a:solidFill>
-                <a:latin typeface="Canva Sans"/>
-                <a:ea typeface="Canva Sans"/>
-                <a:cs typeface="Canva Sans"/>
-                <a:sym typeface="Canva Sans"/>
-              </a:rPr>
-              <a:t>на</a:t>
-            </a:r>
-            <a:r>
-              <a:rPr lang="en-US" sz="2200" spc="-44" dirty="0">
-                <a:solidFill>
-                  <a:srgbClr val="36211B"/>
-                </a:solidFill>
-                <a:latin typeface="Canva Sans"/>
-                <a:ea typeface="Canva Sans"/>
-                <a:cs typeface="Canva Sans"/>
-                <a:sym typeface="Canva Sans"/>
-              </a:rPr>
-              <a:t> </a:t>
-            </a:r>
-            <a:r>
-              <a:rPr lang="en-US" sz="2200" spc="-44" dirty="0" err="1">
-                <a:solidFill>
-                  <a:srgbClr val="36211B"/>
-                </a:solidFill>
-                <a:latin typeface="Canva Sans"/>
-                <a:ea typeface="Canva Sans"/>
-                <a:cs typeface="Canva Sans"/>
-                <a:sym typeface="Canva Sans"/>
-              </a:rPr>
-              <a:t>планування</a:t>
-            </a:r>
-            <a:r>
-              <a:rPr lang="en-US" sz="2200" spc="-44" dirty="0">
-                <a:solidFill>
-                  <a:srgbClr val="36211B"/>
-                </a:solidFill>
-                <a:latin typeface="Canva Sans"/>
-                <a:ea typeface="Canva Sans"/>
-                <a:cs typeface="Canva Sans"/>
-                <a:sym typeface="Canva Sans"/>
-              </a:rPr>
-              <a:t> </a:t>
-            </a:r>
-            <a:r>
-              <a:rPr lang="en-US" sz="2200" spc="-44" dirty="0" err="1">
-                <a:solidFill>
-                  <a:srgbClr val="36211B"/>
-                </a:solidFill>
-                <a:latin typeface="Canva Sans"/>
-                <a:ea typeface="Canva Sans"/>
-                <a:cs typeface="Canva Sans"/>
-                <a:sym typeface="Canva Sans"/>
-              </a:rPr>
-              <a:t>своїх</a:t>
-            </a:r>
-            <a:r>
-              <a:rPr lang="en-US" sz="2200" spc="-44" dirty="0">
-                <a:solidFill>
-                  <a:srgbClr val="36211B"/>
-                </a:solidFill>
-                <a:latin typeface="Canva Sans"/>
-                <a:ea typeface="Canva Sans"/>
-                <a:cs typeface="Canva Sans"/>
-                <a:sym typeface="Canva Sans"/>
-              </a:rPr>
-              <a:t> </a:t>
-            </a:r>
-            <a:r>
-              <a:rPr lang="en-US" sz="2200" spc="-44" dirty="0" err="1">
-                <a:solidFill>
-                  <a:srgbClr val="36211B"/>
-                </a:solidFill>
-                <a:latin typeface="Canva Sans"/>
-                <a:ea typeface="Canva Sans"/>
-                <a:cs typeface="Canva Sans"/>
-                <a:sym typeface="Canva Sans"/>
-              </a:rPr>
-              <a:t>страв</a:t>
-            </a:r>
-            <a:r>
-              <a:rPr lang="en-US" sz="2200" spc="-44" dirty="0">
-                <a:solidFill>
-                  <a:srgbClr val="36211B"/>
-                </a:solidFill>
-                <a:latin typeface="Canva Sans"/>
-                <a:ea typeface="Canva Sans"/>
-                <a:cs typeface="Canva Sans"/>
-                <a:sym typeface="Canva Sans"/>
-              </a:rPr>
-              <a:t> </a:t>
-            </a:r>
-            <a:r>
-              <a:rPr lang="en-US" sz="2200" spc="-44" dirty="0" err="1">
-                <a:solidFill>
-                  <a:srgbClr val="36211B"/>
+              <a:rPr lang="en-US" sz="2900" b="1" spc="-116" dirty="0" err="1">
+                <a:solidFill>
+                  <a:srgbClr val="000000"/>
+                </a:solidFill>
+                <a:latin typeface="Canva Sans Bold"/>
+                <a:ea typeface="Canva Sans Bold"/>
+                <a:cs typeface="Canva Sans Bold"/>
+                <a:sym typeface="Canva Sans Bold"/>
+              </a:rPr>
+              <a:t>Партнерські</a:t>
+            </a:r>
+            <a:r>
+              <a:rPr lang="en-US" sz="2900" b="1" spc="-116" dirty="0">
+                <a:solidFill>
+                  <a:srgbClr val="000000"/>
+                </a:solidFill>
+                <a:latin typeface="Canva Sans Bold"/>
+                <a:ea typeface="Canva Sans Bold"/>
+                <a:cs typeface="Canva Sans Bold"/>
+                <a:sym typeface="Canva Sans Bold"/>
+              </a:rPr>
+              <a:t> </a:t>
+            </a:r>
+            <a:r>
+              <a:rPr lang="en-US" sz="2900" b="1" spc="-116" dirty="0" err="1">
+                <a:solidFill>
+                  <a:srgbClr val="000000"/>
+                </a:solidFill>
+                <a:latin typeface="Canva Sans Bold"/>
+                <a:ea typeface="Canva Sans Bold"/>
+                <a:cs typeface="Canva Sans Bold"/>
+                <a:sym typeface="Canva Sans Bold"/>
+              </a:rPr>
+              <a:t>інтеграції</a:t>
+            </a:r>
+            <a:r>
+              <a:rPr lang="en-US" sz="2900" b="1" spc="-116" dirty="0">
+                <a:solidFill>
+                  <a:srgbClr val="000000"/>
+                </a:solidFill>
+                <a:latin typeface="Canva Sans Bold"/>
+                <a:ea typeface="Canva Sans Bold"/>
+                <a:cs typeface="Canva Sans Bold"/>
+                <a:sym typeface="Canva Sans Bold"/>
+              </a:rPr>
+              <a:t>:</a:t>
+            </a:r>
+            <a:r>
+              <a:rPr lang="en-US" sz="2900" spc="-116" dirty="0">
+                <a:solidFill>
+                  <a:srgbClr val="000000"/>
+                </a:solidFill>
+                <a:latin typeface="Canva Sans"/>
+                <a:ea typeface="Canva Sans"/>
+                <a:cs typeface="Canva Sans"/>
+                <a:sym typeface="Canva Sans"/>
+              </a:rPr>
+              <a:t> </a:t>
+            </a:r>
+            <a:r>
+              <a:rPr lang="en-US" sz="2900" spc="-116" dirty="0" err="1">
+                <a:solidFill>
+                  <a:srgbClr val="000000"/>
+                </a:solidFill>
+                <a:latin typeface="Canva Sans"/>
+                <a:ea typeface="Canva Sans"/>
+                <a:cs typeface="Canva Sans"/>
+                <a:sym typeface="Canva Sans"/>
+              </a:rPr>
+              <a:t>Співпраця</a:t>
+            </a:r>
+            <a:r>
+              <a:rPr lang="en-US" sz="2900" spc="-116" dirty="0">
+                <a:solidFill>
+                  <a:srgbClr val="000000"/>
+                </a:solidFill>
+                <a:latin typeface="Canva Sans"/>
+                <a:ea typeface="Canva Sans"/>
+                <a:cs typeface="Canva Sans"/>
+                <a:sym typeface="Canva Sans"/>
+              </a:rPr>
+              <a:t> з </a:t>
+            </a:r>
+            <a:r>
+              <a:rPr lang="en-US" sz="2900" spc="-116" dirty="0" err="1">
+                <a:solidFill>
+                  <a:srgbClr val="000000"/>
+                </a:solidFill>
+                <a:latin typeface="Canva Sans"/>
+                <a:ea typeface="Canva Sans"/>
+                <a:cs typeface="Canva Sans"/>
+                <a:sym typeface="Canva Sans"/>
+              </a:rPr>
+              <a:t>платформами</a:t>
+            </a:r>
+            <a:r>
+              <a:rPr lang="en-US" sz="2900" spc="-116" dirty="0">
+                <a:solidFill>
+                  <a:srgbClr val="000000"/>
+                </a:solidFill>
+                <a:latin typeface="Canva Sans"/>
+                <a:ea typeface="Canva Sans"/>
+                <a:cs typeface="Canva Sans"/>
+                <a:sym typeface="Canva Sans"/>
+              </a:rPr>
+              <a:t> </a:t>
+            </a:r>
+            <a:r>
+              <a:rPr lang="en-US" sz="2900" spc="-116" dirty="0" err="1">
+                <a:solidFill>
+                  <a:srgbClr val="000000"/>
+                </a:solidFill>
+                <a:latin typeface="Canva Sans"/>
+                <a:ea typeface="Canva Sans"/>
+                <a:cs typeface="Canva Sans"/>
+                <a:sym typeface="Canva Sans"/>
+              </a:rPr>
+              <a:t>доставки</a:t>
+            </a:r>
+            <a:r>
+              <a:rPr lang="en-US" sz="2900" spc="-116" dirty="0">
+                <a:solidFill>
+                  <a:srgbClr val="000000"/>
+                </a:solidFill>
+                <a:latin typeface="Canva Sans"/>
+                <a:ea typeface="Canva Sans"/>
+                <a:cs typeface="Canva Sans"/>
+                <a:sym typeface="Canva Sans"/>
+              </a:rPr>
+              <a:t> </a:t>
+            </a:r>
+            <a:r>
+              <a:rPr lang="en-US" sz="2900" spc="-116" dirty="0" err="1">
+                <a:solidFill>
+                  <a:srgbClr val="000000"/>
+                </a:solidFill>
+                <a:latin typeface="Canva Sans"/>
+                <a:ea typeface="Canva Sans"/>
+                <a:cs typeface="Canva Sans"/>
+                <a:sym typeface="Canva Sans"/>
+              </a:rPr>
+              <a:t>їжі</a:t>
+            </a:r>
+            <a:r>
+              <a:rPr lang="en-US" sz="2900" spc="-116" dirty="0">
+                <a:solidFill>
+                  <a:srgbClr val="000000"/>
+                </a:solidFill>
+                <a:latin typeface="Canva Sans"/>
+                <a:ea typeface="Canva Sans"/>
+                <a:cs typeface="Canva Sans"/>
+                <a:sym typeface="Canva Sans"/>
+              </a:rPr>
+              <a:t> </a:t>
+            </a:r>
+            <a:r>
+              <a:rPr lang="en-US" sz="2900" spc="-116" dirty="0" err="1">
+                <a:solidFill>
+                  <a:srgbClr val="000000"/>
+                </a:solidFill>
+                <a:latin typeface="Canva Sans"/>
+                <a:ea typeface="Canva Sans"/>
+                <a:cs typeface="Canva Sans"/>
+                <a:sym typeface="Canva Sans"/>
+              </a:rPr>
+              <a:t>або</a:t>
+            </a:r>
+            <a:r>
+              <a:rPr lang="en-US" sz="2900" spc="-116" dirty="0">
+                <a:solidFill>
+                  <a:srgbClr val="000000"/>
+                </a:solidFill>
+                <a:latin typeface="Canva Sans"/>
+                <a:ea typeface="Canva Sans"/>
+                <a:cs typeface="Canva Sans"/>
+                <a:sym typeface="Canva Sans"/>
+              </a:rPr>
+              <a:t> </a:t>
+            </a:r>
+            <a:r>
+              <a:rPr lang="en-US" sz="2900" spc="-116" dirty="0" err="1">
+                <a:solidFill>
+                  <a:srgbClr val="000000"/>
+                </a:solidFill>
+                <a:latin typeface="Canva Sans"/>
+                <a:ea typeface="Canva Sans"/>
+                <a:cs typeface="Canva Sans"/>
+                <a:sym typeface="Canva Sans"/>
+              </a:rPr>
+              <a:t>продуктів</a:t>
+            </a:r>
+            <a:r>
+              <a:rPr lang="en-US" sz="2900" spc="-116" dirty="0">
+                <a:solidFill>
+                  <a:srgbClr val="000000"/>
+                </a:solidFill>
+                <a:latin typeface="Canva Sans"/>
+                <a:ea typeface="Canva Sans"/>
+                <a:cs typeface="Canva Sans"/>
+                <a:sym typeface="Canva Sans"/>
+              </a:rPr>
+              <a:t> </a:t>
+            </a:r>
+            <a:r>
+              <a:rPr lang="en-US" sz="2900" spc="-116" dirty="0" err="1">
+                <a:solidFill>
+                  <a:srgbClr val="000000"/>
+                </a:solidFill>
+                <a:latin typeface="Canva Sans"/>
+                <a:ea typeface="Canva Sans"/>
+                <a:cs typeface="Canva Sans"/>
+                <a:sym typeface="Canva Sans"/>
+              </a:rPr>
+              <a:t>може</a:t>
+            </a:r>
+            <a:r>
+              <a:rPr lang="en-US" sz="2900" spc="-116" dirty="0">
+                <a:solidFill>
+                  <a:srgbClr val="000000"/>
+                </a:solidFill>
+                <a:latin typeface="Canva Sans"/>
+                <a:ea typeface="Canva Sans"/>
+                <a:cs typeface="Canva Sans"/>
+                <a:sym typeface="Canva Sans"/>
+              </a:rPr>
+              <a:t> </a:t>
+            </a:r>
+            <a:r>
+              <a:rPr lang="en-US" sz="2900" spc="-116" dirty="0" err="1">
+                <a:solidFill>
+                  <a:srgbClr val="000000"/>
+                </a:solidFill>
+                <a:latin typeface="Canva Sans"/>
+                <a:ea typeface="Canva Sans"/>
+                <a:cs typeface="Canva Sans"/>
+                <a:sym typeface="Canva Sans"/>
+              </a:rPr>
+              <a:t>розширити</a:t>
+            </a:r>
+            <a:r>
+              <a:rPr lang="en-US" sz="2900" spc="-116" dirty="0">
+                <a:solidFill>
+                  <a:srgbClr val="000000"/>
+                </a:solidFill>
+                <a:latin typeface="Canva Sans"/>
+                <a:ea typeface="Canva Sans"/>
+                <a:cs typeface="Canva Sans"/>
+                <a:sym typeface="Canva Sans"/>
+              </a:rPr>
+              <a:t> </a:t>
+            </a:r>
+            <a:r>
+              <a:rPr lang="en-US" sz="2900" spc="-116" dirty="0" err="1">
+                <a:solidFill>
+                  <a:srgbClr val="000000"/>
+                </a:solidFill>
+                <a:latin typeface="Canva Sans"/>
+                <a:ea typeface="Canva Sans"/>
+                <a:cs typeface="Canva Sans"/>
+                <a:sym typeface="Canva Sans"/>
+              </a:rPr>
+              <a:t>функціональність</a:t>
+            </a:r>
+            <a:r>
+              <a:rPr lang="en-US" sz="2900" spc="-116" dirty="0">
+                <a:solidFill>
+                  <a:srgbClr val="000000"/>
+                </a:solidFill>
+                <a:latin typeface="Canva Sans"/>
+                <a:ea typeface="Canva Sans"/>
+                <a:cs typeface="Canva Sans"/>
+                <a:sym typeface="Canva Sans"/>
+              </a:rPr>
+              <a:t> </a:t>
+            </a:r>
+            <a:r>
+              <a:rPr lang="en-US" sz="2900" spc="-116" dirty="0" err="1">
+                <a:solidFill>
+                  <a:srgbClr val="000000"/>
                 </a:solidFill>
                 <a:latin typeface="Canva Sans"/>
                 <a:ea typeface="Canva Sans"/>
@@ -5586,393 +6628,57 @@
               <a:t>та</a:t>
             </a:r>
             <a:r>
-              <a:rPr lang="en-US" sz="2200" spc="-44" dirty="0">
-                <a:solidFill>
-                  <a:srgbClr val="36211B"/>
-                </a:solidFill>
-                <a:latin typeface="Canva Sans"/>
-                <a:ea typeface="Canva Sans"/>
-                <a:cs typeface="Canva Sans"/>
-                <a:sym typeface="Canva Sans"/>
-              </a:rPr>
-              <a:t> </a:t>
-            </a:r>
-            <a:r>
-              <a:rPr lang="en-US" sz="2200" spc="-44" dirty="0" err="1">
-                <a:solidFill>
-                  <a:srgbClr val="36211B"/>
-                </a:solidFill>
-                <a:latin typeface="Canva Sans"/>
-                <a:ea typeface="Canva Sans"/>
-                <a:cs typeface="Canva Sans"/>
-                <a:sym typeface="Canva Sans"/>
-              </a:rPr>
-              <a:t>пошук</a:t>
-            </a:r>
-            <a:r>
-              <a:rPr lang="en-US" sz="2200" spc="-44" dirty="0">
-                <a:solidFill>
-                  <a:srgbClr val="36211B"/>
-                </a:solidFill>
-                <a:latin typeface="Canva Sans"/>
-                <a:ea typeface="Canva Sans"/>
-                <a:cs typeface="Canva Sans"/>
-                <a:sym typeface="Canva Sans"/>
-              </a:rPr>
-              <a:t> </a:t>
-            </a:r>
-            <a:r>
-              <a:rPr lang="en-US" sz="2200" spc="-44" dirty="0" err="1">
-                <a:solidFill>
-                  <a:srgbClr val="36211B"/>
-                </a:solidFill>
-                <a:latin typeface="Canva Sans"/>
-                <a:ea typeface="Canva Sans"/>
-                <a:cs typeface="Canva Sans"/>
-                <a:sym typeface="Canva Sans"/>
-              </a:rPr>
-              <a:t>рецептів</a:t>
-            </a:r>
-            <a:r>
-              <a:rPr lang="en-US" sz="2200" spc="-44" dirty="0">
-                <a:solidFill>
-                  <a:srgbClr val="36211B"/>
-                </a:solidFill>
-                <a:latin typeface="Canva Sans"/>
-                <a:ea typeface="Canva Sans"/>
-                <a:cs typeface="Canva Sans"/>
-                <a:sym typeface="Canva Sans"/>
-              </a:rPr>
-              <a:t>. </a:t>
-            </a:r>
-            <a:r>
-              <a:rPr lang="en-US" sz="2200" spc="-44" dirty="0" err="1">
-                <a:solidFill>
-                  <a:srgbClr val="36211B"/>
-                </a:solidFill>
-                <a:latin typeface="Canva Sans"/>
-                <a:ea typeface="Canva Sans"/>
-                <a:cs typeface="Canva Sans"/>
-                <a:sym typeface="Canva Sans"/>
-              </a:rPr>
-              <a:t>Наш</a:t>
-            </a:r>
-            <a:r>
-              <a:rPr lang="en-US" sz="2200" spc="-44" dirty="0">
-                <a:solidFill>
-                  <a:srgbClr val="36211B"/>
-                </a:solidFill>
-                <a:latin typeface="Canva Sans"/>
-                <a:ea typeface="Canva Sans"/>
-                <a:cs typeface="Canva Sans"/>
-                <a:sym typeface="Canva Sans"/>
-              </a:rPr>
-              <a:t> </a:t>
-            </a:r>
-            <a:r>
-              <a:rPr lang="en-US" sz="2200" spc="-44" dirty="0" err="1">
-                <a:solidFill>
-                  <a:srgbClr val="36211B"/>
-                </a:solidFill>
-                <a:latin typeface="Canva Sans"/>
-                <a:ea typeface="Canva Sans"/>
-                <a:cs typeface="Canva Sans"/>
-                <a:sym typeface="Canva Sans"/>
-              </a:rPr>
-              <a:t>додаток</a:t>
-            </a:r>
-            <a:r>
-              <a:rPr lang="en-US" sz="2200" spc="-44" dirty="0">
-                <a:solidFill>
-                  <a:srgbClr val="36211B"/>
-                </a:solidFill>
-                <a:latin typeface="Canva Sans"/>
-                <a:ea typeface="Canva Sans"/>
-                <a:cs typeface="Canva Sans"/>
-                <a:sym typeface="Canva Sans"/>
-              </a:rPr>
-              <a:t> </a:t>
-            </a:r>
-            <a:r>
-              <a:rPr lang="en-US" sz="2200" spc="-44" dirty="0" err="1">
-                <a:solidFill>
-                  <a:srgbClr val="36211B"/>
-                </a:solidFill>
-                <a:latin typeface="Canva Sans"/>
-                <a:ea typeface="Canva Sans"/>
-                <a:cs typeface="Canva Sans"/>
-                <a:sym typeface="Canva Sans"/>
-              </a:rPr>
-              <a:t>автоматизує</a:t>
-            </a:r>
-            <a:r>
-              <a:rPr lang="en-US" sz="2200" spc="-44" dirty="0">
-                <a:solidFill>
-                  <a:srgbClr val="36211B"/>
-                </a:solidFill>
-                <a:latin typeface="Canva Sans"/>
-                <a:ea typeface="Canva Sans"/>
-                <a:cs typeface="Canva Sans"/>
-                <a:sym typeface="Canva Sans"/>
-              </a:rPr>
-              <a:t> </a:t>
-            </a:r>
-            <a:r>
-              <a:rPr lang="en-US" sz="2200" spc="-44" dirty="0" err="1">
-                <a:solidFill>
-                  <a:srgbClr val="36211B"/>
-                </a:solidFill>
-                <a:latin typeface="Canva Sans"/>
-                <a:ea typeface="Canva Sans"/>
-                <a:cs typeface="Canva Sans"/>
-                <a:sym typeface="Canva Sans"/>
-              </a:rPr>
-              <a:t>цей</a:t>
-            </a:r>
-            <a:r>
-              <a:rPr lang="en-US" sz="2200" spc="-44" dirty="0">
-                <a:solidFill>
-                  <a:srgbClr val="36211B"/>
-                </a:solidFill>
-                <a:latin typeface="Canva Sans"/>
-                <a:ea typeface="Canva Sans"/>
-                <a:cs typeface="Canva Sans"/>
-                <a:sym typeface="Canva Sans"/>
-              </a:rPr>
-              <a:t> </a:t>
-            </a:r>
-            <a:r>
-              <a:rPr lang="en-US" sz="2200" spc="-44" dirty="0" err="1">
-                <a:solidFill>
-                  <a:srgbClr val="36211B"/>
-                </a:solidFill>
-                <a:latin typeface="Canva Sans"/>
-                <a:ea typeface="Canva Sans"/>
-                <a:cs typeface="Canva Sans"/>
-                <a:sym typeface="Canva Sans"/>
-              </a:rPr>
-              <a:t>процес</a:t>
-            </a:r>
-            <a:r>
-              <a:rPr lang="en-US" sz="2200" spc="-44" dirty="0">
-                <a:solidFill>
-                  <a:srgbClr val="36211B"/>
-                </a:solidFill>
-                <a:latin typeface="Canva Sans"/>
-                <a:ea typeface="Canva Sans"/>
-                <a:cs typeface="Canva Sans"/>
-                <a:sym typeface="Canva Sans"/>
-              </a:rPr>
-              <a:t>, </a:t>
-            </a:r>
-            <a:r>
-              <a:rPr lang="en-US" sz="2200" spc="-44" dirty="0" err="1">
-                <a:solidFill>
-                  <a:srgbClr val="36211B"/>
-                </a:solidFill>
-                <a:latin typeface="Canva Sans"/>
-                <a:ea typeface="Canva Sans"/>
-                <a:cs typeface="Canva Sans"/>
-                <a:sym typeface="Canva Sans"/>
-              </a:rPr>
-              <a:t>пропонуючи</a:t>
-            </a:r>
-            <a:r>
-              <a:rPr lang="en-US" sz="2200" spc="-44" dirty="0">
-                <a:solidFill>
-                  <a:srgbClr val="36211B"/>
-                </a:solidFill>
-                <a:latin typeface="Canva Sans"/>
-                <a:ea typeface="Canva Sans"/>
-                <a:cs typeface="Canva Sans"/>
-                <a:sym typeface="Canva Sans"/>
-              </a:rPr>
-              <a:t> </a:t>
-            </a:r>
-            <a:r>
-              <a:rPr lang="en-US" sz="2200" spc="-44" dirty="0" err="1">
-                <a:solidFill>
-                  <a:srgbClr val="36211B"/>
-                </a:solidFill>
-                <a:latin typeface="Canva Sans"/>
-                <a:ea typeface="Canva Sans"/>
-                <a:cs typeface="Canva Sans"/>
-                <a:sym typeface="Canva Sans"/>
-              </a:rPr>
-              <a:t>готові</a:t>
-            </a:r>
-            <a:r>
-              <a:rPr lang="en-US" sz="2200" spc="-44" dirty="0">
-                <a:solidFill>
-                  <a:srgbClr val="36211B"/>
-                </a:solidFill>
-                <a:latin typeface="Canva Sans"/>
-                <a:ea typeface="Canva Sans"/>
-                <a:cs typeface="Canva Sans"/>
-                <a:sym typeface="Canva Sans"/>
-              </a:rPr>
-              <a:t> </a:t>
-            </a:r>
-            <a:r>
-              <a:rPr lang="en-US" sz="2200" spc="-44" dirty="0" err="1">
-                <a:solidFill>
-                  <a:srgbClr val="36211B"/>
-                </a:solidFill>
-                <a:latin typeface="Canva Sans"/>
-                <a:ea typeface="Canva Sans"/>
-                <a:cs typeface="Canva Sans"/>
-                <a:sym typeface="Canva Sans"/>
-              </a:rPr>
-              <a:t>варіанти</a:t>
-            </a:r>
-            <a:r>
-              <a:rPr lang="en-US" sz="2200" spc="-44" dirty="0">
-                <a:solidFill>
-                  <a:srgbClr val="36211B"/>
-                </a:solidFill>
-                <a:latin typeface="Canva Sans"/>
-                <a:ea typeface="Canva Sans"/>
-                <a:cs typeface="Canva Sans"/>
-                <a:sym typeface="Canva Sans"/>
-              </a:rPr>
-              <a:t> </a:t>
-            </a:r>
-            <a:r>
-              <a:rPr lang="en-US" sz="2200" spc="-44" dirty="0" err="1">
-                <a:solidFill>
-                  <a:srgbClr val="36211B"/>
-                </a:solidFill>
-                <a:latin typeface="Canva Sans"/>
-                <a:ea typeface="Canva Sans"/>
-                <a:cs typeface="Canva Sans"/>
-                <a:sym typeface="Canva Sans"/>
-              </a:rPr>
-              <a:t>страв</a:t>
-            </a:r>
-            <a:r>
-              <a:rPr lang="en-US" sz="2200" spc="-44" dirty="0">
-                <a:solidFill>
-                  <a:srgbClr val="36211B"/>
-                </a:solidFill>
-                <a:latin typeface="Canva Sans"/>
-                <a:ea typeface="Canva Sans"/>
-                <a:cs typeface="Canva Sans"/>
-                <a:sym typeface="Canva Sans"/>
-              </a:rPr>
-              <a:t> </a:t>
-            </a:r>
-            <a:r>
-              <a:rPr lang="en-US" sz="2200" spc="-44" dirty="0" err="1">
-                <a:solidFill>
-                  <a:srgbClr val="36211B"/>
-                </a:solidFill>
-                <a:latin typeface="Canva Sans"/>
-                <a:ea typeface="Canva Sans"/>
-                <a:cs typeface="Canva Sans"/>
-                <a:sym typeface="Canva Sans"/>
-              </a:rPr>
-              <a:t>без</a:t>
-            </a:r>
-            <a:r>
-              <a:rPr lang="en-US" sz="2200" spc="-44" dirty="0">
-                <a:solidFill>
-                  <a:srgbClr val="36211B"/>
-                </a:solidFill>
-                <a:latin typeface="Canva Sans"/>
-                <a:ea typeface="Canva Sans"/>
-                <a:cs typeface="Canva Sans"/>
-                <a:sym typeface="Canva Sans"/>
-              </a:rPr>
-              <a:t> </a:t>
-            </a:r>
-            <a:r>
-              <a:rPr lang="en-US" sz="2200" spc="-44" dirty="0" err="1">
-                <a:solidFill>
-                  <a:srgbClr val="36211B"/>
-                </a:solidFill>
-                <a:latin typeface="Canva Sans"/>
-                <a:ea typeface="Canva Sans"/>
-                <a:cs typeface="Canva Sans"/>
-                <a:sym typeface="Canva Sans"/>
-              </a:rPr>
-              <a:t>необхідності</a:t>
-            </a:r>
-            <a:r>
-              <a:rPr lang="en-US" sz="2200" spc="-44" dirty="0">
-                <a:solidFill>
-                  <a:srgbClr val="36211B"/>
-                </a:solidFill>
-                <a:latin typeface="Canva Sans"/>
-                <a:ea typeface="Canva Sans"/>
-                <a:cs typeface="Canva Sans"/>
-                <a:sym typeface="Canva Sans"/>
-              </a:rPr>
-              <a:t> </a:t>
-            </a:r>
-            <a:r>
-              <a:rPr lang="en-US" sz="2200" spc="-44" dirty="0" err="1">
-                <a:solidFill>
-                  <a:srgbClr val="36211B"/>
-                </a:solidFill>
-                <a:latin typeface="Canva Sans"/>
-                <a:ea typeface="Canva Sans"/>
-                <a:cs typeface="Canva Sans"/>
-                <a:sym typeface="Canva Sans"/>
-              </a:rPr>
-              <a:t>вибирати</a:t>
-            </a:r>
-            <a:r>
-              <a:rPr lang="en-US" sz="2200" spc="-44" dirty="0">
-                <a:solidFill>
-                  <a:srgbClr val="36211B"/>
-                </a:solidFill>
-                <a:latin typeface="Canva Sans"/>
-                <a:ea typeface="Canva Sans"/>
-                <a:cs typeface="Canva Sans"/>
-                <a:sym typeface="Canva Sans"/>
-              </a:rPr>
-              <a:t> </a:t>
-            </a:r>
-            <a:r>
-              <a:rPr lang="en-US" sz="2200" spc="-44" dirty="0" err="1">
-                <a:solidFill>
-                  <a:srgbClr val="36211B"/>
-                </a:solidFill>
-                <a:latin typeface="Canva Sans"/>
-                <a:ea typeface="Canva Sans"/>
-                <a:cs typeface="Canva Sans"/>
-                <a:sym typeface="Canva Sans"/>
-              </a:rPr>
-              <a:t>страви</a:t>
-            </a:r>
-            <a:r>
-              <a:rPr lang="en-US" sz="2200" spc="-44" dirty="0">
-                <a:solidFill>
-                  <a:srgbClr val="36211B"/>
-                </a:solidFill>
-                <a:latin typeface="Canva Sans"/>
-                <a:ea typeface="Canva Sans"/>
-                <a:cs typeface="Canva Sans"/>
-                <a:sym typeface="Canva Sans"/>
-              </a:rPr>
-              <a:t> </a:t>
-            </a:r>
-            <a:r>
-              <a:rPr lang="en-US" sz="2200" spc="-44" dirty="0" err="1">
-                <a:solidFill>
-                  <a:srgbClr val="36211B"/>
-                </a:solidFill>
-                <a:latin typeface="Canva Sans"/>
-                <a:ea typeface="Canva Sans"/>
-                <a:cs typeface="Canva Sans"/>
-                <a:sym typeface="Canva Sans"/>
-              </a:rPr>
-              <a:t>вручну</a:t>
-            </a:r>
-            <a:r>
-              <a:rPr lang="en-US" sz="2200" spc="-44" dirty="0">
-                <a:solidFill>
-                  <a:srgbClr val="36211B"/>
+              <a:rPr lang="en-US" sz="2900" spc="-116" dirty="0">
+                <a:solidFill>
+                  <a:srgbClr val="000000"/>
+                </a:solidFill>
+                <a:latin typeface="Canva Sans"/>
+                <a:ea typeface="Canva Sans"/>
+                <a:cs typeface="Canva Sans"/>
+                <a:sym typeface="Canva Sans"/>
+              </a:rPr>
+              <a:t> </a:t>
+            </a:r>
+            <a:r>
+              <a:rPr lang="en-US" sz="2900" spc="-116" dirty="0" err="1">
+                <a:solidFill>
+                  <a:srgbClr val="000000"/>
+                </a:solidFill>
+                <a:latin typeface="Canva Sans"/>
+                <a:ea typeface="Canva Sans"/>
+                <a:cs typeface="Canva Sans"/>
+                <a:sym typeface="Canva Sans"/>
+              </a:rPr>
+              <a:t>збільшити</a:t>
+            </a:r>
+            <a:r>
+              <a:rPr lang="en-US" sz="2900" spc="-116" dirty="0">
+                <a:solidFill>
+                  <a:srgbClr val="000000"/>
+                </a:solidFill>
+                <a:latin typeface="Canva Sans"/>
+                <a:ea typeface="Canva Sans"/>
+                <a:cs typeface="Canva Sans"/>
+                <a:sym typeface="Canva Sans"/>
+              </a:rPr>
+              <a:t> </a:t>
+            </a:r>
+            <a:r>
+              <a:rPr lang="en-US" sz="2900" spc="-116" dirty="0" err="1">
+                <a:solidFill>
+                  <a:srgbClr val="000000"/>
+                </a:solidFill>
+                <a:latin typeface="Canva Sans"/>
+                <a:ea typeface="Canva Sans"/>
+                <a:cs typeface="Canva Sans"/>
+                <a:sym typeface="Canva Sans"/>
+              </a:rPr>
+              <a:t>дохід</a:t>
+            </a:r>
+            <a:r>
+              <a:rPr lang="en-US" sz="2900" spc="-116" dirty="0">
+                <a:solidFill>
+                  <a:srgbClr val="000000"/>
                 </a:solidFill>
                 <a:latin typeface="Canva Sans"/>
                 <a:ea typeface="Canva Sans"/>
@@ -5983,14 +6689,17 @@
             </a:r>
           </a:p>
           <a:p>
-            <a:pPr algn="l">
+            <a:pPr algn="ctr">
               <a:lnSpc>
-                <a:spcPts val="3080"/>
+                <a:spcPts val="4060"/>
               </a:lnSpc>
+              <a:spcBef>
+                <a:spcPct val="0"/>
+              </a:spcBef>
             </a:pPr>
-            <a:endParaRPr lang="en-US" sz="2200" spc="-44" dirty="0">
+            <a:endParaRPr lang="en-US" sz="2900" spc="-116" dirty="0">
               <a:solidFill>
-                <a:srgbClr val="36211B"/>
+                <a:srgbClr val="000000"/>
               </a:solidFill>
               <a:latin typeface="Canva Sans"/>
               <a:ea typeface="Canva Sans"/>
@@ -6002,14 +6711,38 @@
       </p:sp>
       <p:sp>
         <p:nvSpPr>
-          <p:cNvPr id="7" name="TextBox 7"/>
+          <p:cNvPr id="10" name="AutoShape 10"/>
+          <p:cNvSpPr/>
+          <p:nvPr/>
+        </p:nvSpPr>
+        <p:spPr>
+          <a:xfrm>
+            <a:off x="1028700" y="7318698"/>
+            <a:ext cx="1391580" cy="0"/>
+          </a:xfrm>
+          <a:prstGeom prst="line">
+            <a:avLst/>
+          </a:prstGeom>
+          <a:ln w="38100" cap="flat">
+            <a:solidFill>
+              <a:srgbClr val="000000"/>
+            </a:solidFill>
+            <a:prstDash val="solid"/>
+            <a:headEnd type="none" w="sm" len="sm"/>
+            <a:tailEnd type="triangle" w="lg" len="med"/>
+          </a:ln>
+        </p:spPr>
+      </p:sp>
+      <p:sp>
+        <p:nvSpPr>
+          <p:cNvPr id="11" name="TextBox 11"/>
           <p:cNvSpPr txBox="1"/>
           <p:nvPr/>
         </p:nvSpPr>
         <p:spPr>
           <a:xfrm>
-            <a:off x="12582843" y="1584078"/>
-            <a:ext cx="4477275" cy="622935"/>
+            <a:off x="2719073" y="7047991"/>
+            <a:ext cx="14540227" cy="1577355"/>
           </a:xfrm>
           <a:prstGeom prst="rect">
             <a:avLst/>
@@ -6021,74 +6754,375 @@
           </a:bodyPr>
           <a:lstStyle/>
           <a:p>
-            <a:pPr algn="l">
+            <a:pPr algn="ctr">
               <a:lnSpc>
-                <a:spcPts val="5040"/>
+                <a:spcPts val="4060"/>
               </a:lnSpc>
+              <a:spcBef>
+                <a:spcPct val="0"/>
+              </a:spcBef>
             </a:pPr>
             <a:r>
-              <a:rPr lang="en-US" sz="3600" i="1" spc="-144">
-                <a:solidFill>
-                  <a:srgbClr val="36211B"/>
-                </a:solidFill>
-                <a:latin typeface="IBM Plex Serif Italics"/>
-                <a:ea typeface="IBM Plex Serif Italics"/>
-                <a:cs typeface="IBM Plex Serif Italics"/>
-                <a:sym typeface="IBM Plex Serif Italics"/>
-              </a:rPr>
-              <a:t>Унікальність</a:t>
-            </a:r>
-          </a:p>
-        </p:txBody>
-      </p:sp>
-      <p:sp>
-        <p:nvSpPr>
-          <p:cNvPr id="8" name="TextBox 8"/>
-          <p:cNvSpPr txBox="1"/>
-          <p:nvPr/>
-        </p:nvSpPr>
-        <p:spPr>
-          <a:xfrm>
-            <a:off x="12582843" y="2445138"/>
-            <a:ext cx="4477275" cy="7792720"/>
-          </a:xfrm>
-          <a:prstGeom prst="rect">
-            <a:avLst/>
-          </a:prstGeom>
-        </p:spPr>
-        <p:txBody>
-          <a:bodyPr lIns="0" tIns="0" rIns="0" bIns="0" rtlCol="0" anchor="t">
-            <a:spAutoFit/>
-          </a:bodyPr>
-          <a:lstStyle/>
-          <a:p>
-            <a:pPr algn="l">
+              <a:rPr lang="uk-UA" sz="2900" b="1" spc="-116" dirty="0" smtClean="0">
+                <a:solidFill>
+                  <a:srgbClr val="000000"/>
+                </a:solidFill>
+                <a:latin typeface="Canva Sans Bold"/>
+                <a:ea typeface="Canva Sans Bold"/>
+                <a:cs typeface="Canva Sans Bold"/>
+                <a:sym typeface="Canva Sans Bold"/>
+              </a:rPr>
+              <a:t>       </a:t>
+            </a:r>
+            <a:r>
+              <a:rPr lang="en-US" sz="2900" b="1" spc="-116" dirty="0" err="1" smtClean="0">
+                <a:solidFill>
+                  <a:srgbClr val="000000"/>
+                </a:solidFill>
+                <a:latin typeface="Canva Sans Bold"/>
+                <a:ea typeface="Canva Sans Bold"/>
+                <a:cs typeface="Canva Sans Bold"/>
+                <a:sym typeface="Canva Sans Bold"/>
+              </a:rPr>
+              <a:t>Масштабованість</a:t>
+            </a:r>
+            <a:r>
+              <a:rPr lang="en-US" sz="2900" b="1" spc="-116" dirty="0">
+                <a:solidFill>
+                  <a:srgbClr val="000000"/>
+                </a:solidFill>
+                <a:latin typeface="Canva Sans Bold"/>
+                <a:ea typeface="Canva Sans Bold"/>
+                <a:cs typeface="Canva Sans Bold"/>
+                <a:sym typeface="Canva Sans Bold"/>
+              </a:rPr>
+              <a:t>: </a:t>
+            </a:r>
+            <a:r>
+              <a:rPr lang="en-US" sz="2900" spc="-116" dirty="0" err="1">
+                <a:solidFill>
+                  <a:srgbClr val="000000"/>
+                </a:solidFill>
+                <a:latin typeface="Canva Sans"/>
+                <a:ea typeface="Canva Sans"/>
+                <a:cs typeface="Canva Sans"/>
+                <a:sym typeface="Canva Sans"/>
+              </a:rPr>
+              <a:t>Проєкт</a:t>
+            </a:r>
+            <a:r>
+              <a:rPr lang="en-US" sz="2900" spc="-116" dirty="0">
+                <a:solidFill>
+                  <a:srgbClr val="000000"/>
+                </a:solidFill>
+                <a:latin typeface="Canva Sans"/>
+                <a:ea typeface="Canva Sans"/>
+                <a:cs typeface="Canva Sans"/>
+                <a:sym typeface="Canva Sans"/>
+              </a:rPr>
+              <a:t> </a:t>
+            </a:r>
+            <a:r>
+              <a:rPr lang="en-US" sz="2900" spc="-116" dirty="0" err="1">
+                <a:solidFill>
+                  <a:srgbClr val="000000"/>
+                </a:solidFill>
+                <a:latin typeface="Canva Sans"/>
+                <a:ea typeface="Canva Sans"/>
+                <a:cs typeface="Canva Sans"/>
+                <a:sym typeface="Canva Sans"/>
+              </a:rPr>
+              <a:t>можна</a:t>
+            </a:r>
+            <a:r>
+              <a:rPr lang="en-US" sz="2900" spc="-116" dirty="0">
+                <a:solidFill>
+                  <a:srgbClr val="000000"/>
+                </a:solidFill>
+                <a:latin typeface="Canva Sans"/>
+                <a:ea typeface="Canva Sans"/>
+                <a:cs typeface="Canva Sans"/>
+                <a:sym typeface="Canva Sans"/>
+              </a:rPr>
+              <a:t> </a:t>
+            </a:r>
+            <a:r>
+              <a:rPr lang="en-US" sz="2900" spc="-116" dirty="0" err="1">
+                <a:solidFill>
+                  <a:srgbClr val="000000"/>
+                </a:solidFill>
+                <a:latin typeface="Canva Sans"/>
+                <a:ea typeface="Canva Sans"/>
+                <a:cs typeface="Canva Sans"/>
+                <a:sym typeface="Canva Sans"/>
+              </a:rPr>
+              <a:t>адаптувати</a:t>
+            </a:r>
+            <a:r>
+              <a:rPr lang="en-US" sz="2900" spc="-116" dirty="0">
+                <a:solidFill>
+                  <a:srgbClr val="000000"/>
+                </a:solidFill>
+                <a:latin typeface="Canva Sans"/>
+                <a:ea typeface="Canva Sans"/>
+                <a:cs typeface="Canva Sans"/>
+                <a:sym typeface="Canva Sans"/>
+              </a:rPr>
+              <a:t> </a:t>
+            </a:r>
+            <a:r>
+              <a:rPr lang="en-US" sz="2900" spc="-116" dirty="0" err="1">
+                <a:solidFill>
+                  <a:srgbClr val="000000"/>
+                </a:solidFill>
+                <a:latin typeface="Canva Sans"/>
+                <a:ea typeface="Canva Sans"/>
+                <a:cs typeface="Canva Sans"/>
+                <a:sym typeface="Canva Sans"/>
+              </a:rPr>
+              <a:t>під</a:t>
+            </a:r>
+            <a:r>
+              <a:rPr lang="en-US" sz="2900" spc="-116" dirty="0">
+                <a:solidFill>
+                  <a:srgbClr val="000000"/>
+                </a:solidFill>
+                <a:latin typeface="Canva Sans"/>
+                <a:ea typeface="Canva Sans"/>
+                <a:cs typeface="Canva Sans"/>
+                <a:sym typeface="Canva Sans"/>
+              </a:rPr>
+              <a:t> </a:t>
+            </a:r>
+            <a:r>
+              <a:rPr lang="en-US" sz="2900" spc="-116" dirty="0" err="1">
+                <a:solidFill>
+                  <a:srgbClr val="000000"/>
+                </a:solidFill>
+                <a:latin typeface="Canva Sans"/>
+                <a:ea typeface="Canva Sans"/>
+                <a:cs typeface="Canva Sans"/>
+                <a:sym typeface="Canva Sans"/>
+              </a:rPr>
+              <a:t>різні</a:t>
+            </a:r>
+            <a:r>
+              <a:rPr lang="en-US" sz="2900" spc="-116" dirty="0">
+                <a:solidFill>
+                  <a:srgbClr val="000000"/>
+                </a:solidFill>
+                <a:latin typeface="Canva Sans"/>
+                <a:ea typeface="Canva Sans"/>
+                <a:cs typeface="Canva Sans"/>
+                <a:sym typeface="Canva Sans"/>
+              </a:rPr>
+              <a:t> </a:t>
+            </a:r>
+            <a:r>
+              <a:rPr lang="en-US" sz="2900" spc="-116" dirty="0" err="1">
+                <a:solidFill>
+                  <a:srgbClr val="000000"/>
+                </a:solidFill>
+                <a:latin typeface="Canva Sans"/>
+                <a:ea typeface="Canva Sans"/>
+                <a:cs typeface="Canva Sans"/>
+                <a:sym typeface="Canva Sans"/>
+              </a:rPr>
+              <a:t>ринки</a:t>
+            </a:r>
+            <a:r>
+              <a:rPr lang="en-US" sz="2900" spc="-116" dirty="0">
+                <a:solidFill>
+                  <a:srgbClr val="000000"/>
+                </a:solidFill>
+                <a:latin typeface="Canva Sans"/>
+                <a:ea typeface="Canva Sans"/>
+                <a:cs typeface="Canva Sans"/>
+                <a:sym typeface="Canva Sans"/>
+              </a:rPr>
+              <a:t> </a:t>
+            </a:r>
+            <a:r>
+              <a:rPr lang="en-US" sz="2900" spc="-116" dirty="0" err="1">
+                <a:solidFill>
+                  <a:srgbClr val="000000"/>
+                </a:solidFill>
+                <a:latin typeface="Canva Sans"/>
+                <a:ea typeface="Canva Sans"/>
+                <a:cs typeface="Canva Sans"/>
+                <a:sym typeface="Canva Sans"/>
+              </a:rPr>
+              <a:t>та</a:t>
+            </a:r>
+            <a:r>
+              <a:rPr lang="en-US" sz="2900" spc="-116" dirty="0">
+                <a:solidFill>
+                  <a:srgbClr val="000000"/>
+                </a:solidFill>
+                <a:latin typeface="Canva Sans"/>
+                <a:ea typeface="Canva Sans"/>
+                <a:cs typeface="Canva Sans"/>
+                <a:sym typeface="Canva Sans"/>
+              </a:rPr>
+              <a:t> </a:t>
+            </a:r>
+            <a:r>
+              <a:rPr lang="en-US" sz="2900" spc="-116" dirty="0" err="1">
+                <a:solidFill>
+                  <a:srgbClr val="000000"/>
+                </a:solidFill>
+                <a:latin typeface="Canva Sans"/>
+                <a:ea typeface="Canva Sans"/>
+                <a:cs typeface="Canva Sans"/>
+                <a:sym typeface="Canva Sans"/>
+              </a:rPr>
+              <a:t>потреби</a:t>
+            </a:r>
+            <a:r>
+              <a:rPr lang="en-US" sz="2900" spc="-116" dirty="0">
+                <a:solidFill>
+                  <a:srgbClr val="000000"/>
+                </a:solidFill>
+                <a:latin typeface="Canva Sans"/>
+                <a:ea typeface="Canva Sans"/>
+                <a:cs typeface="Canva Sans"/>
+                <a:sym typeface="Canva Sans"/>
+              </a:rPr>
+              <a:t> </a:t>
+            </a:r>
+            <a:r>
+              <a:rPr lang="en-US" sz="2900" spc="-116" dirty="0" err="1">
+                <a:solidFill>
+                  <a:srgbClr val="000000"/>
+                </a:solidFill>
+                <a:latin typeface="Canva Sans"/>
+                <a:ea typeface="Canva Sans"/>
+                <a:cs typeface="Canva Sans"/>
+                <a:sym typeface="Canva Sans"/>
+              </a:rPr>
+              <a:t>користувачів</a:t>
+            </a:r>
+            <a:r>
+              <a:rPr lang="en-US" sz="2900" spc="-116" dirty="0">
+                <a:solidFill>
+                  <a:srgbClr val="000000"/>
+                </a:solidFill>
+                <a:latin typeface="Canva Sans"/>
+                <a:ea typeface="Canva Sans"/>
+                <a:cs typeface="Canva Sans"/>
+                <a:sym typeface="Canva Sans"/>
+              </a:rPr>
+              <a:t>, </a:t>
+            </a:r>
+            <a:r>
+              <a:rPr lang="en-US" sz="2900" spc="-116" dirty="0" err="1">
+                <a:solidFill>
+                  <a:srgbClr val="000000"/>
+                </a:solidFill>
+                <a:latin typeface="Canva Sans"/>
+                <a:ea typeface="Canva Sans"/>
+                <a:cs typeface="Canva Sans"/>
+                <a:sym typeface="Canva Sans"/>
+              </a:rPr>
+              <a:t>що</a:t>
+            </a:r>
+            <a:r>
+              <a:rPr lang="en-US" sz="2900" spc="-116" dirty="0">
+                <a:solidFill>
+                  <a:srgbClr val="000000"/>
+                </a:solidFill>
+                <a:latin typeface="Canva Sans"/>
+                <a:ea typeface="Canva Sans"/>
+                <a:cs typeface="Canva Sans"/>
+                <a:sym typeface="Canva Sans"/>
+              </a:rPr>
+              <a:t> </a:t>
+            </a:r>
+            <a:r>
+              <a:rPr lang="en-US" sz="2900" spc="-116" dirty="0" err="1">
+                <a:solidFill>
+                  <a:srgbClr val="000000"/>
+                </a:solidFill>
+                <a:latin typeface="Canva Sans"/>
+                <a:ea typeface="Canva Sans"/>
+                <a:cs typeface="Canva Sans"/>
+                <a:sym typeface="Canva Sans"/>
+              </a:rPr>
+              <a:t>забезпечує</a:t>
+            </a:r>
+            <a:r>
+              <a:rPr lang="en-US" sz="2900" spc="-116" dirty="0">
+                <a:solidFill>
+                  <a:srgbClr val="000000"/>
+                </a:solidFill>
+                <a:latin typeface="Canva Sans"/>
+                <a:ea typeface="Canva Sans"/>
+                <a:cs typeface="Canva Sans"/>
+                <a:sym typeface="Canva Sans"/>
+              </a:rPr>
+              <a:t> </a:t>
+            </a:r>
+            <a:r>
+              <a:rPr lang="en-US" sz="2900" spc="-116" dirty="0" err="1">
+                <a:solidFill>
+                  <a:srgbClr val="000000"/>
+                </a:solidFill>
+                <a:latin typeface="Canva Sans"/>
+                <a:ea typeface="Canva Sans"/>
+                <a:cs typeface="Canva Sans"/>
+                <a:sym typeface="Canva Sans"/>
+              </a:rPr>
+              <a:t>перспективи</a:t>
+            </a:r>
+            <a:r>
+              <a:rPr lang="en-US" sz="2900" spc="-116" dirty="0">
+                <a:solidFill>
+                  <a:srgbClr val="000000"/>
+                </a:solidFill>
+                <a:latin typeface="Canva Sans"/>
+                <a:ea typeface="Canva Sans"/>
+                <a:cs typeface="Canva Sans"/>
+                <a:sym typeface="Canva Sans"/>
+              </a:rPr>
+              <a:t> </a:t>
+            </a:r>
+            <a:r>
+              <a:rPr lang="en-US" sz="2900" spc="-116" dirty="0" err="1">
+                <a:solidFill>
+                  <a:srgbClr val="000000"/>
+                </a:solidFill>
+                <a:latin typeface="Canva Sans"/>
+                <a:ea typeface="Canva Sans"/>
+                <a:cs typeface="Canva Sans"/>
+                <a:sym typeface="Canva Sans"/>
+              </a:rPr>
+              <a:t>розвитку</a:t>
+            </a:r>
+            <a:r>
+              <a:rPr lang="en-US" sz="2900" spc="-116" dirty="0">
+                <a:solidFill>
+                  <a:srgbClr val="000000"/>
+                </a:solidFill>
+                <a:latin typeface="Canva Sans"/>
+                <a:ea typeface="Canva Sans"/>
+                <a:cs typeface="Canva Sans"/>
+                <a:sym typeface="Canva Sans"/>
+              </a:rPr>
+              <a:t>.</a:t>
+            </a:r>
+          </a:p>
+          <a:p>
+            <a:pPr algn="ctr">
               <a:lnSpc>
-                <a:spcPts val="3080"/>
+                <a:spcPts val="4060"/>
               </a:lnSpc>
+              <a:spcBef>
+                <a:spcPct val="0"/>
+              </a:spcBef>
             </a:pPr>
-            <a:r>
-              <a:rPr lang="en-US" sz="2200" spc="-44">
-                <a:solidFill>
-                  <a:srgbClr val="36211B"/>
-                </a:solidFill>
-                <a:latin typeface="Canva Sans"/>
-                <a:ea typeface="Canva Sans"/>
-                <a:cs typeface="Canva Sans"/>
-                <a:sym typeface="Canva Sans"/>
-              </a:rPr>
-              <a:t>На відміну від інших сервісів, наш пропонує комплексний підхід до харчування, поєднуючи персоналізацію, зручність та ефективність. Персоналізований підхід – враховує дієтичні потреби, споживання калорій тощо. Гнучке планування харчування – дозволяє користувачам змінювати страви та коригувати меню відповідно до уподобань. Відстеження запасів – унікальна функція, яка допомагає контролювати доступні інгредієнти та уникати непотрібних витрат. Аналіз харчової цінності – автоматично розраховує калорії та поживні речовини для кожного рецепту.</a:t>
-            </a:r>
-          </a:p>
-          <a:p>
-            <a:pPr algn="l">
-              <a:lnSpc>
-                <a:spcPts val="3080"/>
-              </a:lnSpc>
-            </a:pPr>
-            <a:endParaRPr lang="en-US" sz="2200" spc="-44">
+            <a:endParaRPr lang="en-US" sz="2900" spc="-116" dirty="0">
               <a:solidFill>
-                <a:srgbClr val="36211B"/>
+                <a:srgbClr val="000000"/>
               </a:solidFill>
               <a:latin typeface="Canva Sans"/>
               <a:ea typeface="Canva Sans"/>
@@ -6098,138 +7132,22 @@
           </a:p>
         </p:txBody>
       </p:sp>
-      <p:sp>
-        <p:nvSpPr>
-          <p:cNvPr id="9" name="TextBox 9"/>
-          <p:cNvSpPr txBox="1"/>
-          <p:nvPr/>
-        </p:nvSpPr>
-        <p:spPr>
-          <a:xfrm>
-            <a:off x="1028700" y="981075"/>
-            <a:ext cx="398364" cy="405765"/>
-          </a:xfrm>
-          <a:prstGeom prst="rect">
-            <a:avLst/>
-          </a:prstGeom>
-        </p:spPr>
-        <p:txBody>
-          <a:bodyPr lIns="0" tIns="0" rIns="0" bIns="0" rtlCol="0" anchor="t">
-            <a:spAutoFit/>
-          </a:bodyPr>
-          <a:lstStyle/>
-          <a:p>
-            <a:pPr algn="l">
-              <a:lnSpc>
-                <a:spcPts val="3359"/>
-              </a:lnSpc>
-            </a:pPr>
-            <a:r>
-              <a:rPr lang="en-US" sz="2400" spc="-96">
-                <a:solidFill>
-                  <a:srgbClr val="36211B"/>
-                </a:solidFill>
-                <a:latin typeface="IBM Plex Serif"/>
-                <a:ea typeface="IBM Plex Serif"/>
-                <a:cs typeface="IBM Plex Serif"/>
-                <a:sym typeface="IBM Plex Serif"/>
-              </a:rPr>
-              <a:t>1</a:t>
-            </a:r>
-          </a:p>
-        </p:txBody>
-      </p:sp>
-      <p:sp>
-        <p:nvSpPr>
-          <p:cNvPr id="10" name="TextBox 10"/>
-          <p:cNvSpPr txBox="1"/>
-          <p:nvPr/>
-        </p:nvSpPr>
-        <p:spPr>
-          <a:xfrm>
-            <a:off x="6905362" y="981075"/>
-            <a:ext cx="398364" cy="405765"/>
-          </a:xfrm>
-          <a:prstGeom prst="rect">
-            <a:avLst/>
-          </a:prstGeom>
-        </p:spPr>
-        <p:txBody>
-          <a:bodyPr lIns="0" tIns="0" rIns="0" bIns="0" rtlCol="0" anchor="t">
-            <a:spAutoFit/>
-          </a:bodyPr>
-          <a:lstStyle/>
-          <a:p>
-            <a:pPr algn="l">
-              <a:lnSpc>
-                <a:spcPts val="3359"/>
-              </a:lnSpc>
-            </a:pPr>
-            <a:r>
-              <a:rPr lang="en-US" sz="2400" spc="-96">
-                <a:solidFill>
-                  <a:srgbClr val="36211B"/>
-                </a:solidFill>
-                <a:latin typeface="IBM Plex Serif"/>
-                <a:ea typeface="IBM Plex Serif"/>
-                <a:cs typeface="IBM Plex Serif"/>
-                <a:sym typeface="IBM Plex Serif"/>
-              </a:rPr>
-              <a:t>2</a:t>
-            </a:r>
-          </a:p>
-        </p:txBody>
-      </p:sp>
-      <p:sp>
-        <p:nvSpPr>
-          <p:cNvPr id="11" name="TextBox 11"/>
-          <p:cNvSpPr txBox="1"/>
-          <p:nvPr/>
-        </p:nvSpPr>
-        <p:spPr>
-          <a:xfrm>
-            <a:off x="12582843" y="981075"/>
-            <a:ext cx="398364" cy="405765"/>
-          </a:xfrm>
-          <a:prstGeom prst="rect">
-            <a:avLst/>
-          </a:prstGeom>
-        </p:spPr>
-        <p:txBody>
-          <a:bodyPr lIns="0" tIns="0" rIns="0" bIns="0" rtlCol="0" anchor="t">
-            <a:spAutoFit/>
-          </a:bodyPr>
-          <a:lstStyle/>
-          <a:p>
-            <a:pPr algn="l">
-              <a:lnSpc>
-                <a:spcPts val="3359"/>
-              </a:lnSpc>
-            </a:pPr>
-            <a:r>
-              <a:rPr lang="en-US" sz="2400" spc="-96">
-                <a:solidFill>
-                  <a:srgbClr val="36211B"/>
-                </a:solidFill>
-                <a:latin typeface="IBM Plex Serif"/>
-                <a:ea typeface="IBM Plex Serif"/>
-                <a:cs typeface="IBM Plex Serif"/>
-                <a:sym typeface="IBM Plex Serif"/>
-              </a:rPr>
-              <a:t>3</a:t>
-            </a:r>
-          </a:p>
-        </p:txBody>
-      </p:sp>
     </p:spTree>
   </p:cSld>
   <p:clrMapOvr>
     <a:masterClrMapping/>
   </p:clrMapOvr>
+  <p:timing>
+    <p:tnLst>
+      <p:par>
+        <p:cTn id="1" dur="indefinite" restart="never" nodeType="tmRoot"/>
+      </p:par>
+    </p:tnLst>
+  </p:timing>
 </p:sld>
 </file>
 
-<file path=ppt/slides/slide3.xml><?xml version="1.0" encoding="utf-8"?>
+<file path=ppt/slides/slide4.xml><?xml version="1.0" encoding="utf-8"?>
 <p:sld xmlns:a="http://schemas.openxmlformats.org/drawingml/2006/main" xmlns:r="http://schemas.openxmlformats.org/officeDocument/2006/relationships" xmlns:p="http://schemas.openxmlformats.org/presentationml/2006/main">
   <p:cSld>
     <p:bg>
@@ -6308,518 +7226,6 @@
         </p:nvSpPr>
         <p:spPr>
           <a:xfrm>
-            <a:off x="7038796" y="1231343"/>
-            <a:ext cx="4210407" cy="679450"/>
-          </a:xfrm>
-          <a:prstGeom prst="rect">
-            <a:avLst/>
-          </a:prstGeom>
-        </p:spPr>
-        <p:txBody>
-          <a:bodyPr lIns="0" tIns="0" rIns="0" bIns="0" rtlCol="0" anchor="t">
-            <a:spAutoFit/>
-          </a:bodyPr>
-          <a:lstStyle/>
-          <a:p>
-            <a:pPr algn="ctr">
-              <a:lnSpc>
-                <a:spcPts val="5599"/>
-              </a:lnSpc>
-              <a:spcBef>
-                <a:spcPct val="0"/>
-              </a:spcBef>
-            </a:pPr>
-            <a:r>
-              <a:rPr lang="en-US" sz="3999" i="1" spc="-159">
-                <a:solidFill>
-                  <a:srgbClr val="000000"/>
-                </a:solidFill>
-                <a:latin typeface="IBM Plex Serif Italics"/>
-                <a:ea typeface="IBM Plex Serif Italics"/>
-                <a:cs typeface="IBM Plex Serif Italics"/>
-                <a:sym typeface="IBM Plex Serif Italics"/>
-              </a:rPr>
-              <a:t>Цінність продукту </a:t>
-            </a:r>
-          </a:p>
-        </p:txBody>
-      </p:sp>
-      <p:sp>
-        <p:nvSpPr>
-          <p:cNvPr id="4" name="AutoShape 4"/>
-          <p:cNvSpPr/>
-          <p:nvPr/>
-        </p:nvSpPr>
-        <p:spPr>
-          <a:xfrm>
-            <a:off x="1028700" y="3038813"/>
-            <a:ext cx="1391580" cy="0"/>
-          </a:xfrm>
-          <a:prstGeom prst="line">
-            <a:avLst/>
-          </a:prstGeom>
-          <a:ln w="38100" cap="flat">
-            <a:solidFill>
-              <a:srgbClr val="000000"/>
-            </a:solidFill>
-            <a:prstDash val="solid"/>
-            <a:headEnd type="none" w="sm" len="sm"/>
-            <a:tailEnd type="triangle" w="lg" len="med"/>
-          </a:ln>
-        </p:spPr>
-      </p:sp>
-      <p:sp>
-        <p:nvSpPr>
-          <p:cNvPr id="5" name="TextBox 5"/>
-          <p:cNvSpPr txBox="1"/>
-          <p:nvPr/>
-        </p:nvSpPr>
-        <p:spPr>
-          <a:xfrm>
-            <a:off x="2048866" y="2784963"/>
-            <a:ext cx="15210434" cy="1526540"/>
-          </a:xfrm>
-          <a:prstGeom prst="rect">
-            <a:avLst/>
-          </a:prstGeom>
-        </p:spPr>
-        <p:txBody>
-          <a:bodyPr lIns="0" tIns="0" rIns="0" bIns="0" rtlCol="0" anchor="t">
-            <a:spAutoFit/>
-          </a:bodyPr>
-          <a:lstStyle/>
-          <a:p>
-            <a:pPr algn="ctr">
-              <a:lnSpc>
-                <a:spcPts val="4060"/>
-              </a:lnSpc>
-              <a:spcBef>
-                <a:spcPct val="0"/>
-              </a:spcBef>
-            </a:pPr>
-            <a:r>
-              <a:rPr lang="en-US" sz="2900" spc="-116">
-                <a:solidFill>
-                  <a:srgbClr val="000000"/>
-                </a:solidFill>
-                <a:latin typeface="Canva Sans"/>
-                <a:ea typeface="Canva Sans"/>
-                <a:cs typeface="Canva Sans"/>
-                <a:sym typeface="Canva Sans"/>
-              </a:rPr>
-              <a:t>    </a:t>
-            </a:r>
-            <a:r>
-              <a:rPr lang="en-US" sz="2900" b="1" spc="-116">
-                <a:solidFill>
-                  <a:srgbClr val="000000"/>
-                </a:solidFill>
-                <a:latin typeface="Canva Sans Bold"/>
-                <a:ea typeface="Canva Sans Bold"/>
-                <a:cs typeface="Canva Sans Bold"/>
-                <a:sym typeface="Canva Sans Bold"/>
-              </a:rPr>
-              <a:t>Економія часу: </a:t>
-            </a:r>
-            <a:r>
-              <a:rPr lang="en-US" sz="2900" spc="-116">
-                <a:solidFill>
-                  <a:srgbClr val="000000"/>
-                </a:solidFill>
-                <a:latin typeface="Canva Sans"/>
-                <a:ea typeface="Canva Sans"/>
-                <a:cs typeface="Canva Sans"/>
-                <a:sym typeface="Canva Sans"/>
-              </a:rPr>
-              <a:t>Автоматизоване планування харчування усуває необхідність вручну підбирати рецепти та складати меню.</a:t>
-            </a:r>
-          </a:p>
-          <a:p>
-            <a:pPr algn="ctr">
-              <a:lnSpc>
-                <a:spcPts val="4060"/>
-              </a:lnSpc>
-              <a:spcBef>
-                <a:spcPct val="0"/>
-              </a:spcBef>
-            </a:pPr>
-            <a:endParaRPr lang="en-US" sz="2900" spc="-116">
-              <a:solidFill>
-                <a:srgbClr val="000000"/>
-              </a:solidFill>
-              <a:latin typeface="Canva Sans"/>
-              <a:ea typeface="Canva Sans"/>
-              <a:cs typeface="Canva Sans"/>
-              <a:sym typeface="Canva Sans"/>
-            </a:endParaRPr>
-          </a:p>
-        </p:txBody>
-      </p:sp>
-      <p:sp>
-        <p:nvSpPr>
-          <p:cNvPr id="6" name="AutoShape 6"/>
-          <p:cNvSpPr/>
-          <p:nvPr/>
-        </p:nvSpPr>
-        <p:spPr>
-          <a:xfrm>
-            <a:off x="1028700" y="4311503"/>
-            <a:ext cx="1391580" cy="0"/>
-          </a:xfrm>
-          <a:prstGeom prst="line">
-            <a:avLst/>
-          </a:prstGeom>
-          <a:ln w="38100" cap="flat">
-            <a:solidFill>
-              <a:srgbClr val="000000"/>
-            </a:solidFill>
-            <a:prstDash val="solid"/>
-            <a:headEnd type="none" w="sm" len="sm"/>
-            <a:tailEnd type="triangle" w="lg" len="med"/>
-          </a:ln>
-        </p:spPr>
-      </p:sp>
-      <p:sp>
-        <p:nvSpPr>
-          <p:cNvPr id="7" name="TextBox 7"/>
-          <p:cNvSpPr txBox="1"/>
-          <p:nvPr/>
-        </p:nvSpPr>
-        <p:spPr>
-          <a:xfrm>
-            <a:off x="2420280" y="4065059"/>
-            <a:ext cx="14587238" cy="1012190"/>
-          </a:xfrm>
-          <a:prstGeom prst="rect">
-            <a:avLst/>
-          </a:prstGeom>
-        </p:spPr>
-        <p:txBody>
-          <a:bodyPr lIns="0" tIns="0" rIns="0" bIns="0" rtlCol="0" anchor="t">
-            <a:spAutoFit/>
-          </a:bodyPr>
-          <a:lstStyle/>
-          <a:p>
-            <a:pPr algn="ctr">
-              <a:lnSpc>
-                <a:spcPts val="4060"/>
-              </a:lnSpc>
-              <a:spcBef>
-                <a:spcPct val="0"/>
-              </a:spcBef>
-            </a:pPr>
-            <a:r>
-              <a:rPr lang="en-US" sz="2900" b="1" spc="-116">
-                <a:solidFill>
-                  <a:srgbClr val="000000"/>
-                </a:solidFill>
-                <a:latin typeface="Canva Sans Bold"/>
-                <a:ea typeface="Canva Sans Bold"/>
-                <a:cs typeface="Canva Sans Bold"/>
-                <a:sym typeface="Canva Sans Bold"/>
-              </a:rPr>
-              <a:t>Монетизація:</a:t>
-            </a:r>
-            <a:r>
-              <a:rPr lang="en-US" sz="2900" spc="-116">
-                <a:solidFill>
-                  <a:srgbClr val="000000"/>
-                </a:solidFill>
-                <a:latin typeface="Canva Sans"/>
-                <a:ea typeface="Canva Sans"/>
-                <a:cs typeface="Canva Sans"/>
-                <a:sym typeface="Canva Sans"/>
-              </a:rPr>
-              <a:t> Можливість впровадження преміум-функцій, підписок або реклами партнерських сервісів (рецепти, кулінарні бренди тощо).</a:t>
-            </a:r>
-          </a:p>
-        </p:txBody>
-      </p:sp>
-      <p:sp>
-        <p:nvSpPr>
-          <p:cNvPr id="8" name="AutoShape 8"/>
-          <p:cNvSpPr/>
-          <p:nvPr/>
-        </p:nvSpPr>
-        <p:spPr>
-          <a:xfrm>
-            <a:off x="1028700" y="5720454"/>
-            <a:ext cx="1391580" cy="0"/>
-          </a:xfrm>
-          <a:prstGeom prst="line">
-            <a:avLst/>
-          </a:prstGeom>
-          <a:ln w="38100" cap="flat">
-            <a:solidFill>
-              <a:srgbClr val="000000"/>
-            </a:solidFill>
-            <a:prstDash val="solid"/>
-            <a:headEnd type="none" w="sm" len="sm"/>
-            <a:tailEnd type="triangle" w="lg" len="med"/>
-          </a:ln>
-        </p:spPr>
-      </p:sp>
-      <p:sp>
-        <p:nvSpPr>
-          <p:cNvPr id="9" name="TextBox 9"/>
-          <p:cNvSpPr txBox="1"/>
-          <p:nvPr/>
-        </p:nvSpPr>
-        <p:spPr>
-          <a:xfrm>
-            <a:off x="2420280" y="5429205"/>
-            <a:ext cx="14839020" cy="1526540"/>
-          </a:xfrm>
-          <a:prstGeom prst="rect">
-            <a:avLst/>
-          </a:prstGeom>
-        </p:spPr>
-        <p:txBody>
-          <a:bodyPr lIns="0" tIns="0" rIns="0" bIns="0" rtlCol="0" anchor="t">
-            <a:spAutoFit/>
-          </a:bodyPr>
-          <a:lstStyle/>
-          <a:p>
-            <a:pPr algn="ctr">
-              <a:lnSpc>
-                <a:spcPts val="4060"/>
-              </a:lnSpc>
-              <a:spcBef>
-                <a:spcPct val="0"/>
-              </a:spcBef>
-            </a:pPr>
-            <a:r>
-              <a:rPr lang="en-US" sz="2900" b="1" spc="-116">
-                <a:solidFill>
-                  <a:srgbClr val="000000"/>
-                </a:solidFill>
-                <a:latin typeface="Canva Sans Bold"/>
-                <a:ea typeface="Canva Sans Bold"/>
-                <a:cs typeface="Canva Sans Bold"/>
-                <a:sym typeface="Canva Sans Bold"/>
-              </a:rPr>
-              <a:t>Партнерські інтеграції:</a:t>
-            </a:r>
-            <a:r>
-              <a:rPr lang="en-US" sz="2900" spc="-116">
-                <a:solidFill>
-                  <a:srgbClr val="000000"/>
-                </a:solidFill>
-                <a:latin typeface="Canva Sans"/>
-                <a:ea typeface="Canva Sans"/>
-                <a:cs typeface="Canva Sans"/>
-                <a:sym typeface="Canva Sans"/>
-              </a:rPr>
-              <a:t> Співпраця з платформами доставки їжі або продуктів може розширити функціональність та збільшити дохід.</a:t>
-            </a:r>
-          </a:p>
-          <a:p>
-            <a:pPr algn="ctr">
-              <a:lnSpc>
-                <a:spcPts val="4060"/>
-              </a:lnSpc>
-              <a:spcBef>
-                <a:spcPct val="0"/>
-              </a:spcBef>
-            </a:pPr>
-            <a:endParaRPr lang="en-US" sz="2900" spc="-116">
-              <a:solidFill>
-                <a:srgbClr val="000000"/>
-              </a:solidFill>
-              <a:latin typeface="Canva Sans"/>
-              <a:ea typeface="Canva Sans"/>
-              <a:cs typeface="Canva Sans"/>
-              <a:sym typeface="Canva Sans"/>
-            </a:endParaRPr>
-          </a:p>
-        </p:txBody>
-      </p:sp>
-      <p:sp>
-        <p:nvSpPr>
-          <p:cNvPr id="10" name="AutoShape 10"/>
-          <p:cNvSpPr/>
-          <p:nvPr/>
-        </p:nvSpPr>
-        <p:spPr>
-          <a:xfrm>
-            <a:off x="1028700" y="7318698"/>
-            <a:ext cx="1391580" cy="0"/>
-          </a:xfrm>
-          <a:prstGeom prst="line">
-            <a:avLst/>
-          </a:prstGeom>
-          <a:ln w="38100" cap="flat">
-            <a:solidFill>
-              <a:srgbClr val="000000"/>
-            </a:solidFill>
-            <a:prstDash val="solid"/>
-            <a:headEnd type="none" w="sm" len="sm"/>
-            <a:tailEnd type="triangle" w="lg" len="med"/>
-          </a:ln>
-        </p:spPr>
-      </p:sp>
-      <p:sp>
-        <p:nvSpPr>
-          <p:cNvPr id="11" name="TextBox 11"/>
-          <p:cNvSpPr txBox="1"/>
-          <p:nvPr/>
-        </p:nvSpPr>
-        <p:spPr>
-          <a:xfrm>
-            <a:off x="2719073" y="7047991"/>
-            <a:ext cx="14540227" cy="1526540"/>
-          </a:xfrm>
-          <a:prstGeom prst="rect">
-            <a:avLst/>
-          </a:prstGeom>
-        </p:spPr>
-        <p:txBody>
-          <a:bodyPr lIns="0" tIns="0" rIns="0" bIns="0" rtlCol="0" anchor="t">
-            <a:spAutoFit/>
-          </a:bodyPr>
-          <a:lstStyle/>
-          <a:p>
-            <a:pPr algn="ctr">
-              <a:lnSpc>
-                <a:spcPts val="4060"/>
-              </a:lnSpc>
-              <a:spcBef>
-                <a:spcPct val="0"/>
-              </a:spcBef>
-            </a:pPr>
-            <a:r>
-              <a:rPr lang="en-US" sz="2900" b="1" spc="-116">
-                <a:solidFill>
-                  <a:srgbClr val="000000"/>
-                </a:solidFill>
-                <a:latin typeface="Canva Sans Bold"/>
-                <a:ea typeface="Canva Sans Bold"/>
-                <a:cs typeface="Canva Sans Bold"/>
-                <a:sym typeface="Canva Sans Bold"/>
-              </a:rPr>
-              <a:t>Масштабованість: </a:t>
-            </a:r>
-            <a:r>
-              <a:rPr lang="en-US" sz="2900" spc="-116">
-                <a:solidFill>
-                  <a:srgbClr val="000000"/>
-                </a:solidFill>
-                <a:latin typeface="Canva Sans"/>
-                <a:ea typeface="Canva Sans"/>
-                <a:cs typeface="Canva Sans"/>
-                <a:sym typeface="Canva Sans"/>
-              </a:rPr>
-              <a:t>Проєкт можна адаптувати під різні ринки та потреби користувачів, що забезпечує перспективи розвитку.</a:t>
-            </a:r>
-          </a:p>
-          <a:p>
-            <a:pPr algn="ctr">
-              <a:lnSpc>
-                <a:spcPts val="4060"/>
-              </a:lnSpc>
-              <a:spcBef>
-                <a:spcPct val="0"/>
-              </a:spcBef>
-            </a:pPr>
-            <a:endParaRPr lang="en-US" sz="2900" spc="-116">
-              <a:solidFill>
-                <a:srgbClr val="000000"/>
-              </a:solidFill>
-              <a:latin typeface="Canva Sans"/>
-              <a:ea typeface="Canva Sans"/>
-              <a:cs typeface="Canva Sans"/>
-              <a:sym typeface="Canva Sans"/>
-            </a:endParaRPr>
-          </a:p>
-        </p:txBody>
-      </p:sp>
-    </p:spTree>
-  </p:cSld>
-  <p:clrMapOvr>
-    <a:masterClrMapping/>
-  </p:clrMapOvr>
-</p:sld>
-</file>
-
-<file path=ppt/slides/slide4.xml><?xml version="1.0" encoding="utf-8"?>
-<p:sld xmlns:a="http://schemas.openxmlformats.org/drawingml/2006/main" xmlns:r="http://schemas.openxmlformats.org/officeDocument/2006/relationships" xmlns:p="http://schemas.openxmlformats.org/presentationml/2006/main">
-  <p:cSld>
-    <p:bg>
-      <p:bgPr>
-        <a:solidFill>
-          <a:srgbClr val="E8E6E3"/>
-        </a:solidFill>
-        <a:effectLst/>
-      </p:bgPr>
-    </p:bg>
-    <p:spTree>
-      <p:nvGrpSpPr>
-        <p:cNvPr id="1" name=""/>
-        <p:cNvGrpSpPr/>
-        <p:nvPr/>
-      </p:nvGrpSpPr>
-      <p:grpSpPr>
-        <a:xfrm>
-          <a:off x="0" y="0"/>
-          <a:ext cx="0" cy="0"/>
-          <a:chOff x="0" y="0"/>
-          <a:chExt cx="0" cy="0"/>
-        </a:xfrm>
-      </p:grpSpPr>
-      <p:sp>
-        <p:nvSpPr>
-          <p:cNvPr id="2" name="Freeform 2"/>
-          <p:cNvSpPr/>
-          <p:nvPr/>
-        </p:nvSpPr>
-        <p:spPr>
-          <a:xfrm>
-            <a:off x="0" y="0"/>
-            <a:ext cx="18288000" cy="376223"/>
-          </a:xfrm>
-          <a:custGeom>
-            <a:avLst/>
-            <a:gdLst/>
-            <a:ahLst/>
-            <a:cxnLst/>
-            <a:rect l="l" t="t" r="r" b="b"/>
-            <a:pathLst>
-              <a:path w="18288000" h="376223">
-                <a:moveTo>
-                  <a:pt x="0" y="0"/>
-                </a:moveTo>
-                <a:lnTo>
-                  <a:pt x="18288000" y="0"/>
-                </a:lnTo>
-                <a:lnTo>
-                  <a:pt x="18288000" y="376223"/>
-                </a:lnTo>
-                <a:lnTo>
-                  <a:pt x="0" y="376223"/>
-                </a:lnTo>
-                <a:lnTo>
-                  <a:pt x="0" y="0"/>
-                </a:lnTo>
-                <a:close/>
-              </a:path>
-            </a:pathLst>
-          </a:custGeom>
-          <a:blipFill>
-            <a:blip r:embed="rId2"/>
-            <a:stretch>
-              <a:fillRect t="-1531929" b="-1102351"/>
-            </a:stretch>
-          </a:blipFill>
-        </p:spPr>
-      </p:sp>
-      <p:sp>
-        <p:nvSpPr>
-          <p:cNvPr id="3" name="TextBox 3"/>
-          <p:cNvSpPr txBox="1"/>
-          <p:nvPr/>
-        </p:nvSpPr>
-        <p:spPr>
-          <a:xfrm>
             <a:off x="1028700" y="2726023"/>
             <a:ext cx="16230600" cy="6155690"/>
           </a:xfrm>
@@ -7033,6 +7439,13 @@
   <p:clrMapOvr>
     <a:masterClrMapping/>
   </p:clrMapOvr>
+  <p:timing>
+    <p:tnLst>
+      <p:par>
+        <p:cTn id="1" dur="indefinite" restart="never" nodeType="tmRoot"/>
+      </p:par>
+    </p:tnLst>
+  </p:timing>
 </p:sld>
 </file>
 
@@ -7156,6 +7569,13 @@
   <p:clrMapOvr>
     <a:masterClrMapping/>
   </p:clrMapOvr>
+  <p:timing>
+    <p:tnLst>
+      <p:par>
+        <p:cTn id="1" dur="indefinite" restart="never" nodeType="tmRoot"/>
+      </p:par>
+    </p:tnLst>
+  </p:timing>
 </p:sld>
 </file>
 
@@ -8035,6 +8455,13 @@
   <p:clrMapOvr>
     <a:masterClrMapping/>
   </p:clrMapOvr>
+  <p:timing>
+    <p:tnLst>
+      <p:par>
+        <p:cTn id="1" dur="indefinite" restart="never" nodeType="tmRoot"/>
+      </p:par>
+    </p:tnLst>
+  </p:timing>
 </p:sld>
 </file>
 
@@ -9450,6 +9877,13 @@
   <p:clrMapOvr>
     <a:masterClrMapping/>
   </p:clrMapOvr>
+  <p:timing>
+    <p:tnLst>
+      <p:par>
+        <p:cTn id="1" dur="indefinite" restart="never" nodeType="tmRoot"/>
+      </p:par>
+    </p:tnLst>
+  </p:timing>
 </p:sld>
 </file>
 
@@ -10514,6 +10948,13 @@
   <p:clrMapOvr>
     <a:masterClrMapping/>
   </p:clrMapOvr>
+  <p:timing>
+    <p:tnLst>
+      <p:par>
+        <p:cTn id="1" dur="indefinite" restart="never" nodeType="tmRoot"/>
+      </p:par>
+    </p:tnLst>
+  </p:timing>
 </p:sld>
 </file>
 
@@ -10928,6 +11369,13 @@
   <p:clrMapOvr>
     <a:masterClrMapping/>
   </p:clrMapOvr>
+  <p:timing>
+    <p:tnLst>
+      <p:par>
+        <p:cTn id="1" dur="indefinite" restart="never" nodeType="tmRoot"/>
+      </p:par>
+    </p:tnLst>
+  </p:timing>
 </p:sld>
 </file>
 
